--- a/reports/MT_vs_GT_Deep_Dive.pptx
+++ b/reports/MT_vs_GT_Deep_Dive.pptx
@@ -11,6 +11,8 @@
     <p:sldId id="259" r:id="rIdSlide4"/>
     <p:sldId id="260" r:id="rIdSlide5"/>
     <p:sldId id="261" r:id="rIdSlide6"/>
+    <p:sldId id="262" r:id="rIdSlide7"/>
+    <p:sldId id="263" r:id="rIdSlide8"/>
   </p:sldIdLst>
   <p:sldSz cx="12191695" cy="6858000" type="screen16x9"/>
   <p:notesSz cx="6858000" cy="12191695"/>
@@ -3588,6 +3590,3142 @@
         </p:nvSpPr>
         <p:spPr>
           <a:xfrm>
+            <a:off x="548640" y="320040"/>
+            <a:ext cx="10972800" cy="548640"/>
+          </a:xfrm>
+          <a:prstGeom prst="rect">
+            <a:avLst/>
+          </a:prstGeom>
+          <a:noFill/>
+        </p:spPr>
+        <p:txBody>
+          <a:bodyPr wrap="square" anchor="t" lIns="0" tIns="0" rIns="0" bIns="0">
+            <a:noAutofit/>
+          </a:bodyPr>
+          <a:lstStyle/>
+          <a:p>
+            <a:pPr algn="l"/>
+            <a:r>
+              <a:rPr lang="en-US" sz="2600" b="1" dirty="0">
+                <a:solidFill>
+                  <a:srgbClr val="1A1A1A"/>
+                </a:solidFill>
+                <a:latin typeface="Cambria"/>
+              </a:rPr>
+              <a:t>Competitive Landscape — National Urban (Nielsen)</a:t>
+            </a:r>
+          </a:p>
+        </p:txBody>
+      </p:sp>
+      <p:sp>
+        <p:nvSpPr>
+          <p:cNvPr id="3" name="TextBox 3"/>
+          <p:cNvSpPr txBox="1"/>
+          <p:nvPr/>
+        </p:nvSpPr>
+        <p:spPr>
+          <a:xfrm>
+            <a:off x="548640" y="804672"/>
+            <a:ext cx="10972800" cy="411480"/>
+          </a:xfrm>
+          <a:prstGeom prst="rect">
+            <a:avLst/>
+          </a:prstGeom>
+          <a:noFill/>
+        </p:spPr>
+        <p:txBody>
+          <a:bodyPr wrap="square" anchor="t" lIns="0" tIns="0" rIns="0" bIns="0">
+            <a:noAutofit/>
+          </a:bodyPr>
+          <a:lstStyle/>
+          <a:p>
+            <a:pPr algn="l"/>
+            <a:r>
+              <a:rPr lang="en-US" sz="1200" i="1" dirty="0">
+                <a:solidFill>
+                  <a:srgbClr val="666666"/>
+                </a:solidFill>
+                <a:latin typeface="Calibri"/>
+              </a:rPr>
+              <a:t>Separate data source: total Urban MS Val vs named competitors, May'26 vintage (not the MT/GT panel in prior slides).</a:t>
+            </a:r>
+          </a:p>
+        </p:txBody>
+      </p:sp>
+      <p:sp>
+        <p:nvSpPr>
+          <p:cNvPr id="4" name="TextBox 4"/>
+          <p:cNvSpPr txBox="1"/>
+          <p:nvPr/>
+        </p:nvSpPr>
+        <p:spPr>
+          <a:xfrm>
+            <a:off x="548640" y="1325880"/>
+            <a:ext cx="5440680" cy="320040"/>
+          </a:xfrm>
+          <a:prstGeom prst="rect">
+            <a:avLst/>
+          </a:prstGeom>
+          <a:noFill/>
+        </p:spPr>
+        <p:txBody>
+          <a:bodyPr wrap="square" anchor="t" lIns="0" tIns="0" rIns="0" bIns="0">
+            <a:noAutofit/>
+          </a:bodyPr>
+          <a:lstStyle/>
+          <a:p>
+            <a:pPr algn="l"/>
+            <a:r>
+              <a:rPr lang="en-US" sz="1400" b="1" dirty="0">
+                <a:solidFill>
+                  <a:srgbClr val="6D2E46"/>
+                </a:solidFill>
+                <a:latin typeface="Calibri"/>
+              </a:rPr>
+              <a:t>Facewash — top competitors</a:t>
+            </a:r>
+          </a:p>
+        </p:txBody>
+      </p:sp>
+      <p:graphicFrame>
+        <p:nvGraphicFramePr>
+          <p:cNvPr id="5" name="Table 5"/>
+          <p:cNvGraphicFramePr>
+            <a:graphicFrameLocks noGrp="1"/>
+          </p:cNvGraphicFramePr>
+          <p:nvPr/>
+        </p:nvGraphicFramePr>
+        <p:xfrm>
+          <a:off x="548640" y="1691640"/>
+          <a:ext cx="5440680" cy="2880360"/>
+        </p:xfrm>
+        <a:graphic>
+          <a:graphicData uri="http://schemas.openxmlformats.org/drawingml/2006/table">
+            <a:tbl>
+              <a:tblPr firstRow="1" bandRow="0">
+                <a:tableStyleId>{5C22544A-7EE6-4342-B048-85BDC9FD1C3A}</a:tableStyleId>
+              </a:tblPr>
+              <a:tblGrid>
+                <a:gridCol w="731520"/>
+                <a:gridCol w="2011680"/>
+                <a:gridCol w="1188720"/>
+                <a:gridCol w="960120"/>
+                <a:gridCol w="548640"/>
+              </a:tblGrid>
+              <a:tr h="411480">
+                <a:tc>
+                  <a:txBody>
+                    <a:bodyPr/>
+                    <a:lstStyle/>
+                    <a:p>
+                      <a:pPr algn="l"/>
+                      <a:r>
+                        <a:rPr lang="en-US" sz="1100" b="1" dirty="0">
+                          <a:solidFill>
+                            <a:srgbClr val="FFFFFF"/>
+                          </a:solidFill>
+                          <a:latin typeface="Calibri"/>
+                        </a:rPr>
+                        <a:t>Rank</a:t>
+                      </a:r>
+                    </a:p>
+                  </a:txBody>
+                  <a:tcPr marL="45720" marR="45720" marT="22860" marB="22860" anchor="ctr">
+                    <a:solidFill>
+                      <a:srgbClr val="2F3C7E"/>
+                    </a:solidFill>
+                  </a:tcPr>
+                </a:tc>
+                <a:tc>
+                  <a:txBody>
+                    <a:bodyPr/>
+                    <a:lstStyle/>
+                    <a:p>
+                      <a:pPr algn="l"/>
+                      <a:r>
+                        <a:rPr lang="en-US" sz="1100" b="1" dirty="0">
+                          <a:solidFill>
+                            <a:srgbClr val="FFFFFF"/>
+                          </a:solidFill>
+                          <a:latin typeface="Calibri"/>
+                        </a:rPr>
+                        <a:t>Brand</a:t>
+                      </a:r>
+                    </a:p>
+                  </a:txBody>
+                  <a:tcPr marL="45720" marR="45720" marT="22860" marB="22860" anchor="ctr">
+                    <a:solidFill>
+                      <a:srgbClr val="2F3C7E"/>
+                    </a:solidFill>
+                  </a:tcPr>
+                </a:tc>
+                <a:tc>
+                  <a:txBody>
+                    <a:bodyPr/>
+                    <a:lstStyle/>
+                    <a:p>
+                      <a:pPr algn="l"/>
+                      <a:r>
+                        <a:rPr lang="en-US" sz="1100" b="1" dirty="0">
+                          <a:solidFill>
+                            <a:srgbClr val="FFFFFF"/>
+                          </a:solidFill>
+                          <a:latin typeface="Calibri"/>
+                        </a:rPr>
+                        <a:t>Value (Cr)</a:t>
+                      </a:r>
+                    </a:p>
+                  </a:txBody>
+                  <a:tcPr marL="45720" marR="45720" marT="22860" marB="22860" anchor="ctr">
+                    <a:solidFill>
+                      <a:srgbClr val="2F3C7E"/>
+                    </a:solidFill>
+                  </a:tcPr>
+                </a:tc>
+                <a:tc>
+                  <a:txBody>
+                    <a:bodyPr/>
+                    <a:lstStyle/>
+                    <a:p>
+                      <a:pPr algn="l"/>
+                      <a:r>
+                        <a:rPr lang="en-US" sz="1100" b="1" dirty="0">
+                          <a:solidFill>
+                            <a:srgbClr val="FFFFFF"/>
+                          </a:solidFill>
+                          <a:latin typeface="Calibri"/>
+                        </a:rPr>
+                        <a:t>MS Val %</a:t>
+                      </a:r>
+                    </a:p>
+                  </a:txBody>
+                  <a:tcPr marL="45720" marR="45720" marT="22860" marB="22860" anchor="ctr">
+                    <a:solidFill>
+                      <a:srgbClr val="2F3C7E"/>
+                    </a:solidFill>
+                  </a:tcPr>
+                </a:tc>
+                <a:tc>
+                  <a:txBody>
+                    <a:bodyPr/>
+                    <a:lstStyle/>
+                    <a:p>
+                      <a:pPr algn="l"/>
+                      <a:r>
+                        <a:rPr lang="en-US" sz="1100" b="1" dirty="0">
+                          <a:solidFill>
+                            <a:srgbClr val="FFFFFF"/>
+                          </a:solidFill>
+                          <a:latin typeface="Calibri"/>
+                        </a:rPr>
+                        <a:t>YoY (bps)</a:t>
+                      </a:r>
+                    </a:p>
+                  </a:txBody>
+                  <a:tcPr marL="45720" marR="45720" marT="22860" marB="22860" anchor="ctr">
+                    <a:solidFill>
+                      <a:srgbClr val="2F3C7E"/>
+                    </a:solidFill>
+                  </a:tcPr>
+                </a:tc>
+              </a:tr>
+              <a:tr h="411480">
+                <a:tc>
+                  <a:txBody>
+                    <a:bodyPr/>
+                    <a:lstStyle/>
+                    <a:p>
+                      <a:pPr algn="l"/>
+                      <a:r>
+                        <a:rPr lang="en-US" sz="1100" dirty="0">
+                          <a:solidFill>
+                            <a:srgbClr val="1A1A1A"/>
+                          </a:solidFill>
+                          <a:latin typeface="Calibri"/>
+                        </a:rPr>
+                        <a:t>1</a:t>
+                      </a:r>
+                    </a:p>
+                  </a:txBody>
+                  <a:tcPr marL="45720" marR="45720" marT="22860" marB="22860" anchor="ctr">
+                    <a:solidFill>
+                      <a:srgbClr val="FFFFFF"/>
+                    </a:solidFill>
+                  </a:tcPr>
+                </a:tc>
+                <a:tc>
+                  <a:txBody>
+                    <a:bodyPr/>
+                    <a:lstStyle/>
+                    <a:p>
+                      <a:pPr algn="l"/>
+                      <a:r>
+                        <a:rPr lang="en-US" sz="1100" dirty="0">
+                          <a:solidFill>
+                            <a:srgbClr val="1A1A1A"/>
+                          </a:solidFill>
+                          <a:latin typeface="Calibri"/>
+                        </a:rPr>
+                        <a:t>Himalaya</a:t>
+                      </a:r>
+                    </a:p>
+                  </a:txBody>
+                  <a:tcPr marL="45720" marR="45720" marT="22860" marB="22860" anchor="ctr">
+                    <a:solidFill>
+                      <a:srgbClr val="FFFFFF"/>
+                    </a:solidFill>
+                  </a:tcPr>
+                </a:tc>
+                <a:tc>
+                  <a:txBody>
+                    <a:bodyPr/>
+                    <a:lstStyle/>
+                    <a:p>
+                      <a:pPr algn="l"/>
+                      <a:r>
+                        <a:rPr lang="en-US" sz="1100" dirty="0">
+                          <a:solidFill>
+                            <a:srgbClr val="1A1A1A"/>
+                          </a:solidFill>
+                          <a:latin typeface="Calibri"/>
+                        </a:rPr>
+                        <a:t>17.9</a:t>
+                      </a:r>
+                    </a:p>
+                  </a:txBody>
+                  <a:tcPr marL="45720" marR="45720" marT="22860" marB="22860" anchor="ctr">
+                    <a:solidFill>
+                      <a:srgbClr val="FFFFFF"/>
+                    </a:solidFill>
+                  </a:tcPr>
+                </a:tc>
+                <a:tc>
+                  <a:txBody>
+                    <a:bodyPr/>
+                    <a:lstStyle/>
+                    <a:p>
+                      <a:pPr algn="l"/>
+                      <a:r>
+                        <a:rPr lang="en-US" sz="1100" dirty="0">
+                          <a:solidFill>
+                            <a:srgbClr val="1A1A1A"/>
+                          </a:solidFill>
+                          <a:latin typeface="Calibri"/>
+                        </a:rPr>
+                        <a:t>22%</a:t>
+                      </a:r>
+                    </a:p>
+                  </a:txBody>
+                  <a:tcPr marL="45720" marR="45720" marT="22860" marB="22860" anchor="ctr">
+                    <a:solidFill>
+                      <a:srgbClr val="FFFFFF"/>
+                    </a:solidFill>
+                  </a:tcPr>
+                </a:tc>
+                <a:tc>
+                  <a:txBody>
+                    <a:bodyPr/>
+                    <a:lstStyle/>
+                    <a:p>
+                      <a:pPr algn="l"/>
+                      <a:r>
+                        <a:rPr lang="en-US" sz="1100" dirty="0">
+                          <a:solidFill>
+                            <a:srgbClr val="1A1A1A"/>
+                          </a:solidFill>
+                          <a:latin typeface="Calibri"/>
+                        </a:rPr>
+                        <a:t>-328</a:t>
+                      </a:r>
+                    </a:p>
+                  </a:txBody>
+                  <a:tcPr marL="45720" marR="45720" marT="22860" marB="22860" anchor="ctr">
+                    <a:solidFill>
+                      <a:srgbClr val="FFFFFF"/>
+                    </a:solidFill>
+                  </a:tcPr>
+                </a:tc>
+              </a:tr>
+              <a:tr h="411480">
+                <a:tc>
+                  <a:txBody>
+                    <a:bodyPr/>
+                    <a:lstStyle/>
+                    <a:p>
+                      <a:pPr algn="l"/>
+                      <a:r>
+                        <a:rPr lang="en-US" sz="1100" dirty="0">
+                          <a:solidFill>
+                            <a:srgbClr val="1A1A1A"/>
+                          </a:solidFill>
+                          <a:latin typeface="Calibri"/>
+                        </a:rPr>
+                        <a:t>2</a:t>
+                      </a:r>
+                    </a:p>
+                  </a:txBody>
+                  <a:tcPr marL="45720" marR="45720" marT="22860" marB="22860" anchor="ctr">
+                    <a:solidFill>
+                      <a:srgbClr val="FFFFFF"/>
+                    </a:solidFill>
+                  </a:tcPr>
+                </a:tc>
+                <a:tc>
+                  <a:txBody>
+                    <a:bodyPr/>
+                    <a:lstStyle/>
+                    <a:p>
+                      <a:pPr algn="l"/>
+                      <a:r>
+                        <a:rPr lang="en-US" sz="1100" dirty="0">
+                          <a:solidFill>
+                            <a:srgbClr val="1A1A1A"/>
+                          </a:solidFill>
+                          <a:latin typeface="Calibri"/>
+                        </a:rPr>
+                        <a:t>Garnier</a:t>
+                      </a:r>
+                    </a:p>
+                  </a:txBody>
+                  <a:tcPr marL="45720" marR="45720" marT="22860" marB="22860" anchor="ctr">
+                    <a:solidFill>
+                      <a:srgbClr val="FFFFFF"/>
+                    </a:solidFill>
+                  </a:tcPr>
+                </a:tc>
+                <a:tc>
+                  <a:txBody>
+                    <a:bodyPr/>
+                    <a:lstStyle/>
+                    <a:p>
+                      <a:pPr algn="l"/>
+                      <a:r>
+                        <a:rPr lang="en-US" sz="1100" dirty="0">
+                          <a:solidFill>
+                            <a:srgbClr val="1A1A1A"/>
+                          </a:solidFill>
+                          <a:latin typeface="Calibri"/>
+                        </a:rPr>
+                        <a:t>11.8</a:t>
+                      </a:r>
+                    </a:p>
+                  </a:txBody>
+                  <a:tcPr marL="45720" marR="45720" marT="22860" marB="22860" anchor="ctr">
+                    <a:solidFill>
+                      <a:srgbClr val="FFFFFF"/>
+                    </a:solidFill>
+                  </a:tcPr>
+                </a:tc>
+                <a:tc>
+                  <a:txBody>
+                    <a:bodyPr/>
+                    <a:lstStyle/>
+                    <a:p>
+                      <a:pPr algn="l"/>
+                      <a:r>
+                        <a:rPr lang="en-US" sz="1100" dirty="0">
+                          <a:solidFill>
+                            <a:srgbClr val="1A1A1A"/>
+                          </a:solidFill>
+                          <a:latin typeface="Calibri"/>
+                        </a:rPr>
+                        <a:t>14%</a:t>
+                      </a:r>
+                    </a:p>
+                  </a:txBody>
+                  <a:tcPr marL="45720" marR="45720" marT="22860" marB="22860" anchor="ctr">
+                    <a:solidFill>
+                      <a:srgbClr val="FFFFFF"/>
+                    </a:solidFill>
+                  </a:tcPr>
+                </a:tc>
+                <a:tc>
+                  <a:txBody>
+                    <a:bodyPr/>
+                    <a:lstStyle/>
+                    <a:p>
+                      <a:pPr algn="l"/>
+                      <a:r>
+                        <a:rPr lang="en-US" sz="1100" dirty="0">
+                          <a:solidFill>
+                            <a:srgbClr val="1A1A1A"/>
+                          </a:solidFill>
+                          <a:latin typeface="Calibri"/>
+                        </a:rPr>
+                        <a:t>+55</a:t>
+                      </a:r>
+                    </a:p>
+                  </a:txBody>
+                  <a:tcPr marL="45720" marR="45720" marT="22860" marB="22860" anchor="ctr">
+                    <a:solidFill>
+                      <a:srgbClr val="FFFFFF"/>
+                    </a:solidFill>
+                  </a:tcPr>
+                </a:tc>
+              </a:tr>
+              <a:tr h="411480">
+                <a:tc>
+                  <a:txBody>
+                    <a:bodyPr/>
+                    <a:lstStyle/>
+                    <a:p>
+                      <a:pPr algn="l"/>
+                      <a:r>
+                        <a:rPr lang="en-US" sz="1100" dirty="0">
+                          <a:solidFill>
+                            <a:srgbClr val="1A1A1A"/>
+                          </a:solidFill>
+                          <a:latin typeface="Calibri"/>
+                        </a:rPr>
+                        <a:t>3</a:t>
+                      </a:r>
+                    </a:p>
+                  </a:txBody>
+                  <a:tcPr marL="45720" marR="45720" marT="22860" marB="22860" anchor="ctr">
+                    <a:solidFill>
+                      <a:srgbClr val="FFFFFF"/>
+                    </a:solidFill>
+                  </a:tcPr>
+                </a:tc>
+                <a:tc>
+                  <a:txBody>
+                    <a:bodyPr/>
+                    <a:lstStyle/>
+                    <a:p>
+                      <a:pPr algn="l"/>
+                      <a:r>
+                        <a:rPr lang="en-US" sz="1100" dirty="0">
+                          <a:solidFill>
+                            <a:srgbClr val="1A1A1A"/>
+                          </a:solidFill>
+                          <a:latin typeface="Calibri"/>
+                        </a:rPr>
+                        <a:t>Pond's</a:t>
+                      </a:r>
+                    </a:p>
+                  </a:txBody>
+                  <a:tcPr marL="45720" marR="45720" marT="22860" marB="22860" anchor="ctr">
+                    <a:solidFill>
+                      <a:srgbClr val="FFFFFF"/>
+                    </a:solidFill>
+                  </a:tcPr>
+                </a:tc>
+                <a:tc>
+                  <a:txBody>
+                    <a:bodyPr/>
+                    <a:lstStyle/>
+                    <a:p>
+                      <a:pPr algn="l"/>
+                      <a:r>
+                        <a:rPr lang="en-US" sz="1100" dirty="0">
+                          <a:solidFill>
+                            <a:srgbClr val="1A1A1A"/>
+                          </a:solidFill>
+                          <a:latin typeface="Calibri"/>
+                        </a:rPr>
+                        <a:t>11.4</a:t>
+                      </a:r>
+                    </a:p>
+                  </a:txBody>
+                  <a:tcPr marL="45720" marR="45720" marT="22860" marB="22860" anchor="ctr">
+                    <a:solidFill>
+                      <a:srgbClr val="FFFFFF"/>
+                    </a:solidFill>
+                  </a:tcPr>
+                </a:tc>
+                <a:tc>
+                  <a:txBody>
+                    <a:bodyPr/>
+                    <a:lstStyle/>
+                    <a:p>
+                      <a:pPr algn="l"/>
+                      <a:r>
+                        <a:rPr lang="en-US" sz="1100" dirty="0">
+                          <a:solidFill>
+                            <a:srgbClr val="1A1A1A"/>
+                          </a:solidFill>
+                          <a:latin typeface="Calibri"/>
+                        </a:rPr>
+                        <a:t>14%</a:t>
+                      </a:r>
+                    </a:p>
+                  </a:txBody>
+                  <a:tcPr marL="45720" marR="45720" marT="22860" marB="22860" anchor="ctr">
+                    <a:solidFill>
+                      <a:srgbClr val="FFFFFF"/>
+                    </a:solidFill>
+                  </a:tcPr>
+                </a:tc>
+                <a:tc>
+                  <a:txBody>
+                    <a:bodyPr/>
+                    <a:lstStyle/>
+                    <a:p>
+                      <a:pPr algn="l"/>
+                      <a:r>
+                        <a:rPr lang="en-US" sz="1100" dirty="0">
+                          <a:solidFill>
+                            <a:srgbClr val="1A1A1A"/>
+                          </a:solidFill>
+                          <a:latin typeface="Calibri"/>
+                        </a:rPr>
+                        <a:t>-61</a:t>
+                      </a:r>
+                    </a:p>
+                  </a:txBody>
+                  <a:tcPr marL="45720" marR="45720" marT="22860" marB="22860" anchor="ctr">
+                    <a:solidFill>
+                      <a:srgbClr val="FFFFFF"/>
+                    </a:solidFill>
+                  </a:tcPr>
+                </a:tc>
+              </a:tr>
+              <a:tr h="411480">
+                <a:tc>
+                  <a:txBody>
+                    <a:bodyPr/>
+                    <a:lstStyle/>
+                    <a:p>
+                      <a:pPr algn="l"/>
+                      <a:r>
+                        <a:rPr lang="en-US" sz="1100" dirty="0">
+                          <a:solidFill>
+                            <a:srgbClr val="1A1A1A"/>
+                          </a:solidFill>
+                          <a:latin typeface="Calibri"/>
+                        </a:rPr>
+                        <a:t>4</a:t>
+                      </a:r>
+                    </a:p>
+                  </a:txBody>
+                  <a:tcPr marL="45720" marR="45720" marT="22860" marB="22860" anchor="ctr">
+                    <a:solidFill>
+                      <a:srgbClr val="EAF3EF"/>
+                    </a:solidFill>
+                  </a:tcPr>
+                </a:tc>
+                <a:tc>
+                  <a:txBody>
+                    <a:bodyPr/>
+                    <a:lstStyle/>
+                    <a:p>
+                      <a:pPr algn="l"/>
+                      <a:r>
+                        <a:rPr lang="en-US" sz="1100" dirty="0">
+                          <a:solidFill>
+                            <a:srgbClr val="1A1A1A"/>
+                          </a:solidFill>
+                          <a:latin typeface="Calibri"/>
+                        </a:rPr>
+                        <a:t>Mamaearth</a:t>
+                      </a:r>
+                    </a:p>
+                  </a:txBody>
+                  <a:tcPr marL="45720" marR="45720" marT="22860" marB="22860" anchor="ctr">
+                    <a:solidFill>
+                      <a:srgbClr val="EAF3EF"/>
+                    </a:solidFill>
+                  </a:tcPr>
+                </a:tc>
+                <a:tc>
+                  <a:txBody>
+                    <a:bodyPr/>
+                    <a:lstStyle/>
+                    <a:p>
+                      <a:pPr algn="l"/>
+                      <a:r>
+                        <a:rPr lang="en-US" sz="1100" dirty="0">
+                          <a:solidFill>
+                            <a:srgbClr val="1A1A1A"/>
+                          </a:solidFill>
+                          <a:latin typeface="Calibri"/>
+                        </a:rPr>
+                        <a:t>9.6</a:t>
+                      </a:r>
+                    </a:p>
+                  </a:txBody>
+                  <a:tcPr marL="45720" marR="45720" marT="22860" marB="22860" anchor="ctr">
+                    <a:solidFill>
+                      <a:srgbClr val="EAF3EF"/>
+                    </a:solidFill>
+                  </a:tcPr>
+                </a:tc>
+                <a:tc>
+                  <a:txBody>
+                    <a:bodyPr/>
+                    <a:lstStyle/>
+                    <a:p>
+                      <a:pPr algn="l"/>
+                      <a:r>
+                        <a:rPr lang="en-US" sz="1100" dirty="0">
+                          <a:solidFill>
+                            <a:srgbClr val="1A1A1A"/>
+                          </a:solidFill>
+                          <a:latin typeface="Calibri"/>
+                        </a:rPr>
+                        <a:t>12%</a:t>
+                      </a:r>
+                    </a:p>
+                  </a:txBody>
+                  <a:tcPr marL="45720" marR="45720" marT="22860" marB="22860" anchor="ctr">
+                    <a:solidFill>
+                      <a:srgbClr val="EAF3EF"/>
+                    </a:solidFill>
+                  </a:tcPr>
+                </a:tc>
+                <a:tc>
+                  <a:txBody>
+                    <a:bodyPr/>
+                    <a:lstStyle/>
+                    <a:p>
+                      <a:pPr algn="l"/>
+                      <a:r>
+                        <a:rPr lang="en-US" sz="1100" dirty="0">
+                          <a:solidFill>
+                            <a:srgbClr val="1A1A1A"/>
+                          </a:solidFill>
+                          <a:latin typeface="Calibri"/>
+                        </a:rPr>
+                        <a:t>+311</a:t>
+                      </a:r>
+                    </a:p>
+                  </a:txBody>
+                  <a:tcPr marL="45720" marR="45720" marT="22860" marB="22860" anchor="ctr">
+                    <a:solidFill>
+                      <a:srgbClr val="EAF3EF"/>
+                    </a:solidFill>
+                  </a:tcPr>
+                </a:tc>
+              </a:tr>
+              <a:tr h="411480">
+                <a:tc>
+                  <a:txBody>
+                    <a:bodyPr/>
+                    <a:lstStyle/>
+                    <a:p>
+                      <a:pPr algn="l"/>
+                      <a:r>
+                        <a:rPr lang="en-US" sz="1100" dirty="0">
+                          <a:solidFill>
+                            <a:srgbClr val="1A1A1A"/>
+                          </a:solidFill>
+                          <a:latin typeface="Calibri"/>
+                        </a:rPr>
+                        <a:t>5</a:t>
+                      </a:r>
+                    </a:p>
+                  </a:txBody>
+                  <a:tcPr marL="45720" marR="45720" marT="22860" marB="22860" anchor="ctr">
+                    <a:solidFill>
+                      <a:srgbClr val="FFFFFF"/>
+                    </a:solidFill>
+                  </a:tcPr>
+                </a:tc>
+                <a:tc>
+                  <a:txBody>
+                    <a:bodyPr/>
+                    <a:lstStyle/>
+                    <a:p>
+                      <a:pPr algn="l"/>
+                      <a:r>
+                        <a:rPr lang="en-US" sz="1100" dirty="0">
+                          <a:solidFill>
+                            <a:srgbClr val="1A1A1A"/>
+                          </a:solidFill>
+                          <a:latin typeface="Calibri"/>
+                        </a:rPr>
+                        <a:t>Clean &amp; Clear</a:t>
+                      </a:r>
+                    </a:p>
+                  </a:txBody>
+                  <a:tcPr marL="45720" marR="45720" marT="22860" marB="22860" anchor="ctr">
+                    <a:solidFill>
+                      <a:srgbClr val="FFFFFF"/>
+                    </a:solidFill>
+                  </a:tcPr>
+                </a:tc>
+                <a:tc>
+                  <a:txBody>
+                    <a:bodyPr/>
+                    <a:lstStyle/>
+                    <a:p>
+                      <a:pPr algn="l"/>
+                      <a:r>
+                        <a:rPr lang="en-US" sz="1100" dirty="0">
+                          <a:solidFill>
+                            <a:srgbClr val="1A1A1A"/>
+                          </a:solidFill>
+                          <a:latin typeface="Calibri"/>
+                        </a:rPr>
+                        <a:t>6.3</a:t>
+                      </a:r>
+                    </a:p>
+                  </a:txBody>
+                  <a:tcPr marL="45720" marR="45720" marT="22860" marB="22860" anchor="ctr">
+                    <a:solidFill>
+                      <a:srgbClr val="FFFFFF"/>
+                    </a:solidFill>
+                  </a:tcPr>
+                </a:tc>
+                <a:tc>
+                  <a:txBody>
+                    <a:bodyPr/>
+                    <a:lstStyle/>
+                    <a:p>
+                      <a:pPr algn="l"/>
+                      <a:r>
+                        <a:rPr lang="en-US" sz="1100" dirty="0">
+                          <a:solidFill>
+                            <a:srgbClr val="1A1A1A"/>
+                          </a:solidFill>
+                          <a:latin typeface="Calibri"/>
+                        </a:rPr>
+                        <a:t>8%</a:t>
+                      </a:r>
+                    </a:p>
+                  </a:txBody>
+                  <a:tcPr marL="45720" marR="45720" marT="22860" marB="22860" anchor="ctr">
+                    <a:solidFill>
+                      <a:srgbClr val="FFFFFF"/>
+                    </a:solidFill>
+                  </a:tcPr>
+                </a:tc>
+                <a:tc>
+                  <a:txBody>
+                    <a:bodyPr/>
+                    <a:lstStyle/>
+                    <a:p>
+                      <a:pPr algn="l"/>
+                      <a:r>
+                        <a:rPr lang="en-US" sz="1100" dirty="0">
+                          <a:solidFill>
+                            <a:srgbClr val="1A1A1A"/>
+                          </a:solidFill>
+                          <a:latin typeface="Calibri"/>
+                        </a:rPr>
+                        <a:t>+22</a:t>
+                      </a:r>
+                    </a:p>
+                  </a:txBody>
+                  <a:tcPr marL="45720" marR="45720" marT="22860" marB="22860" anchor="ctr">
+                    <a:solidFill>
+                      <a:srgbClr val="FFFFFF"/>
+                    </a:solidFill>
+                  </a:tcPr>
+                </a:tc>
+              </a:tr>
+              <a:tr h="411480">
+                <a:tc>
+                  <a:txBody>
+                    <a:bodyPr/>
+                    <a:lstStyle/>
+                    <a:p>
+                      <a:pPr algn="l"/>
+                      <a:r>
+                        <a:rPr lang="en-US" sz="1100" dirty="0">
+                          <a:solidFill>
+                            <a:srgbClr val="1A1A1A"/>
+                          </a:solidFill>
+                          <a:latin typeface="Calibri"/>
+                        </a:rPr>
+                        <a:t>16</a:t>
+                      </a:r>
+                    </a:p>
+                  </a:txBody>
+                  <a:tcPr marL="45720" marR="45720" marT="22860" marB="22860" anchor="ctr">
+                    <a:solidFill>
+                      <a:srgbClr val="EAF3EF"/>
+                    </a:solidFill>
+                  </a:tcPr>
+                </a:tc>
+                <a:tc>
+                  <a:txBody>
+                    <a:bodyPr/>
+                    <a:lstStyle/>
+                    <a:p>
+                      <a:pPr algn="l"/>
+                      <a:r>
+                        <a:rPr lang="en-US" sz="1100" dirty="0">
+                          <a:solidFill>
+                            <a:srgbClr val="1A1A1A"/>
+                          </a:solidFill>
+                          <a:latin typeface="Calibri"/>
+                        </a:rPr>
+                        <a:t>The Derma Co</a:t>
+                      </a:r>
+                    </a:p>
+                  </a:txBody>
+                  <a:tcPr marL="45720" marR="45720" marT="22860" marB="22860" anchor="ctr">
+                    <a:solidFill>
+                      <a:srgbClr val="EAF3EF"/>
+                    </a:solidFill>
+                  </a:tcPr>
+                </a:tc>
+                <a:tc>
+                  <a:txBody>
+                    <a:bodyPr/>
+                    <a:lstStyle/>
+                    <a:p>
+                      <a:pPr algn="l"/>
+                      <a:r>
+                        <a:rPr lang="en-US" sz="1100" dirty="0">
+                          <a:solidFill>
+                            <a:srgbClr val="1A1A1A"/>
+                          </a:solidFill>
+                          <a:latin typeface="Calibri"/>
+                        </a:rPr>
+                        <a:t>0.6</a:t>
+                      </a:r>
+                    </a:p>
+                  </a:txBody>
+                  <a:tcPr marL="45720" marR="45720" marT="22860" marB="22860" anchor="ctr">
+                    <a:solidFill>
+                      <a:srgbClr val="EAF3EF"/>
+                    </a:solidFill>
+                  </a:tcPr>
+                </a:tc>
+                <a:tc>
+                  <a:txBody>
+                    <a:bodyPr/>
+                    <a:lstStyle/>
+                    <a:p>
+                      <a:pPr algn="l"/>
+                      <a:r>
+                        <a:rPr lang="en-US" sz="1100" dirty="0">
+                          <a:solidFill>
+                            <a:srgbClr val="1A1A1A"/>
+                          </a:solidFill>
+                          <a:latin typeface="Calibri"/>
+                        </a:rPr>
+                        <a:t>0.7%</a:t>
+                      </a:r>
+                    </a:p>
+                  </a:txBody>
+                  <a:tcPr marL="45720" marR="45720" marT="22860" marB="22860" anchor="ctr">
+                    <a:solidFill>
+                      <a:srgbClr val="EAF3EF"/>
+                    </a:solidFill>
+                  </a:tcPr>
+                </a:tc>
+                <a:tc>
+                  <a:txBody>
+                    <a:bodyPr/>
+                    <a:lstStyle/>
+                    <a:p>
+                      <a:pPr algn="l"/>
+                      <a:r>
+                        <a:rPr lang="en-US" sz="1100" dirty="0">
+                          <a:solidFill>
+                            <a:srgbClr val="1A1A1A"/>
+                          </a:solidFill>
+                          <a:latin typeface="Calibri"/>
+                        </a:rPr>
+                        <a:t>+71</a:t>
+                      </a:r>
+                    </a:p>
+                  </a:txBody>
+                  <a:tcPr marL="45720" marR="45720" marT="22860" marB="22860" anchor="ctr">
+                    <a:solidFill>
+                      <a:srgbClr val="EAF3EF"/>
+                    </a:solidFill>
+                  </a:tcPr>
+                </a:tc>
+              </a:tr>
+            </a:tbl>
+          </a:graphicData>
+        </a:graphic>
+      </p:graphicFrame>
+      <p:sp>
+        <p:nvSpPr>
+          <p:cNvPr id="6" name="TextBox 6"/>
+          <p:cNvSpPr txBox="1"/>
+          <p:nvPr/>
+        </p:nvSpPr>
+        <p:spPr>
+          <a:xfrm>
+            <a:off x="6172200" y="1325880"/>
+            <a:ext cx="5440680" cy="320040"/>
+          </a:xfrm>
+          <a:prstGeom prst="rect">
+            <a:avLst/>
+          </a:prstGeom>
+          <a:noFill/>
+        </p:spPr>
+        <p:txBody>
+          <a:bodyPr wrap="square" anchor="t" lIns="0" tIns="0" rIns="0" bIns="0">
+            <a:noAutofit/>
+          </a:bodyPr>
+          <a:lstStyle/>
+          <a:p>
+            <a:pPr algn="l"/>
+            <a:r>
+              <a:rPr lang="en-US" sz="1400" b="1" dirty="0">
+                <a:solidFill>
+                  <a:srgbClr val="6D2E46"/>
+                </a:solidFill>
+                <a:latin typeface="Calibri"/>
+              </a:rPr>
+              <a:t>Shampoo — top competitors</a:t>
+            </a:r>
+          </a:p>
+        </p:txBody>
+      </p:sp>
+      <p:graphicFrame>
+        <p:nvGraphicFramePr>
+          <p:cNvPr id="7" name="Table 7"/>
+          <p:cNvGraphicFramePr>
+            <a:graphicFrameLocks noGrp="1"/>
+          </p:cNvGraphicFramePr>
+          <p:nvPr/>
+        </p:nvGraphicFramePr>
+        <p:xfrm>
+          <a:off x="6172200" y="1691640"/>
+          <a:ext cx="5440680" cy="2468880"/>
+        </p:xfrm>
+        <a:graphic>
+          <a:graphicData uri="http://schemas.openxmlformats.org/drawingml/2006/table">
+            <a:tbl>
+              <a:tblPr firstRow="1" bandRow="0">
+                <a:tableStyleId>{5C22544A-7EE6-4342-B048-85BDC9FD1C3A}</a:tableStyleId>
+              </a:tblPr>
+              <a:tblGrid>
+                <a:gridCol w="731520"/>
+                <a:gridCol w="2011680"/>
+                <a:gridCol w="1188720"/>
+                <a:gridCol w="960120"/>
+                <a:gridCol w="548640"/>
+              </a:tblGrid>
+              <a:tr h="411480">
+                <a:tc>
+                  <a:txBody>
+                    <a:bodyPr/>
+                    <a:lstStyle/>
+                    <a:p>
+                      <a:pPr algn="l"/>
+                      <a:r>
+                        <a:rPr lang="en-US" sz="1100" b="1" dirty="0">
+                          <a:solidFill>
+                            <a:srgbClr val="FFFFFF"/>
+                          </a:solidFill>
+                          <a:latin typeface="Calibri"/>
+                        </a:rPr>
+                        <a:t>Rank</a:t>
+                      </a:r>
+                    </a:p>
+                  </a:txBody>
+                  <a:tcPr marL="45720" marR="45720" marT="22860" marB="22860" anchor="ctr">
+                    <a:solidFill>
+                      <a:srgbClr val="2F3C7E"/>
+                    </a:solidFill>
+                  </a:tcPr>
+                </a:tc>
+                <a:tc>
+                  <a:txBody>
+                    <a:bodyPr/>
+                    <a:lstStyle/>
+                    <a:p>
+                      <a:pPr algn="l"/>
+                      <a:r>
+                        <a:rPr lang="en-US" sz="1100" b="1" dirty="0">
+                          <a:solidFill>
+                            <a:srgbClr val="FFFFFF"/>
+                          </a:solidFill>
+                          <a:latin typeface="Calibri"/>
+                        </a:rPr>
+                        <a:t>Brand</a:t>
+                      </a:r>
+                    </a:p>
+                  </a:txBody>
+                  <a:tcPr marL="45720" marR="45720" marT="22860" marB="22860" anchor="ctr">
+                    <a:solidFill>
+                      <a:srgbClr val="2F3C7E"/>
+                    </a:solidFill>
+                  </a:tcPr>
+                </a:tc>
+                <a:tc>
+                  <a:txBody>
+                    <a:bodyPr/>
+                    <a:lstStyle/>
+                    <a:p>
+                      <a:pPr algn="l"/>
+                      <a:r>
+                        <a:rPr lang="en-US" sz="1100" b="1" dirty="0">
+                          <a:solidFill>
+                            <a:srgbClr val="FFFFFF"/>
+                          </a:solidFill>
+                          <a:latin typeface="Calibri"/>
+                        </a:rPr>
+                        <a:t>Value (Cr)</a:t>
+                      </a:r>
+                    </a:p>
+                  </a:txBody>
+                  <a:tcPr marL="45720" marR="45720" marT="22860" marB="22860" anchor="ctr">
+                    <a:solidFill>
+                      <a:srgbClr val="2F3C7E"/>
+                    </a:solidFill>
+                  </a:tcPr>
+                </a:tc>
+                <a:tc>
+                  <a:txBody>
+                    <a:bodyPr/>
+                    <a:lstStyle/>
+                    <a:p>
+                      <a:pPr algn="l"/>
+                      <a:r>
+                        <a:rPr lang="en-US" sz="1100" b="1" dirty="0">
+                          <a:solidFill>
+                            <a:srgbClr val="FFFFFF"/>
+                          </a:solidFill>
+                          <a:latin typeface="Calibri"/>
+                        </a:rPr>
+                        <a:t>MS Val %</a:t>
+                      </a:r>
+                    </a:p>
+                  </a:txBody>
+                  <a:tcPr marL="45720" marR="45720" marT="22860" marB="22860" anchor="ctr">
+                    <a:solidFill>
+                      <a:srgbClr val="2F3C7E"/>
+                    </a:solidFill>
+                  </a:tcPr>
+                </a:tc>
+                <a:tc>
+                  <a:txBody>
+                    <a:bodyPr/>
+                    <a:lstStyle/>
+                    <a:p>
+                      <a:pPr algn="l"/>
+                      <a:r>
+                        <a:rPr lang="en-US" sz="1100" b="1" dirty="0">
+                          <a:solidFill>
+                            <a:srgbClr val="FFFFFF"/>
+                          </a:solidFill>
+                          <a:latin typeface="Calibri"/>
+                        </a:rPr>
+                        <a:t>YoY (bps)</a:t>
+                      </a:r>
+                    </a:p>
+                  </a:txBody>
+                  <a:tcPr marL="45720" marR="45720" marT="22860" marB="22860" anchor="ctr">
+                    <a:solidFill>
+                      <a:srgbClr val="2F3C7E"/>
+                    </a:solidFill>
+                  </a:tcPr>
+                </a:tc>
+              </a:tr>
+              <a:tr h="411480">
+                <a:tc>
+                  <a:txBody>
+                    <a:bodyPr/>
+                    <a:lstStyle/>
+                    <a:p>
+                      <a:pPr algn="l"/>
+                      <a:r>
+                        <a:rPr lang="en-US" sz="1100" dirty="0">
+                          <a:solidFill>
+                            <a:srgbClr val="1A1A1A"/>
+                          </a:solidFill>
+                          <a:latin typeface="Calibri"/>
+                        </a:rPr>
+                        <a:t>1</a:t>
+                      </a:r>
+                    </a:p>
+                  </a:txBody>
+                  <a:tcPr marL="45720" marR="45720" marT="22860" marB="22860" anchor="ctr">
+                    <a:solidFill>
+                      <a:srgbClr val="FFFFFF"/>
+                    </a:solidFill>
+                  </a:tcPr>
+                </a:tc>
+                <a:tc>
+                  <a:txBody>
+                    <a:bodyPr/>
+                    <a:lstStyle/>
+                    <a:p>
+                      <a:pPr algn="l"/>
+                      <a:r>
+                        <a:rPr lang="en-US" sz="1100" dirty="0">
+                          <a:solidFill>
+                            <a:srgbClr val="1A1A1A"/>
+                          </a:solidFill>
+                          <a:latin typeface="Calibri"/>
+                        </a:rPr>
+                        <a:t>Dove</a:t>
+                      </a:r>
+                    </a:p>
+                  </a:txBody>
+                  <a:tcPr marL="45720" marR="45720" marT="22860" marB="22860" anchor="ctr">
+                    <a:solidFill>
+                      <a:srgbClr val="FFFFFF"/>
+                    </a:solidFill>
+                  </a:tcPr>
+                </a:tc>
+                <a:tc>
+                  <a:txBody>
+                    <a:bodyPr/>
+                    <a:lstStyle/>
+                    <a:p>
+                      <a:pPr algn="l"/>
+                      <a:r>
+                        <a:rPr lang="en-US" sz="1100" dirty="0">
+                          <a:solidFill>
+                            <a:srgbClr val="1A1A1A"/>
+                          </a:solidFill>
+                          <a:latin typeface="Calibri"/>
+                        </a:rPr>
+                        <a:t>29.6</a:t>
+                      </a:r>
+                    </a:p>
+                  </a:txBody>
+                  <a:tcPr marL="45720" marR="45720" marT="22860" marB="22860" anchor="ctr">
+                    <a:solidFill>
+                      <a:srgbClr val="FFFFFF"/>
+                    </a:solidFill>
+                  </a:tcPr>
+                </a:tc>
+                <a:tc>
+                  <a:txBody>
+                    <a:bodyPr/>
+                    <a:lstStyle/>
+                    <a:p>
+                      <a:pPr algn="l"/>
+                      <a:r>
+                        <a:rPr lang="en-US" sz="1100" dirty="0">
+                          <a:solidFill>
+                            <a:srgbClr val="1A1A1A"/>
+                          </a:solidFill>
+                          <a:latin typeface="Calibri"/>
+                        </a:rPr>
+                        <a:t>18%</a:t>
+                      </a:r>
+                    </a:p>
+                  </a:txBody>
+                  <a:tcPr marL="45720" marR="45720" marT="22860" marB="22860" anchor="ctr">
+                    <a:solidFill>
+                      <a:srgbClr val="FFFFFF"/>
+                    </a:solidFill>
+                  </a:tcPr>
+                </a:tc>
+                <a:tc>
+                  <a:txBody>
+                    <a:bodyPr/>
+                    <a:lstStyle/>
+                    <a:p>
+                      <a:pPr algn="l"/>
+                      <a:r>
+                        <a:rPr lang="en-US" sz="1100" dirty="0">
+                          <a:solidFill>
+                            <a:srgbClr val="1A1A1A"/>
+                          </a:solidFill>
+                          <a:latin typeface="Calibri"/>
+                        </a:rPr>
+                        <a:t>+20</a:t>
+                      </a:r>
+                    </a:p>
+                  </a:txBody>
+                  <a:tcPr marL="45720" marR="45720" marT="22860" marB="22860" anchor="ctr">
+                    <a:solidFill>
+                      <a:srgbClr val="FFFFFF"/>
+                    </a:solidFill>
+                  </a:tcPr>
+                </a:tc>
+              </a:tr>
+              <a:tr h="411480">
+                <a:tc>
+                  <a:txBody>
+                    <a:bodyPr/>
+                    <a:lstStyle/>
+                    <a:p>
+                      <a:pPr algn="l"/>
+                      <a:r>
+                        <a:rPr lang="en-US" sz="1100" dirty="0">
+                          <a:solidFill>
+                            <a:srgbClr val="1A1A1A"/>
+                          </a:solidFill>
+                          <a:latin typeface="Calibri"/>
+                        </a:rPr>
+                        <a:t>2</a:t>
+                      </a:r>
+                    </a:p>
+                  </a:txBody>
+                  <a:tcPr marL="45720" marR="45720" marT="22860" marB="22860" anchor="ctr">
+                    <a:solidFill>
+                      <a:srgbClr val="FFFFFF"/>
+                    </a:solidFill>
+                  </a:tcPr>
+                </a:tc>
+                <a:tc>
+                  <a:txBody>
+                    <a:bodyPr/>
+                    <a:lstStyle/>
+                    <a:p>
+                      <a:pPr algn="l"/>
+                      <a:r>
+                        <a:rPr lang="en-US" sz="1100" dirty="0">
+                          <a:solidFill>
+                            <a:srgbClr val="1A1A1A"/>
+                          </a:solidFill>
+                          <a:latin typeface="Calibri"/>
+                        </a:rPr>
+                        <a:t>L'Oreal Paris</a:t>
+                      </a:r>
+                    </a:p>
+                  </a:txBody>
+                  <a:tcPr marL="45720" marR="45720" marT="22860" marB="22860" anchor="ctr">
+                    <a:solidFill>
+                      <a:srgbClr val="FFFFFF"/>
+                    </a:solidFill>
+                  </a:tcPr>
+                </a:tc>
+                <a:tc>
+                  <a:txBody>
+                    <a:bodyPr/>
+                    <a:lstStyle/>
+                    <a:p>
+                      <a:pPr algn="l"/>
+                      <a:r>
+                        <a:rPr lang="en-US" sz="1100" dirty="0">
+                          <a:solidFill>
+                            <a:srgbClr val="1A1A1A"/>
+                          </a:solidFill>
+                          <a:latin typeface="Calibri"/>
+                        </a:rPr>
+                        <a:t>22.1</a:t>
+                      </a:r>
+                    </a:p>
+                  </a:txBody>
+                  <a:tcPr marL="45720" marR="45720" marT="22860" marB="22860" anchor="ctr">
+                    <a:solidFill>
+                      <a:srgbClr val="FFFFFF"/>
+                    </a:solidFill>
+                  </a:tcPr>
+                </a:tc>
+                <a:tc>
+                  <a:txBody>
+                    <a:bodyPr/>
+                    <a:lstStyle/>
+                    <a:p>
+                      <a:pPr algn="l"/>
+                      <a:r>
+                        <a:rPr lang="en-US" sz="1100" dirty="0">
+                          <a:solidFill>
+                            <a:srgbClr val="1A1A1A"/>
+                          </a:solidFill>
+                          <a:latin typeface="Calibri"/>
+                        </a:rPr>
+                        <a:t>13%</a:t>
+                      </a:r>
+                    </a:p>
+                  </a:txBody>
+                  <a:tcPr marL="45720" marR="45720" marT="22860" marB="22860" anchor="ctr">
+                    <a:solidFill>
+                      <a:srgbClr val="FFFFFF"/>
+                    </a:solidFill>
+                  </a:tcPr>
+                </a:tc>
+                <a:tc>
+                  <a:txBody>
+                    <a:bodyPr/>
+                    <a:lstStyle/>
+                    <a:p>
+                      <a:pPr algn="l"/>
+                      <a:r>
+                        <a:rPr lang="en-US" sz="1100" dirty="0">
+                          <a:solidFill>
+                            <a:srgbClr val="1A1A1A"/>
+                          </a:solidFill>
+                          <a:latin typeface="Calibri"/>
+                        </a:rPr>
+                        <a:t>+130</a:t>
+                      </a:r>
+                    </a:p>
+                  </a:txBody>
+                  <a:tcPr marL="45720" marR="45720" marT="22860" marB="22860" anchor="ctr">
+                    <a:solidFill>
+                      <a:srgbClr val="FFFFFF"/>
+                    </a:solidFill>
+                  </a:tcPr>
+                </a:tc>
+              </a:tr>
+              <a:tr h="411480">
+                <a:tc>
+                  <a:txBody>
+                    <a:bodyPr/>
+                    <a:lstStyle/>
+                    <a:p>
+                      <a:pPr algn="l"/>
+                      <a:r>
+                        <a:rPr lang="en-US" sz="1100" dirty="0">
+                          <a:solidFill>
+                            <a:srgbClr val="1A1A1A"/>
+                          </a:solidFill>
+                          <a:latin typeface="Calibri"/>
+                        </a:rPr>
+                        <a:t>3</a:t>
+                      </a:r>
+                    </a:p>
+                  </a:txBody>
+                  <a:tcPr marL="45720" marR="45720" marT="22860" marB="22860" anchor="ctr">
+                    <a:solidFill>
+                      <a:srgbClr val="FFFFFF"/>
+                    </a:solidFill>
+                  </a:tcPr>
+                </a:tc>
+                <a:tc>
+                  <a:txBody>
+                    <a:bodyPr/>
+                    <a:lstStyle/>
+                    <a:p>
+                      <a:pPr algn="l"/>
+                      <a:r>
+                        <a:rPr lang="en-US" sz="1100" dirty="0">
+                          <a:solidFill>
+                            <a:srgbClr val="1A1A1A"/>
+                          </a:solidFill>
+                          <a:latin typeface="Calibri"/>
+                        </a:rPr>
+                        <a:t>Head &amp; Shoulders</a:t>
+                      </a:r>
+                    </a:p>
+                  </a:txBody>
+                  <a:tcPr marL="45720" marR="45720" marT="22860" marB="22860" anchor="ctr">
+                    <a:solidFill>
+                      <a:srgbClr val="FFFFFF"/>
+                    </a:solidFill>
+                  </a:tcPr>
+                </a:tc>
+                <a:tc>
+                  <a:txBody>
+                    <a:bodyPr/>
+                    <a:lstStyle/>
+                    <a:p>
+                      <a:pPr algn="l"/>
+                      <a:r>
+                        <a:rPr lang="en-US" sz="1100" dirty="0">
+                          <a:solidFill>
+                            <a:srgbClr val="1A1A1A"/>
+                          </a:solidFill>
+                          <a:latin typeface="Calibri"/>
+                        </a:rPr>
+                        <a:t>19.0</a:t>
+                      </a:r>
+                    </a:p>
+                  </a:txBody>
+                  <a:tcPr marL="45720" marR="45720" marT="22860" marB="22860" anchor="ctr">
+                    <a:solidFill>
+                      <a:srgbClr val="FFFFFF"/>
+                    </a:solidFill>
+                  </a:tcPr>
+                </a:tc>
+                <a:tc>
+                  <a:txBody>
+                    <a:bodyPr/>
+                    <a:lstStyle/>
+                    <a:p>
+                      <a:pPr algn="l"/>
+                      <a:r>
+                        <a:rPr lang="en-US" sz="1100" dirty="0">
+                          <a:solidFill>
+                            <a:srgbClr val="1A1A1A"/>
+                          </a:solidFill>
+                          <a:latin typeface="Calibri"/>
+                        </a:rPr>
+                        <a:t>11%</a:t>
+                      </a:r>
+                    </a:p>
+                  </a:txBody>
+                  <a:tcPr marL="45720" marR="45720" marT="22860" marB="22860" anchor="ctr">
+                    <a:solidFill>
+                      <a:srgbClr val="FFFFFF"/>
+                    </a:solidFill>
+                  </a:tcPr>
+                </a:tc>
+                <a:tc>
+                  <a:txBody>
+                    <a:bodyPr/>
+                    <a:lstStyle/>
+                    <a:p>
+                      <a:pPr algn="l"/>
+                      <a:r>
+                        <a:rPr lang="en-US" sz="1100" dirty="0">
+                          <a:solidFill>
+                            <a:srgbClr val="1A1A1A"/>
+                          </a:solidFill>
+                          <a:latin typeface="Calibri"/>
+                        </a:rPr>
+                        <a:t>+200</a:t>
+                      </a:r>
+                    </a:p>
+                  </a:txBody>
+                  <a:tcPr marL="45720" marR="45720" marT="22860" marB="22860" anchor="ctr">
+                    <a:solidFill>
+                      <a:srgbClr val="FFFFFF"/>
+                    </a:solidFill>
+                  </a:tcPr>
+                </a:tc>
+              </a:tr>
+              <a:tr h="411480">
+                <a:tc>
+                  <a:txBody>
+                    <a:bodyPr/>
+                    <a:lstStyle/>
+                    <a:p>
+                      <a:pPr algn="l"/>
+                      <a:r>
+                        <a:rPr lang="en-US" sz="1100" dirty="0">
+                          <a:solidFill>
+                            <a:srgbClr val="1A1A1A"/>
+                          </a:solidFill>
+                          <a:latin typeface="Calibri"/>
+                        </a:rPr>
+                        <a:t>4</a:t>
+                      </a:r>
+                    </a:p>
+                  </a:txBody>
+                  <a:tcPr marL="45720" marR="45720" marT="22860" marB="22860" anchor="ctr">
+                    <a:solidFill>
+                      <a:srgbClr val="FFFFFF"/>
+                    </a:solidFill>
+                  </a:tcPr>
+                </a:tc>
+                <a:tc>
+                  <a:txBody>
+                    <a:bodyPr/>
+                    <a:lstStyle/>
+                    <a:p>
+                      <a:pPr algn="l"/>
+                      <a:r>
+                        <a:rPr lang="en-US" sz="1100" dirty="0">
+                          <a:solidFill>
+                            <a:srgbClr val="1A1A1A"/>
+                          </a:solidFill>
+                          <a:latin typeface="Calibri"/>
+                        </a:rPr>
+                        <a:t>Tresemme</a:t>
+                      </a:r>
+                    </a:p>
+                  </a:txBody>
+                  <a:tcPr marL="45720" marR="45720" marT="22860" marB="22860" anchor="ctr">
+                    <a:solidFill>
+                      <a:srgbClr val="FFFFFF"/>
+                    </a:solidFill>
+                  </a:tcPr>
+                </a:tc>
+                <a:tc>
+                  <a:txBody>
+                    <a:bodyPr/>
+                    <a:lstStyle/>
+                    <a:p>
+                      <a:pPr algn="l"/>
+                      <a:r>
+                        <a:rPr lang="en-US" sz="1100" dirty="0">
+                          <a:solidFill>
+                            <a:srgbClr val="1A1A1A"/>
+                          </a:solidFill>
+                          <a:latin typeface="Calibri"/>
+                        </a:rPr>
+                        <a:t>17.3</a:t>
+                      </a:r>
+                    </a:p>
+                  </a:txBody>
+                  <a:tcPr marL="45720" marR="45720" marT="22860" marB="22860" anchor="ctr">
+                    <a:solidFill>
+                      <a:srgbClr val="FFFFFF"/>
+                    </a:solidFill>
+                  </a:tcPr>
+                </a:tc>
+                <a:tc>
+                  <a:txBody>
+                    <a:bodyPr/>
+                    <a:lstStyle/>
+                    <a:p>
+                      <a:pPr algn="l"/>
+                      <a:r>
+                        <a:rPr lang="en-US" sz="1100" dirty="0">
+                          <a:solidFill>
+                            <a:srgbClr val="1A1A1A"/>
+                          </a:solidFill>
+                          <a:latin typeface="Calibri"/>
+                        </a:rPr>
+                        <a:t>10%</a:t>
+                      </a:r>
+                    </a:p>
+                  </a:txBody>
+                  <a:tcPr marL="45720" marR="45720" marT="22860" marB="22860" anchor="ctr">
+                    <a:solidFill>
+                      <a:srgbClr val="FFFFFF"/>
+                    </a:solidFill>
+                  </a:tcPr>
+                </a:tc>
+                <a:tc>
+                  <a:txBody>
+                    <a:bodyPr/>
+                    <a:lstStyle/>
+                    <a:p>
+                      <a:pPr algn="l"/>
+                      <a:r>
+                        <a:rPr lang="en-US" sz="1100" dirty="0">
+                          <a:solidFill>
+                            <a:srgbClr val="1A1A1A"/>
+                          </a:solidFill>
+                          <a:latin typeface="Calibri"/>
+                        </a:rPr>
+                        <a:t>+140</a:t>
+                      </a:r>
+                    </a:p>
+                  </a:txBody>
+                  <a:tcPr marL="45720" marR="45720" marT="22860" marB="22860" anchor="ctr">
+                    <a:solidFill>
+                      <a:srgbClr val="FFFFFF"/>
+                    </a:solidFill>
+                  </a:tcPr>
+                </a:tc>
+              </a:tr>
+              <a:tr h="411480">
+                <a:tc>
+                  <a:txBody>
+                    <a:bodyPr/>
+                    <a:lstStyle/>
+                    <a:p>
+                      <a:pPr algn="l"/>
+                      <a:r>
+                        <a:rPr lang="en-US" sz="1100" dirty="0">
+                          <a:solidFill>
+                            <a:srgbClr val="1A1A1A"/>
+                          </a:solidFill>
+                          <a:latin typeface="Calibri"/>
+                        </a:rPr>
+                        <a:t>7</a:t>
+                      </a:r>
+                    </a:p>
+                  </a:txBody>
+                  <a:tcPr marL="45720" marR="45720" marT="22860" marB="22860" anchor="ctr">
+                    <a:solidFill>
+                      <a:srgbClr val="EAF3EF"/>
+                    </a:solidFill>
+                  </a:tcPr>
+                </a:tc>
+                <a:tc>
+                  <a:txBody>
+                    <a:bodyPr/>
+                    <a:lstStyle/>
+                    <a:p>
+                      <a:pPr algn="l"/>
+                      <a:r>
+                        <a:rPr lang="en-US" sz="1100" dirty="0">
+                          <a:solidFill>
+                            <a:srgbClr val="1A1A1A"/>
+                          </a:solidFill>
+                          <a:latin typeface="Calibri"/>
+                        </a:rPr>
+                        <a:t>Mamaearth</a:t>
+                      </a:r>
+                    </a:p>
+                  </a:txBody>
+                  <a:tcPr marL="45720" marR="45720" marT="22860" marB="22860" anchor="ctr">
+                    <a:solidFill>
+                      <a:srgbClr val="EAF3EF"/>
+                    </a:solidFill>
+                  </a:tcPr>
+                </a:tc>
+                <a:tc>
+                  <a:txBody>
+                    <a:bodyPr/>
+                    <a:lstStyle/>
+                    <a:p>
+                      <a:pPr algn="l"/>
+                      <a:r>
+                        <a:rPr lang="en-US" sz="1100" dirty="0">
+                          <a:solidFill>
+                            <a:srgbClr val="1A1A1A"/>
+                          </a:solidFill>
+                          <a:latin typeface="Calibri"/>
+                        </a:rPr>
+                        <a:t>6.5</a:t>
+                      </a:r>
+                    </a:p>
+                  </a:txBody>
+                  <a:tcPr marL="45720" marR="45720" marT="22860" marB="22860" anchor="ctr">
+                    <a:solidFill>
+                      <a:srgbClr val="EAF3EF"/>
+                    </a:solidFill>
+                  </a:tcPr>
+                </a:tc>
+                <a:tc>
+                  <a:txBody>
+                    <a:bodyPr/>
+                    <a:lstStyle/>
+                    <a:p>
+                      <a:pPr algn="l"/>
+                      <a:r>
+                        <a:rPr lang="en-US" sz="1100" dirty="0">
+                          <a:solidFill>
+                            <a:srgbClr val="1A1A1A"/>
+                          </a:solidFill>
+                          <a:latin typeface="Calibri"/>
+                        </a:rPr>
+                        <a:t>4%</a:t>
+                      </a:r>
+                    </a:p>
+                  </a:txBody>
+                  <a:tcPr marL="45720" marR="45720" marT="22860" marB="22860" anchor="ctr">
+                    <a:solidFill>
+                      <a:srgbClr val="EAF3EF"/>
+                    </a:solidFill>
+                  </a:tcPr>
+                </a:tc>
+                <a:tc>
+                  <a:txBody>
+                    <a:bodyPr/>
+                    <a:lstStyle/>
+                    <a:p>
+                      <a:pPr algn="l"/>
+                      <a:r>
+                        <a:rPr lang="en-US" sz="1100" dirty="0">
+                          <a:solidFill>
+                            <a:srgbClr val="1A1A1A"/>
+                          </a:solidFill>
+                          <a:latin typeface="Calibri"/>
+                        </a:rPr>
+                        <a:t>+130</a:t>
+                      </a:r>
+                    </a:p>
+                  </a:txBody>
+                  <a:tcPr marL="45720" marR="45720" marT="22860" marB="22860" anchor="ctr">
+                    <a:solidFill>
+                      <a:srgbClr val="EAF3EF"/>
+                    </a:solidFill>
+                  </a:tcPr>
+                </a:tc>
+              </a:tr>
+            </a:tbl>
+          </a:graphicData>
+        </a:graphic>
+      </p:graphicFrame>
+      <p:sp>
+        <p:nvSpPr>
+          <p:cNvPr id="8" name="Rect 8"/>
+          <p:cNvSpPr/>
+          <p:nvPr/>
+        </p:nvSpPr>
+        <p:spPr>
+          <a:xfrm>
+            <a:off x="548640" y="4663440"/>
+            <a:ext cx="11064240" cy="1463040"/>
+          </a:xfrm>
+          <a:prstGeom prst="roundRect">
+            <a:avLst/>
+          </a:prstGeom>
+          <a:solidFill>
+            <a:srgbClr val="ECE2D0"/>
+          </a:solidFill>
+          <a:ln>
+            <a:noFill/>
+          </a:ln>
+          <a:effectLst/>
+        </p:spPr>
+        <p:txBody>
+          <a:bodyPr/>
+          <a:lstStyle/>
+          <a:p/>
+        </p:txBody>
+      </p:sp>
+      <p:sp>
+        <p:nvSpPr>
+          <p:cNvPr id="9" name="TextBox 9"/>
+          <p:cNvSpPr txBox="1"/>
+          <p:nvPr/>
+        </p:nvSpPr>
+        <p:spPr>
+          <a:xfrm>
+            <a:off x="822960" y="4828032"/>
+            <a:ext cx="10515600" cy="1143000"/>
+          </a:xfrm>
+          <a:prstGeom prst="rect">
+            <a:avLst/>
+          </a:prstGeom>
+          <a:noFill/>
+        </p:spPr>
+        <p:txBody>
+          <a:bodyPr wrap="square" anchor="t" lIns="0" tIns="0" rIns="0" bIns="0">
+            <a:noAutofit/>
+          </a:bodyPr>
+          <a:lstStyle/>
+          <a:p>
+            <a:pPr algn="l"/>
+            <a:r>
+              <a:rPr lang="en-US" sz="1300" b="1" dirty="0">
+                <a:solidFill>
+                  <a:srgbClr val="6D2E46"/>
+                </a:solidFill>
+                <a:latin typeface="Calibri"/>
+              </a:rPr>
+              <a:t>Facewash: </a:t>
+            </a:r>
+            <a:r>
+              <a:rPr lang="en-US" sz="1250" dirty="0">
+                <a:solidFill>
+                  <a:srgbClr val="1A1A1A"/>
+                </a:solidFill>
+                <a:latin typeface="Calibri"/>
+              </a:rPr>
+              <a:t>Mamaearth ranks #4 nationally and is growing share fastest of the top 5 (+311bps YoY vs next-best Garnier +55bps) — validates the MT bright-spot story at national level too.</a:t>
+            </a:r>
+          </a:p>
+          <a:p>
+            <a:pPr algn="l"/>
+            <a:r>
+              <a:rPr lang="en-US" sz="1300" b="1" dirty="0">
+                <a:solidFill>
+                  <a:srgbClr val="6D2E46"/>
+                </a:solidFill>
+                <a:latin typeface="Calibri"/>
+              </a:rPr>
+              <a:t>Shampoo: </a:t>
+            </a:r>
+            <a:r>
+              <a:rPr lang="en-US" sz="1250" dirty="0">
+                <a:solidFill>
+                  <a:srgbClr val="1A1A1A"/>
+                </a:solidFill>
+                <a:latin typeface="Calibri"/>
+              </a:rPr>
+              <a:t>Mamaearth is #7 nationally; category leaders (Dove, H&amp;S) are also growing double-digit bps YoY — this is a crowded, well-defended category, consistent with GT-specific weakness found in the MT vs GT panel.</a:t>
+            </a:r>
+          </a:p>
+        </p:txBody>
+      </p:sp>
+    </p:spTree>
+  </p:cSld>
+  <p:clrMapOvr>
+    <a:masterClrMapping/>
+  </p:clrMapOvr>
+</p:sld>
+</file>
+
+<file path=ppt/slides/slide7.xml><?xml version="1.0" encoding="utf-8"?>
+<p:sld xmlns:a="http://schemas.openxmlformats.org/drawingml/2006/main" xmlns:r="http://schemas.openxmlformats.org/officeDocument/2006/relationships" xmlns:p="http://schemas.openxmlformats.org/presentationml/2006/main">
+  <p:cSld>
+    <p:bg>
+      <p:bgPr>
+        <a:solidFill>
+          <a:srgbClr val="FFFFFF"/>
+        </a:solidFill>
+        <a:effectLst/>
+      </p:bgPr>
+    </p:bg>
+    <p:spTree>
+      <p:nvGrpSpPr>
+        <p:cNvPr id="1" name=""/>
+        <p:cNvGrpSpPr/>
+        <p:nvPr/>
+      </p:nvGrpSpPr>
+      <p:grpSpPr>
+        <a:xfrm>
+          <a:off x="0" y="0"/>
+          <a:ext cx="0" cy="0"/>
+          <a:chOff x="0" y="0"/>
+          <a:chExt cx="0" cy="0"/>
+        </a:xfrm>
+      </p:grpSpPr>
+      <p:sp>
+        <p:nvSpPr>
+          <p:cNvPr id="2" name="TextBox 2"/>
+          <p:cNvSpPr txBox="1"/>
+          <p:nvPr/>
+        </p:nvSpPr>
+        <p:spPr>
+          <a:xfrm>
+            <a:off x="548640" y="320040"/>
+            <a:ext cx="10972800" cy="548640"/>
+          </a:xfrm>
+          <a:prstGeom prst="rect">
+            <a:avLst/>
+          </a:prstGeom>
+          <a:noFill/>
+        </p:spPr>
+        <p:txBody>
+          <a:bodyPr wrap="square" anchor="t" lIns="0" tIns="0" rIns="0" bIns="0">
+            <a:noAutofit/>
+          </a:bodyPr>
+          <a:lstStyle/>
+          <a:p>
+            <a:pPr algn="l"/>
+            <a:r>
+              <a:rPr lang="en-US" sz="2600" b="1" dirty="0">
+                <a:solidFill>
+                  <a:srgbClr val="1A1A1A"/>
+                </a:solidFill>
+                <a:latin typeface="Cambria"/>
+              </a:rPr>
+              <a:t>Pack-Size &amp; State White Space (Nielsen, May'26)</a:t>
+            </a:r>
+          </a:p>
+        </p:txBody>
+      </p:sp>
+      <p:sp>
+        <p:nvSpPr>
+          <p:cNvPr id="3" name="TextBox 3"/>
+          <p:cNvSpPr txBox="1"/>
+          <p:nvPr/>
+        </p:nvSpPr>
+        <p:spPr>
+          <a:xfrm>
+            <a:off x="548640" y="960120"/>
+            <a:ext cx="5486400" cy="320040"/>
+          </a:xfrm>
+          <a:prstGeom prst="rect">
+            <a:avLst/>
+          </a:prstGeom>
+          <a:noFill/>
+        </p:spPr>
+        <p:txBody>
+          <a:bodyPr wrap="square" anchor="t" lIns="0" tIns="0" rIns="0" bIns="0">
+            <a:noAutofit/>
+          </a:bodyPr>
+          <a:lstStyle/>
+          <a:p>
+            <a:pPr algn="l"/>
+            <a:r>
+              <a:rPr lang="en-US" sz="1400" b="1" dirty="0">
+                <a:solidFill>
+                  <a:srgbClr val="6D2E46"/>
+                </a:solidFill>
+                <a:latin typeface="Calibri"/>
+              </a:rPr>
+              <a:t>Mamaearth Facewash — pack size</a:t>
+            </a:r>
+          </a:p>
+        </p:txBody>
+      </p:sp>
+      <p:graphicFrame>
+        <p:nvGraphicFramePr>
+          <p:cNvPr id="4" name="Table 4"/>
+          <p:cNvGraphicFramePr>
+            <a:graphicFrameLocks noGrp="1"/>
+          </p:cNvGraphicFramePr>
+          <p:nvPr/>
+        </p:nvGraphicFramePr>
+        <p:xfrm>
+          <a:off x="548640" y="1325880"/>
+          <a:ext cx="11064240" cy="2468880"/>
+        </p:xfrm>
+        <a:graphic>
+          <a:graphicData uri="http://schemas.openxmlformats.org/drawingml/2006/table">
+            <a:tbl>
+              <a:tblPr firstRow="1" bandRow="0">
+                <a:tableStyleId>{5C22544A-7EE6-4342-B048-85BDC9FD1C3A}</a:tableStyleId>
+              </a:tblPr>
+              <a:tblGrid>
+                <a:gridCol w="1371600"/>
+                <a:gridCol w="3017520"/>
+                <a:gridCol w="1828800"/>
+                <a:gridCol w="4846320"/>
+              </a:tblGrid>
+              <a:tr h="411480">
+                <a:tc>
+                  <a:txBody>
+                    <a:bodyPr/>
+                    <a:lstStyle/>
+                    <a:p>
+                      <a:pPr algn="l"/>
+                      <a:r>
+                        <a:rPr lang="en-US" sz="1150" b="1" dirty="0">
+                          <a:solidFill>
+                            <a:srgbClr val="FFFFFF"/>
+                          </a:solidFill>
+                          <a:latin typeface="Calibri"/>
+                        </a:rPr>
+                        <a:t>Pack</a:t>
+                      </a:r>
+                    </a:p>
+                  </a:txBody>
+                  <a:tcPr marL="45720" marR="45720" marT="22860" marB="22860" anchor="ctr">
+                    <a:solidFill>
+                      <a:srgbClr val="2F3C7E"/>
+                    </a:solidFill>
+                  </a:tcPr>
+                </a:tc>
+                <a:tc>
+                  <a:txBody>
+                    <a:bodyPr/>
+                    <a:lstStyle/>
+                    <a:p>
+                      <a:pPr algn="l"/>
+                      <a:r>
+                        <a:rPr lang="en-US" sz="1150" b="1" dirty="0">
+                          <a:solidFill>
+                            <a:srgbClr val="FFFFFF"/>
+                          </a:solidFill>
+                          <a:latin typeface="Calibri"/>
+                        </a:rPr>
+                        <a:t>% of Mamaearth Facewash</a:t>
+                      </a:r>
+                    </a:p>
+                  </a:txBody>
+                  <a:tcPr marL="45720" marR="45720" marT="22860" marB="22860" anchor="ctr">
+                    <a:solidFill>
+                      <a:srgbClr val="2F3C7E"/>
+                    </a:solidFill>
+                  </a:tcPr>
+                </a:tc>
+                <a:tc>
+                  <a:txBody>
+                    <a:bodyPr/>
+                    <a:lstStyle/>
+                    <a:p>
+                      <a:pPr algn="l"/>
+                      <a:r>
+                        <a:rPr lang="en-US" sz="1150" b="1" dirty="0">
+                          <a:solidFill>
+                            <a:srgbClr val="FFFFFF"/>
+                          </a:solidFill>
+                          <a:latin typeface="Calibri"/>
+                        </a:rPr>
+                        <a:t>YoY Growth</a:t>
+                      </a:r>
+                    </a:p>
+                  </a:txBody>
+                  <a:tcPr marL="45720" marR="45720" marT="22860" marB="22860" anchor="ctr">
+                    <a:solidFill>
+                      <a:srgbClr val="2F3C7E"/>
+                    </a:solidFill>
+                  </a:tcPr>
+                </a:tc>
+                <a:tc>
+                  <a:txBody>
+                    <a:bodyPr/>
+                    <a:lstStyle/>
+                    <a:p>
+                      <a:pPr algn="l"/>
+                      <a:r>
+                        <a:rPr lang="en-US" sz="1150" b="1" dirty="0">
+                          <a:solidFill>
+                            <a:srgbClr val="FFFFFF"/>
+                          </a:solidFill>
+                          <a:latin typeface="Calibri"/>
+                        </a:rPr>
+                        <a:t>Note</a:t>
+                      </a:r>
+                    </a:p>
+                  </a:txBody>
+                  <a:tcPr marL="45720" marR="45720" marT="22860" marB="22860" anchor="ctr">
+                    <a:solidFill>
+                      <a:srgbClr val="2F3C7E"/>
+                    </a:solidFill>
+                  </a:tcPr>
+                </a:tc>
+              </a:tr>
+              <a:tr h="411480">
+                <a:tc>
+                  <a:txBody>
+                    <a:bodyPr/>
+                    <a:lstStyle/>
+                    <a:p>
+                      <a:pPr algn="l"/>
+                      <a:r>
+                        <a:rPr lang="en-US" sz="1150" dirty="0">
+                          <a:solidFill>
+                            <a:srgbClr val="1A1A1A"/>
+                          </a:solidFill>
+                          <a:latin typeface="Calibri"/>
+                        </a:rPr>
+                        <a:t>150ml</a:t>
+                      </a:r>
+                    </a:p>
+                  </a:txBody>
+                  <a:tcPr marL="45720" marR="45720" marT="22860" marB="22860" anchor="ctr">
+                    <a:solidFill>
+                      <a:srgbClr val="FFFFFF"/>
+                    </a:solidFill>
+                  </a:tcPr>
+                </a:tc>
+                <a:tc>
+                  <a:txBody>
+                    <a:bodyPr/>
+                    <a:lstStyle/>
+                    <a:p>
+                      <a:pPr algn="l"/>
+                      <a:r>
+                        <a:rPr lang="en-US" sz="1150" dirty="0">
+                          <a:solidFill>
+                            <a:srgbClr val="1A1A1A"/>
+                          </a:solidFill>
+                          <a:latin typeface="Calibri"/>
+                        </a:rPr>
+                        <a:t>58%</a:t>
+                      </a:r>
+                    </a:p>
+                  </a:txBody>
+                  <a:tcPr marL="45720" marR="45720" marT="22860" marB="22860" anchor="ctr">
+                    <a:solidFill>
+                      <a:srgbClr val="FFFFFF"/>
+                    </a:solidFill>
+                  </a:tcPr>
+                </a:tc>
+                <a:tc>
+                  <a:txBody>
+                    <a:bodyPr/>
+                    <a:lstStyle/>
+                    <a:p>
+                      <a:pPr algn="l"/>
+                      <a:r>
+                        <a:rPr lang="en-US" sz="1150" dirty="0">
+                          <a:solidFill>
+                            <a:srgbClr val="1A1A1A"/>
+                          </a:solidFill>
+                          <a:latin typeface="Calibri"/>
+                        </a:rPr>
+                        <a:t>+98%</a:t>
+                      </a:r>
+                    </a:p>
+                  </a:txBody>
+                  <a:tcPr marL="45720" marR="45720" marT="22860" marB="22860" anchor="ctr">
+                    <a:solidFill>
+                      <a:srgbClr val="FFFFFF"/>
+                    </a:solidFill>
+                  </a:tcPr>
+                </a:tc>
+                <a:tc>
+                  <a:txBody>
+                    <a:bodyPr/>
+                    <a:lstStyle/>
+                    <a:p>
+                      <a:pPr algn="l"/>
+                      <a:r>
+                        <a:rPr lang="en-US" sz="1150" dirty="0">
+                          <a:solidFill>
+                            <a:srgbClr val="1A1A1A"/>
+                          </a:solidFill>
+                          <a:latin typeface="Calibri"/>
+                        </a:rPr>
+                        <a:t>Hero pack — protect shelf depth</a:t>
+                      </a:r>
+                    </a:p>
+                  </a:txBody>
+                  <a:tcPr marL="45720" marR="45720" marT="22860" marB="22860" anchor="ctr">
+                    <a:solidFill>
+                      <a:srgbClr val="FFFFFF"/>
+                    </a:solidFill>
+                  </a:tcPr>
+                </a:tc>
+              </a:tr>
+              <a:tr h="411480">
+                <a:tc>
+                  <a:txBody>
+                    <a:bodyPr/>
+                    <a:lstStyle/>
+                    <a:p>
+                      <a:pPr algn="l"/>
+                      <a:r>
+                        <a:rPr lang="en-US" sz="1150" dirty="0">
+                          <a:solidFill>
+                            <a:srgbClr val="1A1A1A"/>
+                          </a:solidFill>
+                          <a:latin typeface="Calibri"/>
+                        </a:rPr>
+                        <a:t>100ml</a:t>
+                      </a:r>
+                    </a:p>
+                  </a:txBody>
+                  <a:tcPr marL="45720" marR="45720" marT="22860" marB="22860" anchor="ctr">
+                    <a:solidFill>
+                      <a:srgbClr val="FFFFFF"/>
+                    </a:solidFill>
+                  </a:tcPr>
+                </a:tc>
+                <a:tc>
+                  <a:txBody>
+                    <a:bodyPr/>
+                    <a:lstStyle/>
+                    <a:p>
+                      <a:pPr algn="l"/>
+                      <a:r>
+                        <a:rPr lang="en-US" sz="1150" dirty="0">
+                          <a:solidFill>
+                            <a:srgbClr val="1A1A1A"/>
+                          </a:solidFill>
+                          <a:latin typeface="Calibri"/>
+                        </a:rPr>
+                        <a:t>21%</a:t>
+                      </a:r>
+                    </a:p>
+                  </a:txBody>
+                  <a:tcPr marL="45720" marR="45720" marT="22860" marB="22860" anchor="ctr">
+                    <a:solidFill>
+                      <a:srgbClr val="FFFFFF"/>
+                    </a:solidFill>
+                  </a:tcPr>
+                </a:tc>
+                <a:tc>
+                  <a:txBody>
+                    <a:bodyPr/>
+                    <a:lstStyle/>
+                    <a:p>
+                      <a:pPr algn="l"/>
+                      <a:r>
+                        <a:rPr lang="en-US" sz="1150" dirty="0">
+                          <a:solidFill>
+                            <a:srgbClr val="1A1A1A"/>
+                          </a:solidFill>
+                          <a:latin typeface="Calibri"/>
+                        </a:rPr>
+                        <a:t>-11%</a:t>
+                      </a:r>
+                    </a:p>
+                  </a:txBody>
+                  <a:tcPr marL="45720" marR="45720" marT="22860" marB="22860" anchor="ctr">
+                    <a:solidFill>
+                      <a:srgbClr val="FFFFFF"/>
+                    </a:solidFill>
+                  </a:tcPr>
+                </a:tc>
+                <a:tc>
+                  <a:txBody>
+                    <a:bodyPr/>
+                    <a:lstStyle/>
+                    <a:p>
+                      <a:pPr algn="l"/>
+                      <a:r>
+                        <a:rPr lang="en-US" sz="1150" dirty="0">
+                          <a:solidFill>
+                            <a:srgbClr val="1A1A1A"/>
+                          </a:solidFill>
+                          <a:latin typeface="Calibri"/>
+                        </a:rPr>
+                        <a:t>Declining — check availability/promo</a:t>
+                      </a:r>
+                    </a:p>
+                  </a:txBody>
+                  <a:tcPr marL="45720" marR="45720" marT="22860" marB="22860" anchor="ctr">
+                    <a:solidFill>
+                      <a:srgbClr val="FFFFFF"/>
+                    </a:solidFill>
+                  </a:tcPr>
+                </a:tc>
+              </a:tr>
+              <a:tr h="411480">
+                <a:tc>
+                  <a:txBody>
+                    <a:bodyPr/>
+                    <a:lstStyle/>
+                    <a:p>
+                      <a:pPr algn="l"/>
+                      <a:r>
+                        <a:rPr lang="en-US" sz="1150" dirty="0">
+                          <a:solidFill>
+                            <a:srgbClr val="1A1A1A"/>
+                          </a:solidFill>
+                          <a:latin typeface="Calibri"/>
+                        </a:rPr>
+                        <a:t>200ml</a:t>
+                      </a:r>
+                    </a:p>
+                  </a:txBody>
+                  <a:tcPr marL="45720" marR="45720" marT="22860" marB="22860" anchor="ctr">
+                    <a:solidFill>
+                      <a:srgbClr val="FFFFFF"/>
+                    </a:solidFill>
+                  </a:tcPr>
+                </a:tc>
+                <a:tc>
+                  <a:txBody>
+                    <a:bodyPr/>
+                    <a:lstStyle/>
+                    <a:p>
+                      <a:pPr algn="l"/>
+                      <a:r>
+                        <a:rPr lang="en-US" sz="1150" dirty="0">
+                          <a:solidFill>
+                            <a:srgbClr val="1A1A1A"/>
+                          </a:solidFill>
+                          <a:latin typeface="Calibri"/>
+                        </a:rPr>
+                        <a:t>11%</a:t>
+                      </a:r>
+                    </a:p>
+                  </a:txBody>
+                  <a:tcPr marL="45720" marR="45720" marT="22860" marB="22860" anchor="ctr">
+                    <a:solidFill>
+                      <a:srgbClr val="FFFFFF"/>
+                    </a:solidFill>
+                  </a:tcPr>
+                </a:tc>
+                <a:tc>
+                  <a:txBody>
+                    <a:bodyPr/>
+                    <a:lstStyle/>
+                    <a:p>
+                      <a:pPr algn="l"/>
+                      <a:r>
+                        <a:rPr lang="en-US" sz="1150" dirty="0">
+                          <a:solidFill>
+                            <a:srgbClr val="1A1A1A"/>
+                          </a:solidFill>
+                          <a:latin typeface="Calibri"/>
+                        </a:rPr>
+                        <a:t>n/a</a:t>
+                      </a:r>
+                    </a:p>
+                  </a:txBody>
+                  <a:tcPr marL="45720" marR="45720" marT="22860" marB="22860" anchor="ctr">
+                    <a:solidFill>
+                      <a:srgbClr val="FFFFFF"/>
+                    </a:solidFill>
+                  </a:tcPr>
+                </a:tc>
+                <a:tc>
+                  <a:txBody>
+                    <a:bodyPr/>
+                    <a:lstStyle/>
+                    <a:p>
+                      <a:pPr algn="l"/>
+                      <a:r>
+                        <a:rPr lang="en-US" sz="1150" dirty="0">
+                          <a:solidFill>
+                            <a:srgbClr val="1A1A1A"/>
+                          </a:solidFill>
+                          <a:latin typeface="Calibri"/>
+                        </a:rPr>
+                        <a:t>Emerging growth builder</a:t>
+                      </a:r>
+                    </a:p>
+                  </a:txBody>
+                  <a:tcPr marL="45720" marR="45720" marT="22860" marB="22860" anchor="ctr">
+                    <a:solidFill>
+                      <a:srgbClr val="FFFFFF"/>
+                    </a:solidFill>
+                  </a:tcPr>
+                </a:tc>
+              </a:tr>
+              <a:tr h="411480">
+                <a:tc>
+                  <a:txBody>
+                    <a:bodyPr/>
+                    <a:lstStyle/>
+                    <a:p>
+                      <a:pPr algn="l"/>
+                      <a:r>
+                        <a:rPr lang="en-US" sz="1150" dirty="0">
+                          <a:solidFill>
+                            <a:srgbClr val="1A1A1A"/>
+                          </a:solidFill>
+                          <a:latin typeface="Calibri"/>
+                        </a:rPr>
+                        <a:t>50ml</a:t>
+                      </a:r>
+                    </a:p>
+                  </a:txBody>
+                  <a:tcPr marL="45720" marR="45720" marT="22860" marB="22860" anchor="ctr">
+                    <a:solidFill>
+                      <a:srgbClr val="FFFFFF"/>
+                    </a:solidFill>
+                  </a:tcPr>
+                </a:tc>
+                <a:tc>
+                  <a:txBody>
+                    <a:bodyPr/>
+                    <a:lstStyle/>
+                    <a:p>
+                      <a:pPr algn="l"/>
+                      <a:r>
+                        <a:rPr lang="en-US" sz="1150" dirty="0">
+                          <a:solidFill>
+                            <a:srgbClr val="1A1A1A"/>
+                          </a:solidFill>
+                          <a:latin typeface="Calibri"/>
+                        </a:rPr>
+                        <a:t>11%</a:t>
+                      </a:r>
+                    </a:p>
+                  </a:txBody>
+                  <a:tcPr marL="45720" marR="45720" marT="22860" marB="22860" anchor="ctr">
+                    <a:solidFill>
+                      <a:srgbClr val="FFFFFF"/>
+                    </a:solidFill>
+                  </a:tcPr>
+                </a:tc>
+                <a:tc>
+                  <a:txBody>
+                    <a:bodyPr/>
+                    <a:lstStyle/>
+                    <a:p>
+                      <a:pPr algn="l"/>
+                      <a:r>
+                        <a:rPr lang="en-US" sz="1150" dirty="0">
+                          <a:solidFill>
+                            <a:srgbClr val="1A1A1A"/>
+                          </a:solidFill>
+                          <a:latin typeface="Calibri"/>
+                        </a:rPr>
+                        <a:t>+80%</a:t>
+                      </a:r>
+                    </a:p>
+                  </a:txBody>
+                  <a:tcPr marL="45720" marR="45720" marT="22860" marB="22860" anchor="ctr">
+                    <a:solidFill>
+                      <a:srgbClr val="FFFFFF"/>
+                    </a:solidFill>
+                  </a:tcPr>
+                </a:tc>
+                <a:tc>
+                  <a:txBody>
+                    <a:bodyPr/>
+                    <a:lstStyle/>
+                    <a:p>
+                      <a:pPr algn="l"/>
+                      <a:r>
+                        <a:rPr lang="en-US" sz="1150" dirty="0">
+                          <a:solidFill>
+                            <a:srgbClr val="1A1A1A"/>
+                          </a:solidFill>
+                          <a:latin typeface="Calibri"/>
+                        </a:rPr>
+                        <a:t>Trial pack — till-point placement</a:t>
+                      </a:r>
+                    </a:p>
+                  </a:txBody>
+                  <a:tcPr marL="45720" marR="45720" marT="22860" marB="22860" anchor="ctr">
+                    <a:solidFill>
+                      <a:srgbClr val="FFFFFF"/>
+                    </a:solidFill>
+                  </a:tcPr>
+                </a:tc>
+              </a:tr>
+              <a:tr h="411480">
+                <a:tc>
+                  <a:txBody>
+                    <a:bodyPr/>
+                    <a:lstStyle/>
+                    <a:p>
+                      <a:pPr algn="l"/>
+                      <a:r>
+                        <a:rPr lang="en-US" sz="1150" dirty="0">
+                          <a:solidFill>
+                            <a:srgbClr val="1A1A1A"/>
+                          </a:solidFill>
+                          <a:latin typeface="Calibri"/>
+                        </a:rPr>
+                        <a:t>250ml</a:t>
+                      </a:r>
+                    </a:p>
+                  </a:txBody>
+                  <a:tcPr marL="45720" marR="45720" marT="22860" marB="22860" anchor="ctr">
+                    <a:solidFill>
+                      <a:srgbClr val="FFFFFF"/>
+                    </a:solidFill>
+                  </a:tcPr>
+                </a:tc>
+                <a:tc>
+                  <a:txBody>
+                    <a:bodyPr/>
+                    <a:lstStyle/>
+                    <a:p>
+                      <a:pPr algn="l"/>
+                      <a:r>
+                        <a:rPr lang="en-US" sz="1150" dirty="0">
+                          <a:solidFill>
+                            <a:srgbClr val="1A1A1A"/>
+                          </a:solidFill>
+                          <a:latin typeface="Calibri"/>
+                        </a:rPr>
+                        <a:t>0%</a:t>
+                      </a:r>
+                    </a:p>
+                  </a:txBody>
+                  <a:tcPr marL="45720" marR="45720" marT="22860" marB="22860" anchor="ctr">
+                    <a:solidFill>
+                      <a:srgbClr val="FFFFFF"/>
+                    </a:solidFill>
+                  </a:tcPr>
+                </a:tc>
+                <a:tc>
+                  <a:txBody>
+                    <a:bodyPr/>
+                    <a:lstStyle/>
+                    <a:p>
+                      <a:pPr algn="l"/>
+                      <a:r>
+                        <a:rPr lang="en-US" sz="1150" dirty="0">
+                          <a:solidFill>
+                            <a:srgbClr val="1A1A1A"/>
+                          </a:solidFill>
+                          <a:latin typeface="Calibri"/>
+                        </a:rPr>
+                        <a:t>-94%</a:t>
+                      </a:r>
+                    </a:p>
+                  </a:txBody>
+                  <a:tcPr marL="45720" marR="45720" marT="22860" marB="22860" anchor="ctr">
+                    <a:solidFill>
+                      <a:srgbClr val="FFFFFF"/>
+                    </a:solidFill>
+                  </a:tcPr>
+                </a:tc>
+                <a:tc>
+                  <a:txBody>
+                    <a:bodyPr/>
+                    <a:lstStyle/>
+                    <a:p>
+                      <a:pPr algn="l"/>
+                      <a:r>
+                        <a:rPr lang="en-US" sz="1150" dirty="0">
+                          <a:solidFill>
+                            <a:srgbClr val="1A1A1A"/>
+                          </a:solidFill>
+                          <a:latin typeface="Calibri"/>
+                        </a:rPr>
+                        <a:t>Sharp decline, low base</a:t>
+                      </a:r>
+                    </a:p>
+                  </a:txBody>
+                  <a:tcPr marL="45720" marR="45720" marT="22860" marB="22860" anchor="ctr">
+                    <a:solidFill>
+                      <a:srgbClr val="FFFFFF"/>
+                    </a:solidFill>
+                  </a:tcPr>
+                </a:tc>
+              </a:tr>
+            </a:tbl>
+          </a:graphicData>
+        </a:graphic>
+      </p:graphicFrame>
+      <p:sp>
+        <p:nvSpPr>
+          <p:cNvPr id="5" name="TextBox 5"/>
+          <p:cNvSpPr txBox="1"/>
+          <p:nvPr/>
+        </p:nvSpPr>
+        <p:spPr>
+          <a:xfrm>
+            <a:off x="548640" y="3703320"/>
+            <a:ext cx="5486400" cy="320040"/>
+          </a:xfrm>
+          <a:prstGeom prst="rect">
+            <a:avLst/>
+          </a:prstGeom>
+          <a:noFill/>
+        </p:spPr>
+        <p:txBody>
+          <a:bodyPr wrap="square" anchor="t" lIns="0" tIns="0" rIns="0" bIns="0">
+            <a:noAutofit/>
+          </a:bodyPr>
+          <a:lstStyle/>
+          <a:p>
+            <a:pPr algn="l"/>
+            <a:r>
+              <a:rPr lang="en-US" sz="1400" b="1" dirty="0">
+                <a:solidFill>
+                  <a:srgbClr val="6D2E46"/>
+                </a:solidFill>
+                <a:latin typeface="Calibri"/>
+              </a:rPr>
+              <a:t>High-contribution, low-share states</a:t>
+            </a:r>
+          </a:p>
+        </p:txBody>
+      </p:sp>
+      <p:graphicFrame>
+        <p:nvGraphicFramePr>
+          <p:cNvPr id="6" name="Table 6"/>
+          <p:cNvGraphicFramePr>
+            <a:graphicFrameLocks noGrp="1"/>
+          </p:cNvGraphicFramePr>
+          <p:nvPr/>
+        </p:nvGraphicFramePr>
+        <p:xfrm>
+          <a:off x="548640" y="4069080"/>
+          <a:ext cx="11064240" cy="1920240"/>
+        </p:xfrm>
+        <a:graphic>
+          <a:graphicData uri="http://schemas.openxmlformats.org/drawingml/2006/table">
+            <a:tbl>
+              <a:tblPr firstRow="1" bandRow="0">
+                <a:tableStyleId>{5C22544A-7EE6-4342-B048-85BDC9FD1C3A}</a:tableStyleId>
+              </a:tblPr>
+              <a:tblGrid>
+                <a:gridCol w="3657600"/>
+                <a:gridCol w="2468880"/>
+                <a:gridCol w="2011680"/>
+                <a:gridCol w="2926080"/>
+              </a:tblGrid>
+              <a:tr h="384048">
+                <a:tc>
+                  <a:txBody>
+                    <a:bodyPr/>
+                    <a:lstStyle/>
+                    <a:p>
+                      <a:pPr algn="l"/>
+                      <a:r>
+                        <a:rPr lang="en-US" sz="1150" b="1" dirty="0">
+                          <a:solidFill>
+                            <a:srgbClr val="FFFFFF"/>
+                          </a:solidFill>
+                          <a:latin typeface="Calibri"/>
+                        </a:rPr>
+                        <a:t>State</a:t>
+                      </a:r>
+                    </a:p>
+                  </a:txBody>
+                  <a:tcPr marL="45720" marR="45720" marT="22860" marB="22860" anchor="ctr">
+                    <a:solidFill>
+                      <a:srgbClr val="2F3C7E"/>
+                    </a:solidFill>
+                  </a:tcPr>
+                </a:tc>
+                <a:tc>
+                  <a:txBody>
+                    <a:bodyPr/>
+                    <a:lstStyle/>
+                    <a:p>
+                      <a:pPr algn="l"/>
+                      <a:r>
+                        <a:rPr lang="en-US" sz="1150" b="1" dirty="0">
+                          <a:solidFill>
+                            <a:srgbClr val="FFFFFF"/>
+                          </a:solidFill>
+                          <a:latin typeface="Calibri"/>
+                        </a:rPr>
+                        <a:t>Category Contribution</a:t>
+                      </a:r>
+                    </a:p>
+                  </a:txBody>
+                  <a:tcPr marL="45720" marR="45720" marT="22860" marB="22860" anchor="ctr">
+                    <a:solidFill>
+                      <a:srgbClr val="2F3C7E"/>
+                    </a:solidFill>
+                  </a:tcPr>
+                </a:tc>
+                <a:tc>
+                  <a:txBody>
+                    <a:bodyPr/>
+                    <a:lstStyle/>
+                    <a:p>
+                      <a:pPr algn="l"/>
+                      <a:r>
+                        <a:rPr lang="en-US" sz="1150" b="1" dirty="0">
+                          <a:solidFill>
+                            <a:srgbClr val="FFFFFF"/>
+                          </a:solidFill>
+                          <a:latin typeface="Calibri"/>
+                        </a:rPr>
+                        <a:t>May'26 Share</a:t>
+                      </a:r>
+                    </a:p>
+                  </a:txBody>
+                  <a:tcPr marL="45720" marR="45720" marT="22860" marB="22860" anchor="ctr">
+                    <a:solidFill>
+                      <a:srgbClr val="2F3C7E"/>
+                    </a:solidFill>
+                  </a:tcPr>
+                </a:tc>
+                <a:tc>
+                  <a:txBody>
+                    <a:bodyPr/>
+                    <a:lstStyle/>
+                    <a:p>
+                      <a:pPr algn="l"/>
+                      <a:r>
+                        <a:rPr lang="en-US" sz="1150" b="1" dirty="0">
+                          <a:solidFill>
+                            <a:srgbClr val="FFFFFF"/>
+                          </a:solidFill>
+                          <a:latin typeface="Calibri"/>
+                        </a:rPr>
+                        <a:t>Gap Read</a:t>
+                      </a:r>
+                    </a:p>
+                  </a:txBody>
+                  <a:tcPr marL="45720" marR="45720" marT="22860" marB="22860" anchor="ctr">
+                    <a:solidFill>
+                      <a:srgbClr val="2F3C7E"/>
+                    </a:solidFill>
+                  </a:tcPr>
+                </a:tc>
+              </a:tr>
+              <a:tr h="384048">
+                <a:tc>
+                  <a:txBody>
+                    <a:bodyPr/>
+                    <a:lstStyle/>
+                    <a:p>
+                      <a:pPr algn="l"/>
+                      <a:r>
+                        <a:rPr lang="en-US" sz="1150" dirty="0">
+                          <a:solidFill>
+                            <a:srgbClr val="1A1A1A"/>
+                          </a:solidFill>
+                          <a:latin typeface="Calibri"/>
+                        </a:rPr>
+                        <a:t>Uttar Pradesh (Facewash)</a:t>
+                      </a:r>
+                    </a:p>
+                  </a:txBody>
+                  <a:tcPr marL="45720" marR="45720" marT="22860" marB="22860" anchor="ctr">
+                    <a:solidFill>
+                      <a:srgbClr val="FFFFFF"/>
+                    </a:solidFill>
+                  </a:tcPr>
+                </a:tc>
+                <a:tc>
+                  <a:txBody>
+                    <a:bodyPr/>
+                    <a:lstStyle/>
+                    <a:p>
+                      <a:pPr algn="l"/>
+                      <a:r>
+                        <a:rPr lang="en-US" sz="1150" dirty="0">
+                          <a:solidFill>
+                            <a:srgbClr val="1A1A1A"/>
+                          </a:solidFill>
+                          <a:latin typeface="Calibri"/>
+                        </a:rPr>
+                        <a:t>15%</a:t>
+                      </a:r>
+                    </a:p>
+                  </a:txBody>
+                  <a:tcPr marL="45720" marR="45720" marT="22860" marB="22860" anchor="ctr">
+                    <a:solidFill>
+                      <a:srgbClr val="FFFFFF"/>
+                    </a:solidFill>
+                  </a:tcPr>
+                </a:tc>
+                <a:tc>
+                  <a:txBody>
+                    <a:bodyPr/>
+                    <a:lstStyle/>
+                    <a:p>
+                      <a:pPr algn="l"/>
+                      <a:r>
+                        <a:rPr lang="en-US" sz="1150" dirty="0">
+                          <a:solidFill>
+                            <a:srgbClr val="1A1A1A"/>
+                          </a:solidFill>
+                          <a:latin typeface="Calibri"/>
+                        </a:rPr>
+                        <a:t>6%</a:t>
+                      </a:r>
+                    </a:p>
+                  </a:txBody>
+                  <a:tcPr marL="45720" marR="45720" marT="22860" marB="22860" anchor="ctr">
+                    <a:solidFill>
+                      <a:srgbClr val="FFFFFF"/>
+                    </a:solidFill>
+                  </a:tcPr>
+                </a:tc>
+                <a:tc>
+                  <a:txBody>
+                    <a:bodyPr/>
+                    <a:lstStyle/>
+                    <a:p>
+                      <a:pPr algn="l"/>
+                      <a:r>
+                        <a:rPr lang="en-US" sz="1150" dirty="0">
+                          <a:solidFill>
+                            <a:srgbClr val="1A1A1A"/>
+                          </a:solidFill>
+                          <a:latin typeface="Calibri"/>
+                        </a:rPr>
+                        <a:t>Under-penetrated</a:t>
+                      </a:r>
+                    </a:p>
+                  </a:txBody>
+                  <a:tcPr marL="45720" marR="45720" marT="22860" marB="22860" anchor="ctr">
+                    <a:solidFill>
+                      <a:srgbClr val="FFFFFF"/>
+                    </a:solidFill>
+                  </a:tcPr>
+                </a:tc>
+              </a:tr>
+              <a:tr h="384048">
+                <a:tc>
+                  <a:txBody>
+                    <a:bodyPr/>
+                    <a:lstStyle/>
+                    <a:p>
+                      <a:pPr algn="l"/>
+                      <a:r>
+                        <a:rPr lang="en-US" sz="1150" dirty="0">
+                          <a:solidFill>
+                            <a:srgbClr val="1A1A1A"/>
+                          </a:solidFill>
+                          <a:latin typeface="Calibri"/>
+                        </a:rPr>
+                        <a:t>Maharashtra (Facewash)</a:t>
+                      </a:r>
+                    </a:p>
+                  </a:txBody>
+                  <a:tcPr marL="45720" marR="45720" marT="22860" marB="22860" anchor="ctr">
+                    <a:solidFill>
+                      <a:srgbClr val="FFFFFF"/>
+                    </a:solidFill>
+                  </a:tcPr>
+                </a:tc>
+                <a:tc>
+                  <a:txBody>
+                    <a:bodyPr/>
+                    <a:lstStyle/>
+                    <a:p>
+                      <a:pPr algn="l"/>
+                      <a:r>
+                        <a:rPr lang="en-US" sz="1150" dirty="0">
+                          <a:solidFill>
+                            <a:srgbClr val="1A1A1A"/>
+                          </a:solidFill>
+                          <a:latin typeface="Calibri"/>
+                        </a:rPr>
+                        <a:t>14%</a:t>
+                      </a:r>
+                    </a:p>
+                  </a:txBody>
+                  <a:tcPr marL="45720" marR="45720" marT="22860" marB="22860" anchor="ctr">
+                    <a:solidFill>
+                      <a:srgbClr val="FFFFFF"/>
+                    </a:solidFill>
+                  </a:tcPr>
+                </a:tc>
+                <a:tc>
+                  <a:txBody>
+                    <a:bodyPr/>
+                    <a:lstStyle/>
+                    <a:p>
+                      <a:pPr algn="l"/>
+                      <a:r>
+                        <a:rPr lang="en-US" sz="1150" dirty="0">
+                          <a:solidFill>
+                            <a:srgbClr val="1A1A1A"/>
+                          </a:solidFill>
+                          <a:latin typeface="Calibri"/>
+                        </a:rPr>
+                        <a:t>6%</a:t>
+                      </a:r>
+                    </a:p>
+                  </a:txBody>
+                  <a:tcPr marL="45720" marR="45720" marT="22860" marB="22860" anchor="ctr">
+                    <a:solidFill>
+                      <a:srgbClr val="FFFFFF"/>
+                    </a:solidFill>
+                  </a:tcPr>
+                </a:tc>
+                <a:tc>
+                  <a:txBody>
+                    <a:bodyPr/>
+                    <a:lstStyle/>
+                    <a:p>
+                      <a:pPr algn="l"/>
+                      <a:r>
+                        <a:rPr lang="en-US" sz="1150" dirty="0">
+                          <a:solidFill>
+                            <a:srgbClr val="1A1A1A"/>
+                          </a:solidFill>
+                          <a:latin typeface="Calibri"/>
+                        </a:rPr>
+                        <a:t>Under-penetrated</a:t>
+                      </a:r>
+                    </a:p>
+                  </a:txBody>
+                  <a:tcPr marL="45720" marR="45720" marT="22860" marB="22860" anchor="ctr">
+                    <a:solidFill>
+                      <a:srgbClr val="FFFFFF"/>
+                    </a:solidFill>
+                  </a:tcPr>
+                </a:tc>
+              </a:tr>
+              <a:tr h="384048">
+                <a:tc>
+                  <a:txBody>
+                    <a:bodyPr/>
+                    <a:lstStyle/>
+                    <a:p>
+                      <a:pPr algn="l"/>
+                      <a:r>
+                        <a:rPr lang="en-US" sz="1150" dirty="0">
+                          <a:solidFill>
+                            <a:srgbClr val="1A1A1A"/>
+                          </a:solidFill>
+                          <a:latin typeface="Calibri"/>
+                        </a:rPr>
+                        <a:t>Maharashtra (Shampoo)</a:t>
+                      </a:r>
+                    </a:p>
+                  </a:txBody>
+                  <a:tcPr marL="45720" marR="45720" marT="22860" marB="22860" anchor="ctr">
+                    <a:solidFill>
+                      <a:srgbClr val="FFFFFF"/>
+                    </a:solidFill>
+                  </a:tcPr>
+                </a:tc>
+                <a:tc>
+                  <a:txBody>
+                    <a:bodyPr/>
+                    <a:lstStyle/>
+                    <a:p>
+                      <a:pPr algn="l"/>
+                      <a:r>
+                        <a:rPr lang="en-US" sz="1150" dirty="0">
+                          <a:solidFill>
+                            <a:srgbClr val="1A1A1A"/>
+                          </a:solidFill>
+                          <a:latin typeface="Calibri"/>
+                        </a:rPr>
+                        <a:t>15%</a:t>
+                      </a:r>
+                    </a:p>
+                  </a:txBody>
+                  <a:tcPr marL="45720" marR="45720" marT="22860" marB="22860" anchor="ctr">
+                    <a:solidFill>
+                      <a:srgbClr val="FFFFFF"/>
+                    </a:solidFill>
+                  </a:tcPr>
+                </a:tc>
+                <a:tc>
+                  <a:txBody>
+                    <a:bodyPr/>
+                    <a:lstStyle/>
+                    <a:p>
+                      <a:pPr algn="l"/>
+                      <a:r>
+                        <a:rPr lang="en-US" sz="1150" dirty="0">
+                          <a:solidFill>
+                            <a:srgbClr val="1A1A1A"/>
+                          </a:solidFill>
+                          <a:latin typeface="Calibri"/>
+                        </a:rPr>
+                        <a:t>1%</a:t>
+                      </a:r>
+                    </a:p>
+                  </a:txBody>
+                  <a:tcPr marL="45720" marR="45720" marT="22860" marB="22860" anchor="ctr">
+                    <a:solidFill>
+                      <a:srgbClr val="FFFFFF"/>
+                    </a:solidFill>
+                  </a:tcPr>
+                </a:tc>
+                <a:tc>
+                  <a:txBody>
+                    <a:bodyPr/>
+                    <a:lstStyle/>
+                    <a:p>
+                      <a:pPr algn="l"/>
+                      <a:r>
+                        <a:rPr lang="en-US" sz="1150" dirty="0">
+                          <a:solidFill>
+                            <a:srgbClr val="1A1A1A"/>
+                          </a:solidFill>
+                          <a:latin typeface="Calibri"/>
+                        </a:rPr>
+                        <a:t>Under-penetrated</a:t>
+                      </a:r>
+                    </a:p>
+                  </a:txBody>
+                  <a:tcPr marL="45720" marR="45720" marT="22860" marB="22860" anchor="ctr">
+                    <a:solidFill>
+                      <a:srgbClr val="FFFFFF"/>
+                    </a:solidFill>
+                  </a:tcPr>
+                </a:tc>
+              </a:tr>
+              <a:tr h="384048">
+                <a:tc>
+                  <a:txBody>
+                    <a:bodyPr/>
+                    <a:lstStyle/>
+                    <a:p>
+                      <a:pPr algn="l"/>
+                      <a:r>
+                        <a:rPr lang="en-US" sz="1150" dirty="0">
+                          <a:solidFill>
+                            <a:srgbClr val="1A1A1A"/>
+                          </a:solidFill>
+                          <a:latin typeface="Calibri"/>
+                        </a:rPr>
+                        <a:t>Uttar Pradesh (Shampoo)</a:t>
+                      </a:r>
+                    </a:p>
+                  </a:txBody>
+                  <a:tcPr marL="45720" marR="45720" marT="22860" marB="22860" anchor="ctr">
+                    <a:solidFill>
+                      <a:srgbClr val="FFFFFF"/>
+                    </a:solidFill>
+                  </a:tcPr>
+                </a:tc>
+                <a:tc>
+                  <a:txBody>
+                    <a:bodyPr/>
+                    <a:lstStyle/>
+                    <a:p>
+                      <a:pPr algn="l"/>
+                      <a:r>
+                        <a:rPr lang="en-US" sz="1150" dirty="0">
+                          <a:solidFill>
+                            <a:srgbClr val="1A1A1A"/>
+                          </a:solidFill>
+                          <a:latin typeface="Calibri"/>
+                        </a:rPr>
+                        <a:t>10%</a:t>
+                      </a:r>
+                    </a:p>
+                  </a:txBody>
+                  <a:tcPr marL="45720" marR="45720" marT="22860" marB="22860" anchor="ctr">
+                    <a:solidFill>
+                      <a:srgbClr val="FFFFFF"/>
+                    </a:solidFill>
+                  </a:tcPr>
+                </a:tc>
+                <a:tc>
+                  <a:txBody>
+                    <a:bodyPr/>
+                    <a:lstStyle/>
+                    <a:p>
+                      <a:pPr algn="l"/>
+                      <a:r>
+                        <a:rPr lang="en-US" sz="1150" dirty="0">
+                          <a:solidFill>
+                            <a:srgbClr val="1A1A1A"/>
+                          </a:solidFill>
+                          <a:latin typeface="Calibri"/>
+                        </a:rPr>
+                        <a:t>2%</a:t>
+                      </a:r>
+                    </a:p>
+                  </a:txBody>
+                  <a:tcPr marL="45720" marR="45720" marT="22860" marB="22860" anchor="ctr">
+                    <a:solidFill>
+                      <a:srgbClr val="FFFFFF"/>
+                    </a:solidFill>
+                  </a:tcPr>
+                </a:tc>
+                <a:tc>
+                  <a:txBody>
+                    <a:bodyPr/>
+                    <a:lstStyle/>
+                    <a:p>
+                      <a:pPr algn="l"/>
+                      <a:r>
+                        <a:rPr lang="en-US" sz="1150" dirty="0">
+                          <a:solidFill>
+                            <a:srgbClr val="1A1A1A"/>
+                          </a:solidFill>
+                          <a:latin typeface="Calibri"/>
+                        </a:rPr>
+                        <a:t>Under-penetrated</a:t>
+                      </a:r>
+                    </a:p>
+                  </a:txBody>
+                  <a:tcPr marL="45720" marR="45720" marT="22860" marB="22860" anchor="ctr">
+                    <a:solidFill>
+                      <a:srgbClr val="FFFFFF"/>
+                    </a:solidFill>
+                  </a:tcPr>
+                </a:tc>
+              </a:tr>
+            </a:tbl>
+          </a:graphicData>
+        </a:graphic>
+      </p:graphicFrame>
+      <p:sp>
+        <p:nvSpPr>
+          <p:cNvPr id="7" name="Rect 7"/>
+          <p:cNvSpPr/>
+          <p:nvPr/>
+        </p:nvSpPr>
+        <p:spPr>
+          <a:xfrm>
+            <a:off x="548640" y="5806440"/>
+            <a:ext cx="11064240" cy="777240"/>
+          </a:xfrm>
+          <a:prstGeom prst="roundRect">
+            <a:avLst/>
+          </a:prstGeom>
+          <a:solidFill>
+            <a:srgbClr val="2F3C7E"/>
+          </a:solidFill>
+          <a:ln>
+            <a:noFill/>
+          </a:ln>
+          <a:effectLst/>
+        </p:spPr>
+        <p:txBody>
+          <a:bodyPr/>
+          <a:lstStyle/>
+          <a:p/>
+        </p:txBody>
+      </p:sp>
+      <p:sp>
+        <p:nvSpPr>
+          <p:cNvPr id="8" name="TextBox 8"/>
+          <p:cNvSpPr txBox="1"/>
+          <p:nvPr/>
+        </p:nvSpPr>
+        <p:spPr>
+          <a:xfrm>
+            <a:off x="822960" y="5943600"/>
+            <a:ext cx="10515600" cy="548640"/>
+          </a:xfrm>
+          <a:prstGeom prst="rect">
+            <a:avLst/>
+          </a:prstGeom>
+          <a:noFill/>
+        </p:spPr>
+        <p:txBody>
+          <a:bodyPr wrap="square" anchor="t" lIns="0" tIns="0" rIns="0" bIns="0">
+            <a:noAutofit/>
+          </a:bodyPr>
+          <a:lstStyle/>
+          <a:p>
+            <a:pPr algn="l"/>
+            <a:r>
+              <a:rPr lang="en-US" sz="1300" b="1" dirty="0">
+                <a:solidFill>
+                  <a:srgbClr val="FFFFFF"/>
+                </a:solidFill>
+                <a:latin typeface="Calibri"/>
+              </a:rPr>
+              <a:t>Key insight: Uttar Pradesh and Maharashtra are the two largest under-penetrated states across BOTH Facewash and Shampoo — the single biggest distribution/visibility white space.</a:t>
+            </a:r>
+          </a:p>
+        </p:txBody>
+      </p:sp>
+    </p:spTree>
+  </p:cSld>
+  <p:clrMapOvr>
+    <a:masterClrMapping/>
+  </p:clrMapOvr>
+</p:sld>
+</file>
+
+<file path=ppt/slides/slide8.xml><?xml version="1.0" encoding="utf-8"?>
+<p:sld xmlns:a="http://schemas.openxmlformats.org/drawingml/2006/main" xmlns:r="http://schemas.openxmlformats.org/officeDocument/2006/relationships" xmlns:p="http://schemas.openxmlformats.org/presentationml/2006/main">
+  <p:cSld>
+    <p:bg>
+      <p:bgPr>
+        <a:solidFill>
+          <a:srgbClr val="FFFFFF"/>
+        </a:solidFill>
+        <a:effectLst/>
+      </p:bgPr>
+    </p:bg>
+    <p:spTree>
+      <p:nvGrpSpPr>
+        <p:cNvPr id="1" name=""/>
+        <p:cNvGrpSpPr/>
+        <p:nvPr/>
+      </p:nvGrpSpPr>
+      <p:grpSpPr>
+        <a:xfrm>
+          <a:off x="0" y="0"/>
+          <a:ext cx="0" cy="0"/>
+          <a:chOff x="0" y="0"/>
+          <a:chExt cx="0" cy="0"/>
+        </a:xfrm>
+      </p:grpSpPr>
+      <p:sp>
+        <p:nvSpPr>
+          <p:cNvPr id="2" name="TextBox 2"/>
+          <p:cNvSpPr txBox="1"/>
+          <p:nvPr/>
+        </p:nvSpPr>
+        <p:spPr>
+          <a:xfrm>
             <a:off x="548640" y="365760"/>
             <a:ext cx="10972800" cy="548640"/>
           </a:xfrm>
@@ -3625,7 +6763,7 @@
         </p:nvGraphicFramePr>
         <p:xfrm>
           <a:off x="548640" y="1097280"/>
-          <a:ext cx="11064240" cy="3566160"/>
+          <a:ext cx="11064240" cy="3968496"/>
         </p:xfrm>
         <a:graphic>
           <a:graphicData uri="http://schemas.openxmlformats.org/drawingml/2006/table">
@@ -3639,15 +6777,15 @@
                 <a:gridCol w="1645920"/>
                 <a:gridCol w="1645920"/>
               </a:tblGrid>
-              <a:tr h="594360">
-                <a:tc>
-                  <a:txBody>
-                    <a:bodyPr/>
-                    <a:lstStyle/>
-                    <a:p>
-                      <a:pPr algn="l"/>
-                      <a:r>
-                        <a:rPr lang="en-US" sz="1200" b="1" dirty="0">
+              <a:tr h="566928">
+                <a:tc>
+                  <a:txBody>
+                    <a:bodyPr/>
+                    <a:lstStyle/>
+                    <a:p>
+                      <a:pPr algn="l"/>
+                      <a:r>
+                        <a:rPr lang="en-US" sz="1150" b="1" dirty="0">
                           <a:solidFill>
                             <a:srgbClr val="FFFFFF"/>
                           </a:solidFill>
@@ -3670,7 +6808,7 @@
                     <a:p>
                       <a:pPr algn="l"/>
                       <a:r>
-                        <a:rPr lang="en-US" sz="1200" b="1" dirty="0">
+                        <a:rPr lang="en-US" sz="1150" b="1" dirty="0">
                           <a:solidFill>
                             <a:srgbClr val="FFFFFF"/>
                           </a:solidFill>
@@ -3693,7 +6831,7 @@
                     <a:p>
                       <a:pPr algn="l"/>
                       <a:r>
-                        <a:rPr lang="en-US" sz="1200" b="1" dirty="0">
+                        <a:rPr lang="en-US" sz="1150" b="1" dirty="0">
                           <a:solidFill>
                             <a:srgbClr val="FFFFFF"/>
                           </a:solidFill>
@@ -3716,7 +6854,7 @@
                     <a:p>
                       <a:pPr algn="l"/>
                       <a:r>
-                        <a:rPr lang="en-US" sz="1200" b="1" dirty="0">
+                        <a:rPr lang="en-US" sz="1150" b="1" dirty="0">
                           <a:solidFill>
                             <a:srgbClr val="FFFFFF"/>
                           </a:solidFill>
@@ -3733,15 +6871,15 @@
                   </a:tcPr>
                 </a:tc>
               </a:tr>
-              <a:tr h="594360">
-                <a:tc>
-                  <a:txBody>
-                    <a:bodyPr/>
-                    <a:lstStyle/>
-                    <a:p>
-                      <a:pPr algn="l"/>
-                      <a:r>
-                        <a:rPr lang="en-US" sz="1200" dirty="0">
+              <a:tr h="566928">
+                <a:tc>
+                  <a:txBody>
+                    <a:bodyPr/>
+                    <a:lstStyle/>
+                    <a:p>
+                      <a:pPr algn="l"/>
+                      <a:r>
+                        <a:rPr lang="en-US" sz="1150" dirty="0">
                           <a:solidFill>
                             <a:srgbClr val="1A1A1A"/>
                           </a:solidFill>
@@ -3764,7 +6902,7 @@
                     <a:p>
                       <a:pPr algn="l"/>
                       <a:r>
-                        <a:rPr lang="en-US" sz="1200" dirty="0">
+                        <a:rPr lang="en-US" sz="1150" dirty="0">
                           <a:solidFill>
                             <a:srgbClr val="1A1A1A"/>
                           </a:solidFill>
@@ -3787,7 +6925,7 @@
                     <a:p>
                       <a:pPr algn="l"/>
                       <a:r>
-                        <a:rPr lang="en-US" sz="1200" dirty="0">
+                        <a:rPr lang="en-US" sz="1150" dirty="0">
                           <a:solidFill>
                             <a:srgbClr val="1A1A1A"/>
                           </a:solidFill>
@@ -3810,7 +6948,7 @@
                     <a:p>
                       <a:pPr algn="l"/>
                       <a:r>
-                        <a:rPr lang="en-US" sz="1200" dirty="0">
+                        <a:rPr lang="en-US" sz="1150" dirty="0">
                           <a:solidFill>
                             <a:srgbClr val="1A1A1A"/>
                           </a:solidFill>
@@ -3827,15 +6965,15 @@
                   </a:tcPr>
                 </a:tc>
               </a:tr>
-              <a:tr h="594360">
-                <a:tc>
-                  <a:txBody>
-                    <a:bodyPr/>
-                    <a:lstStyle/>
-                    <a:p>
-                      <a:pPr algn="l"/>
-                      <a:r>
-                        <a:rPr lang="en-US" sz="1200" dirty="0">
+              <a:tr h="566928">
+                <a:tc>
+                  <a:txBody>
+                    <a:bodyPr/>
+                    <a:lstStyle/>
+                    <a:p>
+                      <a:pPr algn="l"/>
+                      <a:r>
+                        <a:rPr lang="en-US" sz="1150" dirty="0">
                           <a:solidFill>
                             <a:srgbClr val="1A1A1A"/>
                           </a:solidFill>
@@ -3858,7 +6996,7 @@
                     <a:p>
                       <a:pPr algn="l"/>
                       <a:r>
-                        <a:rPr lang="en-US" sz="1200" dirty="0">
+                        <a:rPr lang="en-US" sz="1150" dirty="0">
                           <a:solidFill>
                             <a:srgbClr val="1A1A1A"/>
                           </a:solidFill>
@@ -3881,7 +7019,7 @@
                     <a:p>
                       <a:pPr algn="l"/>
                       <a:r>
-                        <a:rPr lang="en-US" sz="1200" dirty="0">
+                        <a:rPr lang="en-US" sz="1150" dirty="0">
                           <a:solidFill>
                             <a:srgbClr val="1A1A1A"/>
                           </a:solidFill>
@@ -3904,7 +7042,7 @@
                     <a:p>
                       <a:pPr algn="l"/>
                       <a:r>
-                        <a:rPr lang="en-US" sz="1200" dirty="0">
+                        <a:rPr lang="en-US" sz="1150" dirty="0">
                           <a:solidFill>
                             <a:srgbClr val="1A1A1A"/>
                           </a:solidFill>
@@ -3921,15 +7059,15 @@
                   </a:tcPr>
                 </a:tc>
               </a:tr>
-              <a:tr h="594360">
-                <a:tc>
-                  <a:txBody>
-                    <a:bodyPr/>
-                    <a:lstStyle/>
-                    <a:p>
-                      <a:pPr algn="l"/>
-                      <a:r>
-                        <a:rPr lang="en-US" sz="1200" dirty="0">
+              <a:tr h="566928">
+                <a:tc>
+                  <a:txBody>
+                    <a:bodyPr/>
+                    <a:lstStyle/>
+                    <a:p>
+                      <a:pPr algn="l"/>
+                      <a:r>
+                        <a:rPr lang="en-US" sz="1150" dirty="0">
                           <a:solidFill>
                             <a:srgbClr val="1A1A1A"/>
                           </a:solidFill>
@@ -3952,7 +7090,7 @@
                     <a:p>
                       <a:pPr algn="l"/>
                       <a:r>
-                        <a:rPr lang="en-US" sz="1200" dirty="0">
+                        <a:rPr lang="en-US" sz="1150" dirty="0">
                           <a:solidFill>
                             <a:srgbClr val="1A1A1A"/>
                           </a:solidFill>
@@ -3975,7 +7113,7 @@
                     <a:p>
                       <a:pPr algn="l"/>
                       <a:r>
-                        <a:rPr lang="en-US" sz="1200" dirty="0">
+                        <a:rPr lang="en-US" sz="1150" dirty="0">
                           <a:solidFill>
                             <a:srgbClr val="1A1A1A"/>
                           </a:solidFill>
@@ -3998,7 +7136,7 @@
                     <a:p>
                       <a:pPr algn="l"/>
                       <a:r>
-                        <a:rPr lang="en-US" sz="1200" dirty="0">
+                        <a:rPr lang="en-US" sz="1150" dirty="0">
                           <a:solidFill>
                             <a:srgbClr val="1A1A1A"/>
                           </a:solidFill>
@@ -4015,15 +7153,15 @@
                   </a:tcPr>
                 </a:tc>
               </a:tr>
-              <a:tr h="594360">
-                <a:tc>
-                  <a:txBody>
-                    <a:bodyPr/>
-                    <a:lstStyle/>
-                    <a:p>
-                      <a:pPr algn="l"/>
-                      <a:r>
-                        <a:rPr lang="en-US" sz="1200" dirty="0">
+              <a:tr h="566928">
+                <a:tc>
+                  <a:txBody>
+                    <a:bodyPr/>
+                    <a:lstStyle/>
+                    <a:p>
+                      <a:pPr algn="l"/>
+                      <a:r>
+                        <a:rPr lang="en-US" sz="1150" dirty="0">
                           <a:solidFill>
                             <a:srgbClr val="1A1A1A"/>
                           </a:solidFill>
@@ -4046,7 +7184,7 @@
                     <a:p>
                       <a:pPr algn="l"/>
                       <a:r>
-                        <a:rPr lang="en-US" sz="1200" dirty="0">
+                        <a:rPr lang="en-US" sz="1150" dirty="0">
                           <a:solidFill>
                             <a:srgbClr val="1A1A1A"/>
                           </a:solidFill>
@@ -4069,7 +7207,7 @@
                     <a:p>
                       <a:pPr algn="l"/>
                       <a:r>
-                        <a:rPr lang="en-US" sz="1200" dirty="0">
+                        <a:rPr lang="en-US" sz="1150" dirty="0">
                           <a:solidFill>
                             <a:srgbClr val="1A1A1A"/>
                           </a:solidFill>
@@ -4092,7 +7230,7 @@
                     <a:p>
                       <a:pPr algn="l"/>
                       <a:r>
-                        <a:rPr lang="en-US" sz="1200" dirty="0">
+                        <a:rPr lang="en-US" sz="1150" dirty="0">
                           <a:solidFill>
                             <a:srgbClr val="1A1A1A"/>
                           </a:solidFill>
@@ -4109,15 +7247,15 @@
                   </a:tcPr>
                 </a:tc>
               </a:tr>
-              <a:tr h="594360">
-                <a:tc>
-                  <a:txBody>
-                    <a:bodyPr/>
-                    <a:lstStyle/>
-                    <a:p>
-                      <a:pPr algn="l"/>
-                      <a:r>
-                        <a:rPr lang="en-US" sz="1200" dirty="0">
+              <a:tr h="566928">
+                <a:tc>
+                  <a:txBody>
+                    <a:bodyPr/>
+                    <a:lstStyle/>
+                    <a:p>
+                      <a:pPr algn="l"/>
+                      <a:r>
+                        <a:rPr lang="en-US" sz="1150" dirty="0">
                           <a:solidFill>
                             <a:srgbClr val="1A1A1A"/>
                           </a:solidFill>
@@ -4140,7 +7278,7 @@
                     <a:p>
                       <a:pPr algn="l"/>
                       <a:r>
-                        <a:rPr lang="en-US" sz="1200" dirty="0">
+                        <a:rPr lang="en-US" sz="1150" dirty="0">
                           <a:solidFill>
                             <a:srgbClr val="1A1A1A"/>
                           </a:solidFill>
@@ -4163,7 +7301,7 @@
                     <a:p>
                       <a:pPr algn="l"/>
                       <a:r>
-                        <a:rPr lang="en-US" sz="1200" dirty="0">
+                        <a:rPr lang="en-US" sz="1150" dirty="0">
                           <a:solidFill>
                             <a:srgbClr val="1A1A1A"/>
                           </a:solidFill>
@@ -4186,7 +7324,101 @@
                     <a:p>
                       <a:pPr algn="l"/>
                       <a:r>
-                        <a:rPr lang="en-US" sz="1200" dirty="0">
+                        <a:rPr lang="en-US" sz="1150" dirty="0">
+                          <a:solidFill>
+                            <a:srgbClr val="1A1A1A"/>
+                          </a:solidFill>
+                          <a:latin typeface="Calibri"/>
+                        </a:rPr>
+                        <a:t>Medium</a:t>
+                      </a:r>
+                    </a:p>
+                  </a:txBody>
+                  <a:tcPr marL="45720" marR="45720" marT="22860" marB="22860" anchor="ctr">
+                    <a:solidFill>
+                      <a:srgbClr val="FFFFFF"/>
+                    </a:solidFill>
+                  </a:tcPr>
+                </a:tc>
+              </a:tr>
+              <a:tr h="566928">
+                <a:tc>
+                  <a:txBody>
+                    <a:bodyPr/>
+                    <a:lstStyle/>
+                    <a:p>
+                      <a:pPr algn="l"/>
+                      <a:r>
+                        <a:rPr lang="en-US" sz="1150" dirty="0">
+                          <a:solidFill>
+                            <a:srgbClr val="1A1A1A"/>
+                          </a:solidFill>
+                          <a:latin typeface="Calibri"/>
+                        </a:rPr>
+                        <a:t>Close UP/Maharashtra distribution white space (both categories)</a:t>
+                      </a:r>
+                    </a:p>
+                  </a:txBody>
+                  <a:tcPr marL="45720" marR="45720" marT="22860" marB="22860" anchor="ctr">
+                    <a:solidFill>
+                      <a:srgbClr val="FFFFFF"/>
+                    </a:solidFill>
+                  </a:tcPr>
+                </a:tc>
+                <a:tc>
+                  <a:txBody>
+                    <a:bodyPr/>
+                    <a:lstStyle/>
+                    <a:p>
+                      <a:pPr algn="l"/>
+                      <a:r>
+                        <a:rPr lang="en-US" sz="1150" dirty="0">
+                          <a:solidFill>
+                            <a:srgbClr val="1A1A1A"/>
+                          </a:solidFill>
+                          <a:latin typeface="Calibri"/>
+                        </a:rPr>
+                        <a:t>RKAM / Zone Sales</a:t>
+                      </a:r>
+                    </a:p>
+                  </a:txBody>
+                  <a:tcPr marL="45720" marR="45720" marT="22860" marB="22860" anchor="ctr">
+                    <a:solidFill>
+                      <a:srgbClr val="FFFFFF"/>
+                    </a:solidFill>
+                  </a:tcPr>
+                </a:tc>
+                <a:tc>
+                  <a:txBody>
+                    <a:bodyPr/>
+                    <a:lstStyle/>
+                    <a:p>
+                      <a:pPr algn="l"/>
+                      <a:r>
+                        <a:rPr lang="en-US" sz="1150" dirty="0">
+                          <a:solidFill>
+                            <a:srgbClr val="1A1A1A"/>
+                          </a:solidFill>
+                          <a:latin typeface="Calibri"/>
+                        </a:rPr>
+                        <a:t>Q3 FY27</a:t>
+                      </a:r>
+                    </a:p>
+                  </a:txBody>
+                  <a:tcPr marL="45720" marR="45720" marT="22860" marB="22860" anchor="ctr">
+                    <a:solidFill>
+                      <a:srgbClr val="FFFFFF"/>
+                    </a:solidFill>
+                  </a:tcPr>
+                </a:tc>
+                <a:tc>
+                  <a:txBody>
+                    <a:bodyPr/>
+                    <a:lstStyle/>
+                    <a:p>
+                      <a:pPr algn="l"/>
+                      <a:r>
+                        <a:rPr lang="en-US" sz="1150" dirty="0">
                           <a:solidFill>
                             <a:srgbClr val="1A1A1A"/>
                           </a:solidFill>

--- a/reports/MT_vs_GT_Deep_Dive.pptx
+++ b/reports/MT_vs_GT_Deep_Dive.pptx
@@ -1127,9 +1127,7 @@
         <a:graphic>
           <a:graphicData uri="http://schemas.openxmlformats.org/drawingml/2006/table">
             <a:tbl>
-              <a:tblPr firstRow="1" bandRow="0">
-                <a:tableStyleId>{5C22544A-7EE6-4342-B048-85BDC9FD1C3A}</a:tableStyleId>
-              </a:tblPr>
+              <a:tblPr firstRow="1" bandRow="0"/>
               <a:tblGrid>
                 <a:gridCol w="4023360"/>
                 <a:gridCol w="1737360"/>
@@ -1155,6 +1153,26 @@
                     </a:p>
                   </a:txBody>
                   <a:tcPr marL="45720" marR="45720" marT="22860" marB="22860" anchor="ctr">
+                    <a:lnL w="6350">
+                      <a:solidFill>
+                        <a:srgbClr val="D9D9D9"/>
+                      </a:solidFill>
+                    </a:lnL>
+                    <a:lnR w="6350">
+                      <a:solidFill>
+                        <a:srgbClr val="D9D9D9"/>
+                      </a:solidFill>
+                    </a:lnR>
+                    <a:lnT w="6350">
+                      <a:solidFill>
+                        <a:srgbClr val="D9D9D9"/>
+                      </a:solidFill>
+                    </a:lnT>
+                    <a:lnB w="6350">
+                      <a:solidFill>
+                        <a:srgbClr val="D9D9D9"/>
+                      </a:solidFill>
+                    </a:lnB>
                     <a:solidFill>
                       <a:srgbClr val="2F3C7E"/>
                     </a:solidFill>
@@ -1178,6 +1196,26 @@
                     </a:p>
                   </a:txBody>
                   <a:tcPr marL="45720" marR="45720" marT="22860" marB="22860" anchor="ctr">
+                    <a:lnL w="6350">
+                      <a:solidFill>
+                        <a:srgbClr val="D9D9D9"/>
+                      </a:solidFill>
+                    </a:lnL>
+                    <a:lnR w="6350">
+                      <a:solidFill>
+                        <a:srgbClr val="D9D9D9"/>
+                      </a:solidFill>
+                    </a:lnR>
+                    <a:lnT w="6350">
+                      <a:solidFill>
+                        <a:srgbClr val="D9D9D9"/>
+                      </a:solidFill>
+                    </a:lnT>
+                    <a:lnB w="6350">
+                      <a:solidFill>
+                        <a:srgbClr val="D9D9D9"/>
+                      </a:solidFill>
+                    </a:lnB>
                     <a:solidFill>
                       <a:srgbClr val="2F3C7E"/>
                     </a:solidFill>
@@ -1201,6 +1239,26 @@
                     </a:p>
                   </a:txBody>
                   <a:tcPr marL="45720" marR="45720" marT="22860" marB="22860" anchor="ctr">
+                    <a:lnL w="6350">
+                      <a:solidFill>
+                        <a:srgbClr val="D9D9D9"/>
+                      </a:solidFill>
+                    </a:lnL>
+                    <a:lnR w="6350">
+                      <a:solidFill>
+                        <a:srgbClr val="D9D9D9"/>
+                      </a:solidFill>
+                    </a:lnR>
+                    <a:lnT w="6350">
+                      <a:solidFill>
+                        <a:srgbClr val="D9D9D9"/>
+                      </a:solidFill>
+                    </a:lnT>
+                    <a:lnB w="6350">
+                      <a:solidFill>
+                        <a:srgbClr val="D9D9D9"/>
+                      </a:solidFill>
+                    </a:lnB>
                     <a:solidFill>
                       <a:srgbClr val="2F3C7E"/>
                     </a:solidFill>
@@ -1224,6 +1282,26 @@
                     </a:p>
                   </a:txBody>
                   <a:tcPr marL="45720" marR="45720" marT="22860" marB="22860" anchor="ctr">
+                    <a:lnL w="6350">
+                      <a:solidFill>
+                        <a:srgbClr val="D9D9D9"/>
+                      </a:solidFill>
+                    </a:lnL>
+                    <a:lnR w="6350">
+                      <a:solidFill>
+                        <a:srgbClr val="D9D9D9"/>
+                      </a:solidFill>
+                    </a:lnR>
+                    <a:lnT w="6350">
+                      <a:solidFill>
+                        <a:srgbClr val="D9D9D9"/>
+                      </a:solidFill>
+                    </a:lnT>
+                    <a:lnB w="6350">
+                      <a:solidFill>
+                        <a:srgbClr val="D9D9D9"/>
+                      </a:solidFill>
+                    </a:lnB>
                     <a:solidFill>
                       <a:srgbClr val="2F3C7E"/>
                     </a:solidFill>
@@ -1249,6 +1327,26 @@
                     </a:p>
                   </a:txBody>
                   <a:tcPr marL="45720" marR="45720" marT="22860" marB="22860" anchor="ctr">
+                    <a:lnL w="6350">
+                      <a:solidFill>
+                        <a:srgbClr val="D9D9D9"/>
+                      </a:solidFill>
+                    </a:lnL>
+                    <a:lnR w="6350">
+                      <a:solidFill>
+                        <a:srgbClr val="D9D9D9"/>
+                      </a:solidFill>
+                    </a:lnR>
+                    <a:lnT w="6350">
+                      <a:solidFill>
+                        <a:srgbClr val="D9D9D9"/>
+                      </a:solidFill>
+                    </a:lnT>
+                    <a:lnB w="6350">
+                      <a:solidFill>
+                        <a:srgbClr val="D9D9D9"/>
+                      </a:solidFill>
+                    </a:lnB>
                     <a:solidFill>
                       <a:srgbClr val="FFFFFF"/>
                     </a:solidFill>
@@ -1272,6 +1370,26 @@
                     </a:p>
                   </a:txBody>
                   <a:tcPr marL="45720" marR="45720" marT="22860" marB="22860" anchor="ctr">
+                    <a:lnL w="6350">
+                      <a:solidFill>
+                        <a:srgbClr val="D9D9D9"/>
+                      </a:solidFill>
+                    </a:lnL>
+                    <a:lnR w="6350">
+                      <a:solidFill>
+                        <a:srgbClr val="D9D9D9"/>
+                      </a:solidFill>
+                    </a:lnR>
+                    <a:lnT w="6350">
+                      <a:solidFill>
+                        <a:srgbClr val="D9D9D9"/>
+                      </a:solidFill>
+                    </a:lnT>
+                    <a:lnB w="6350">
+                      <a:solidFill>
+                        <a:srgbClr val="D9D9D9"/>
+                      </a:solidFill>
+                    </a:lnB>
                     <a:solidFill>
                       <a:srgbClr val="FFFFFF"/>
                     </a:solidFill>
@@ -1295,6 +1413,26 @@
                     </a:p>
                   </a:txBody>
                   <a:tcPr marL="45720" marR="45720" marT="22860" marB="22860" anchor="ctr">
+                    <a:lnL w="6350">
+                      <a:solidFill>
+                        <a:srgbClr val="D9D9D9"/>
+                      </a:solidFill>
+                    </a:lnL>
+                    <a:lnR w="6350">
+                      <a:solidFill>
+                        <a:srgbClr val="D9D9D9"/>
+                      </a:solidFill>
+                    </a:lnR>
+                    <a:lnT w="6350">
+                      <a:solidFill>
+                        <a:srgbClr val="D9D9D9"/>
+                      </a:solidFill>
+                    </a:lnT>
+                    <a:lnB w="6350">
+                      <a:solidFill>
+                        <a:srgbClr val="D9D9D9"/>
+                      </a:solidFill>
+                    </a:lnB>
                     <a:solidFill>
                       <a:srgbClr val="FFFFFF"/>
                     </a:solidFill>
@@ -1318,6 +1456,26 @@
                     </a:p>
                   </a:txBody>
                   <a:tcPr marL="45720" marR="45720" marT="22860" marB="22860" anchor="ctr">
+                    <a:lnL w="6350">
+                      <a:solidFill>
+                        <a:srgbClr val="D9D9D9"/>
+                      </a:solidFill>
+                    </a:lnL>
+                    <a:lnR w="6350">
+                      <a:solidFill>
+                        <a:srgbClr val="D9D9D9"/>
+                      </a:solidFill>
+                    </a:lnR>
+                    <a:lnT w="6350">
+                      <a:solidFill>
+                        <a:srgbClr val="D9D9D9"/>
+                      </a:solidFill>
+                    </a:lnT>
+                    <a:lnB w="6350">
+                      <a:solidFill>
+                        <a:srgbClr val="D9D9D9"/>
+                      </a:solidFill>
+                    </a:lnB>
                     <a:solidFill>
                       <a:srgbClr val="FFFFFF"/>
                     </a:solidFill>
@@ -1343,6 +1501,26 @@
                     </a:p>
                   </a:txBody>
                   <a:tcPr marL="45720" marR="45720" marT="22860" marB="22860" anchor="ctr">
+                    <a:lnL w="6350">
+                      <a:solidFill>
+                        <a:srgbClr val="D9D9D9"/>
+                      </a:solidFill>
+                    </a:lnL>
+                    <a:lnR w="6350">
+                      <a:solidFill>
+                        <a:srgbClr val="D9D9D9"/>
+                      </a:solidFill>
+                    </a:lnR>
+                    <a:lnT w="6350">
+                      <a:solidFill>
+                        <a:srgbClr val="D9D9D9"/>
+                      </a:solidFill>
+                    </a:lnT>
+                    <a:lnB w="6350">
+                      <a:solidFill>
+                        <a:srgbClr val="D9D9D9"/>
+                      </a:solidFill>
+                    </a:lnB>
                     <a:solidFill>
                       <a:srgbClr val="FFFFFF"/>
                     </a:solidFill>
@@ -1366,6 +1544,26 @@
                     </a:p>
                   </a:txBody>
                   <a:tcPr marL="45720" marR="45720" marT="22860" marB="22860" anchor="ctr">
+                    <a:lnL w="6350">
+                      <a:solidFill>
+                        <a:srgbClr val="D9D9D9"/>
+                      </a:solidFill>
+                    </a:lnL>
+                    <a:lnR w="6350">
+                      <a:solidFill>
+                        <a:srgbClr val="D9D9D9"/>
+                      </a:solidFill>
+                    </a:lnR>
+                    <a:lnT w="6350">
+                      <a:solidFill>
+                        <a:srgbClr val="D9D9D9"/>
+                      </a:solidFill>
+                    </a:lnT>
+                    <a:lnB w="6350">
+                      <a:solidFill>
+                        <a:srgbClr val="D9D9D9"/>
+                      </a:solidFill>
+                    </a:lnB>
                     <a:solidFill>
                       <a:srgbClr val="FFFFFF"/>
                     </a:solidFill>
@@ -1389,6 +1587,26 @@
                     </a:p>
                   </a:txBody>
                   <a:tcPr marL="45720" marR="45720" marT="22860" marB="22860" anchor="ctr">
+                    <a:lnL w="6350">
+                      <a:solidFill>
+                        <a:srgbClr val="D9D9D9"/>
+                      </a:solidFill>
+                    </a:lnL>
+                    <a:lnR w="6350">
+                      <a:solidFill>
+                        <a:srgbClr val="D9D9D9"/>
+                      </a:solidFill>
+                    </a:lnR>
+                    <a:lnT w="6350">
+                      <a:solidFill>
+                        <a:srgbClr val="D9D9D9"/>
+                      </a:solidFill>
+                    </a:lnT>
+                    <a:lnB w="6350">
+                      <a:solidFill>
+                        <a:srgbClr val="D9D9D9"/>
+                      </a:solidFill>
+                    </a:lnB>
                     <a:solidFill>
                       <a:srgbClr val="FFFFFF"/>
                     </a:solidFill>
@@ -1412,6 +1630,26 @@
                     </a:p>
                   </a:txBody>
                   <a:tcPr marL="45720" marR="45720" marT="22860" marB="22860" anchor="ctr">
+                    <a:lnL w="6350">
+                      <a:solidFill>
+                        <a:srgbClr val="D9D9D9"/>
+                      </a:solidFill>
+                    </a:lnL>
+                    <a:lnR w="6350">
+                      <a:solidFill>
+                        <a:srgbClr val="D9D9D9"/>
+                      </a:solidFill>
+                    </a:lnR>
+                    <a:lnT w="6350">
+                      <a:solidFill>
+                        <a:srgbClr val="D9D9D9"/>
+                      </a:solidFill>
+                    </a:lnT>
+                    <a:lnB w="6350">
+                      <a:solidFill>
+                        <a:srgbClr val="D9D9D9"/>
+                      </a:solidFill>
+                    </a:lnB>
                     <a:solidFill>
                       <a:srgbClr val="FFFFFF"/>
                     </a:solidFill>
@@ -1437,6 +1675,26 @@
                     </a:p>
                   </a:txBody>
                   <a:tcPr marL="45720" marR="45720" marT="22860" marB="22860" anchor="ctr">
+                    <a:lnL w="6350">
+                      <a:solidFill>
+                        <a:srgbClr val="D9D9D9"/>
+                      </a:solidFill>
+                    </a:lnL>
+                    <a:lnR w="6350">
+                      <a:solidFill>
+                        <a:srgbClr val="D9D9D9"/>
+                      </a:solidFill>
+                    </a:lnR>
+                    <a:lnT w="6350">
+                      <a:solidFill>
+                        <a:srgbClr val="D9D9D9"/>
+                      </a:solidFill>
+                    </a:lnT>
+                    <a:lnB w="6350">
+                      <a:solidFill>
+                        <a:srgbClr val="D9D9D9"/>
+                      </a:solidFill>
+                    </a:lnB>
                     <a:solidFill>
                       <a:srgbClr val="FFFFFF"/>
                     </a:solidFill>
@@ -1460,6 +1718,26 @@
                     </a:p>
                   </a:txBody>
                   <a:tcPr marL="45720" marR="45720" marT="22860" marB="22860" anchor="ctr">
+                    <a:lnL w="6350">
+                      <a:solidFill>
+                        <a:srgbClr val="D9D9D9"/>
+                      </a:solidFill>
+                    </a:lnL>
+                    <a:lnR w="6350">
+                      <a:solidFill>
+                        <a:srgbClr val="D9D9D9"/>
+                      </a:solidFill>
+                    </a:lnR>
+                    <a:lnT w="6350">
+                      <a:solidFill>
+                        <a:srgbClr val="D9D9D9"/>
+                      </a:solidFill>
+                    </a:lnT>
+                    <a:lnB w="6350">
+                      <a:solidFill>
+                        <a:srgbClr val="D9D9D9"/>
+                      </a:solidFill>
+                    </a:lnB>
                     <a:solidFill>
                       <a:srgbClr val="FFFFFF"/>
                     </a:solidFill>
@@ -1483,6 +1761,26 @@
                     </a:p>
                   </a:txBody>
                   <a:tcPr marL="45720" marR="45720" marT="22860" marB="22860" anchor="ctr">
+                    <a:lnL w="6350">
+                      <a:solidFill>
+                        <a:srgbClr val="D9D9D9"/>
+                      </a:solidFill>
+                    </a:lnL>
+                    <a:lnR w="6350">
+                      <a:solidFill>
+                        <a:srgbClr val="D9D9D9"/>
+                      </a:solidFill>
+                    </a:lnR>
+                    <a:lnT w="6350">
+                      <a:solidFill>
+                        <a:srgbClr val="D9D9D9"/>
+                      </a:solidFill>
+                    </a:lnT>
+                    <a:lnB w="6350">
+                      <a:solidFill>
+                        <a:srgbClr val="D9D9D9"/>
+                      </a:solidFill>
+                    </a:lnB>
                     <a:solidFill>
                       <a:srgbClr val="FFFFFF"/>
                     </a:solidFill>
@@ -1506,6 +1804,26 @@
                     </a:p>
                   </a:txBody>
                   <a:tcPr marL="45720" marR="45720" marT="22860" marB="22860" anchor="ctr">
+                    <a:lnL w="6350">
+                      <a:solidFill>
+                        <a:srgbClr val="D9D9D9"/>
+                      </a:solidFill>
+                    </a:lnL>
+                    <a:lnR w="6350">
+                      <a:solidFill>
+                        <a:srgbClr val="D9D9D9"/>
+                      </a:solidFill>
+                    </a:lnR>
+                    <a:lnT w="6350">
+                      <a:solidFill>
+                        <a:srgbClr val="D9D9D9"/>
+                      </a:solidFill>
+                    </a:lnT>
+                    <a:lnB w="6350">
+                      <a:solidFill>
+                        <a:srgbClr val="D9D9D9"/>
+                      </a:solidFill>
+                    </a:lnB>
                     <a:solidFill>
                       <a:srgbClr val="FFFFFF"/>
                     </a:solidFill>
@@ -1531,6 +1849,26 @@
                     </a:p>
                   </a:txBody>
                   <a:tcPr marL="45720" marR="45720" marT="22860" marB="22860" anchor="ctr">
+                    <a:lnL w="6350">
+                      <a:solidFill>
+                        <a:srgbClr val="D9D9D9"/>
+                      </a:solidFill>
+                    </a:lnL>
+                    <a:lnR w="6350">
+                      <a:solidFill>
+                        <a:srgbClr val="D9D9D9"/>
+                      </a:solidFill>
+                    </a:lnR>
+                    <a:lnT w="6350">
+                      <a:solidFill>
+                        <a:srgbClr val="D9D9D9"/>
+                      </a:solidFill>
+                    </a:lnT>
+                    <a:lnB w="6350">
+                      <a:solidFill>
+                        <a:srgbClr val="D9D9D9"/>
+                      </a:solidFill>
+                    </a:lnB>
                     <a:solidFill>
                       <a:srgbClr val="FFFFFF"/>
                     </a:solidFill>
@@ -1554,6 +1892,26 @@
                     </a:p>
                   </a:txBody>
                   <a:tcPr marL="45720" marR="45720" marT="22860" marB="22860" anchor="ctr">
+                    <a:lnL w="6350">
+                      <a:solidFill>
+                        <a:srgbClr val="D9D9D9"/>
+                      </a:solidFill>
+                    </a:lnL>
+                    <a:lnR w="6350">
+                      <a:solidFill>
+                        <a:srgbClr val="D9D9D9"/>
+                      </a:solidFill>
+                    </a:lnR>
+                    <a:lnT w="6350">
+                      <a:solidFill>
+                        <a:srgbClr val="D9D9D9"/>
+                      </a:solidFill>
+                    </a:lnT>
+                    <a:lnB w="6350">
+                      <a:solidFill>
+                        <a:srgbClr val="D9D9D9"/>
+                      </a:solidFill>
+                    </a:lnB>
                     <a:solidFill>
                       <a:srgbClr val="FFFFFF"/>
                     </a:solidFill>
@@ -1577,6 +1935,26 @@
                     </a:p>
                   </a:txBody>
                   <a:tcPr marL="45720" marR="45720" marT="22860" marB="22860" anchor="ctr">
+                    <a:lnL w="6350">
+                      <a:solidFill>
+                        <a:srgbClr val="D9D9D9"/>
+                      </a:solidFill>
+                    </a:lnL>
+                    <a:lnR w="6350">
+                      <a:solidFill>
+                        <a:srgbClr val="D9D9D9"/>
+                      </a:solidFill>
+                    </a:lnR>
+                    <a:lnT w="6350">
+                      <a:solidFill>
+                        <a:srgbClr val="D9D9D9"/>
+                      </a:solidFill>
+                    </a:lnT>
+                    <a:lnB w="6350">
+                      <a:solidFill>
+                        <a:srgbClr val="D9D9D9"/>
+                      </a:solidFill>
+                    </a:lnB>
                     <a:solidFill>
                       <a:srgbClr val="FFFFFF"/>
                     </a:solidFill>
@@ -1600,6 +1978,26 @@
                     </a:p>
                   </a:txBody>
                   <a:tcPr marL="45720" marR="45720" marT="22860" marB="22860" anchor="ctr">
+                    <a:lnL w="6350">
+                      <a:solidFill>
+                        <a:srgbClr val="D9D9D9"/>
+                      </a:solidFill>
+                    </a:lnL>
+                    <a:lnR w="6350">
+                      <a:solidFill>
+                        <a:srgbClr val="D9D9D9"/>
+                      </a:solidFill>
+                    </a:lnR>
+                    <a:lnT w="6350">
+                      <a:solidFill>
+                        <a:srgbClr val="D9D9D9"/>
+                      </a:solidFill>
+                    </a:lnT>
+                    <a:lnB w="6350">
+                      <a:solidFill>
+                        <a:srgbClr val="D9D9D9"/>
+                      </a:solidFill>
+                    </a:lnB>
                     <a:solidFill>
                       <a:srgbClr val="FFFFFF"/>
                     </a:solidFill>
@@ -1625,6 +2023,26 @@
                     </a:p>
                   </a:txBody>
                   <a:tcPr marL="45720" marR="45720" marT="22860" marB="22860" anchor="ctr">
+                    <a:lnL w="6350">
+                      <a:solidFill>
+                        <a:srgbClr val="D9D9D9"/>
+                      </a:solidFill>
+                    </a:lnL>
+                    <a:lnR w="6350">
+                      <a:solidFill>
+                        <a:srgbClr val="D9D9D9"/>
+                      </a:solidFill>
+                    </a:lnR>
+                    <a:lnT w="6350">
+                      <a:solidFill>
+                        <a:srgbClr val="D9D9D9"/>
+                      </a:solidFill>
+                    </a:lnT>
+                    <a:lnB w="6350">
+                      <a:solidFill>
+                        <a:srgbClr val="D9D9D9"/>
+                      </a:solidFill>
+                    </a:lnB>
                     <a:solidFill>
                       <a:srgbClr val="FFFFFF"/>
                     </a:solidFill>
@@ -1648,6 +2066,26 @@
                     </a:p>
                   </a:txBody>
                   <a:tcPr marL="45720" marR="45720" marT="22860" marB="22860" anchor="ctr">
+                    <a:lnL w="6350">
+                      <a:solidFill>
+                        <a:srgbClr val="D9D9D9"/>
+                      </a:solidFill>
+                    </a:lnL>
+                    <a:lnR w="6350">
+                      <a:solidFill>
+                        <a:srgbClr val="D9D9D9"/>
+                      </a:solidFill>
+                    </a:lnR>
+                    <a:lnT w="6350">
+                      <a:solidFill>
+                        <a:srgbClr val="D9D9D9"/>
+                      </a:solidFill>
+                    </a:lnT>
+                    <a:lnB w="6350">
+                      <a:solidFill>
+                        <a:srgbClr val="D9D9D9"/>
+                      </a:solidFill>
+                    </a:lnB>
                     <a:solidFill>
                       <a:srgbClr val="FFFFFF"/>
                     </a:solidFill>
@@ -1671,6 +2109,26 @@
                     </a:p>
                   </a:txBody>
                   <a:tcPr marL="45720" marR="45720" marT="22860" marB="22860" anchor="ctr">
+                    <a:lnL w="6350">
+                      <a:solidFill>
+                        <a:srgbClr val="D9D9D9"/>
+                      </a:solidFill>
+                    </a:lnL>
+                    <a:lnR w="6350">
+                      <a:solidFill>
+                        <a:srgbClr val="D9D9D9"/>
+                      </a:solidFill>
+                    </a:lnR>
+                    <a:lnT w="6350">
+                      <a:solidFill>
+                        <a:srgbClr val="D9D9D9"/>
+                      </a:solidFill>
+                    </a:lnT>
+                    <a:lnB w="6350">
+                      <a:solidFill>
+                        <a:srgbClr val="D9D9D9"/>
+                      </a:solidFill>
+                    </a:lnB>
                     <a:solidFill>
                       <a:srgbClr val="FFFFFF"/>
                     </a:solidFill>
@@ -1694,6 +2152,26 @@
                     </a:p>
                   </a:txBody>
                   <a:tcPr marL="45720" marR="45720" marT="22860" marB="22860" anchor="ctr">
+                    <a:lnL w="6350">
+                      <a:solidFill>
+                        <a:srgbClr val="D9D9D9"/>
+                      </a:solidFill>
+                    </a:lnL>
+                    <a:lnR w="6350">
+                      <a:solidFill>
+                        <a:srgbClr val="D9D9D9"/>
+                      </a:solidFill>
+                    </a:lnR>
+                    <a:lnT w="6350">
+                      <a:solidFill>
+                        <a:srgbClr val="D9D9D9"/>
+                      </a:solidFill>
+                    </a:lnT>
+                    <a:lnB w="6350">
+                      <a:solidFill>
+                        <a:srgbClr val="D9D9D9"/>
+                      </a:solidFill>
+                    </a:lnB>
                     <a:solidFill>
                       <a:srgbClr val="FFFFFF"/>
                     </a:solidFill>
@@ -1719,6 +2197,26 @@
                     </a:p>
                   </a:txBody>
                   <a:tcPr marL="45720" marR="45720" marT="22860" marB="22860" anchor="ctr">
+                    <a:lnL w="6350">
+                      <a:solidFill>
+                        <a:srgbClr val="D9D9D9"/>
+                      </a:solidFill>
+                    </a:lnL>
+                    <a:lnR w="6350">
+                      <a:solidFill>
+                        <a:srgbClr val="D9D9D9"/>
+                      </a:solidFill>
+                    </a:lnR>
+                    <a:lnT w="6350">
+                      <a:solidFill>
+                        <a:srgbClr val="D9D9D9"/>
+                      </a:solidFill>
+                    </a:lnT>
+                    <a:lnB w="6350">
+                      <a:solidFill>
+                        <a:srgbClr val="D9D9D9"/>
+                      </a:solidFill>
+                    </a:lnB>
                     <a:solidFill>
                       <a:srgbClr val="FFFFFF"/>
                     </a:solidFill>
@@ -1742,6 +2240,26 @@
                     </a:p>
                   </a:txBody>
                   <a:tcPr marL="45720" marR="45720" marT="22860" marB="22860" anchor="ctr">
+                    <a:lnL w="6350">
+                      <a:solidFill>
+                        <a:srgbClr val="D9D9D9"/>
+                      </a:solidFill>
+                    </a:lnL>
+                    <a:lnR w="6350">
+                      <a:solidFill>
+                        <a:srgbClr val="D9D9D9"/>
+                      </a:solidFill>
+                    </a:lnR>
+                    <a:lnT w="6350">
+                      <a:solidFill>
+                        <a:srgbClr val="D9D9D9"/>
+                      </a:solidFill>
+                    </a:lnT>
+                    <a:lnB w="6350">
+                      <a:solidFill>
+                        <a:srgbClr val="D9D9D9"/>
+                      </a:solidFill>
+                    </a:lnB>
                     <a:solidFill>
                       <a:srgbClr val="FFFFFF"/>
                     </a:solidFill>
@@ -1765,6 +2283,26 @@
                     </a:p>
                   </a:txBody>
                   <a:tcPr marL="45720" marR="45720" marT="22860" marB="22860" anchor="ctr">
+                    <a:lnL w="6350">
+                      <a:solidFill>
+                        <a:srgbClr val="D9D9D9"/>
+                      </a:solidFill>
+                    </a:lnL>
+                    <a:lnR w="6350">
+                      <a:solidFill>
+                        <a:srgbClr val="D9D9D9"/>
+                      </a:solidFill>
+                    </a:lnR>
+                    <a:lnT w="6350">
+                      <a:solidFill>
+                        <a:srgbClr val="D9D9D9"/>
+                      </a:solidFill>
+                    </a:lnT>
+                    <a:lnB w="6350">
+                      <a:solidFill>
+                        <a:srgbClr val="D9D9D9"/>
+                      </a:solidFill>
+                    </a:lnB>
                     <a:solidFill>
                       <a:srgbClr val="FFFFFF"/>
                     </a:solidFill>
@@ -1788,6 +2326,26 @@
                     </a:p>
                   </a:txBody>
                   <a:tcPr marL="45720" marR="45720" marT="22860" marB="22860" anchor="ctr">
+                    <a:lnL w="6350">
+                      <a:solidFill>
+                        <a:srgbClr val="D9D9D9"/>
+                      </a:solidFill>
+                    </a:lnL>
+                    <a:lnR w="6350">
+                      <a:solidFill>
+                        <a:srgbClr val="D9D9D9"/>
+                      </a:solidFill>
+                    </a:lnR>
+                    <a:lnT w="6350">
+                      <a:solidFill>
+                        <a:srgbClr val="D9D9D9"/>
+                      </a:solidFill>
+                    </a:lnT>
+                    <a:lnB w="6350">
+                      <a:solidFill>
+                        <a:srgbClr val="D9D9D9"/>
+                      </a:solidFill>
+                    </a:lnB>
                     <a:solidFill>
                       <a:srgbClr val="FFFFFF"/>
                     </a:solidFill>
@@ -2014,9 +2572,7 @@
         <a:graphic>
           <a:graphicData uri="http://schemas.openxmlformats.org/drawingml/2006/table">
             <a:tbl>
-              <a:tblPr firstRow="1" bandRow="0">
-                <a:tableStyleId>{5C22544A-7EE6-4342-B048-85BDC9FD1C3A}</a:tableStyleId>
-              </a:tblPr>
+              <a:tblPr firstRow="1" bandRow="0"/>
               <a:tblGrid>
                 <a:gridCol w="4023360"/>
                 <a:gridCol w="1737360"/>
@@ -2042,6 +2598,26 @@
                     </a:p>
                   </a:txBody>
                   <a:tcPr marL="45720" marR="45720" marT="22860" marB="22860" anchor="ctr">
+                    <a:lnL w="6350">
+                      <a:solidFill>
+                        <a:srgbClr val="D9D9D9"/>
+                      </a:solidFill>
+                    </a:lnL>
+                    <a:lnR w="6350">
+                      <a:solidFill>
+                        <a:srgbClr val="D9D9D9"/>
+                      </a:solidFill>
+                    </a:lnR>
+                    <a:lnT w="6350">
+                      <a:solidFill>
+                        <a:srgbClr val="D9D9D9"/>
+                      </a:solidFill>
+                    </a:lnT>
+                    <a:lnB w="6350">
+                      <a:solidFill>
+                        <a:srgbClr val="D9D9D9"/>
+                      </a:solidFill>
+                    </a:lnB>
                     <a:solidFill>
                       <a:srgbClr val="2F3C7E"/>
                     </a:solidFill>
@@ -2065,6 +2641,26 @@
                     </a:p>
                   </a:txBody>
                   <a:tcPr marL="45720" marR="45720" marT="22860" marB="22860" anchor="ctr">
+                    <a:lnL w="6350">
+                      <a:solidFill>
+                        <a:srgbClr val="D9D9D9"/>
+                      </a:solidFill>
+                    </a:lnL>
+                    <a:lnR w="6350">
+                      <a:solidFill>
+                        <a:srgbClr val="D9D9D9"/>
+                      </a:solidFill>
+                    </a:lnR>
+                    <a:lnT w="6350">
+                      <a:solidFill>
+                        <a:srgbClr val="D9D9D9"/>
+                      </a:solidFill>
+                    </a:lnT>
+                    <a:lnB w="6350">
+                      <a:solidFill>
+                        <a:srgbClr val="D9D9D9"/>
+                      </a:solidFill>
+                    </a:lnB>
                     <a:solidFill>
                       <a:srgbClr val="2F3C7E"/>
                     </a:solidFill>
@@ -2088,6 +2684,26 @@
                     </a:p>
                   </a:txBody>
                   <a:tcPr marL="45720" marR="45720" marT="22860" marB="22860" anchor="ctr">
+                    <a:lnL w="6350">
+                      <a:solidFill>
+                        <a:srgbClr val="D9D9D9"/>
+                      </a:solidFill>
+                    </a:lnL>
+                    <a:lnR w="6350">
+                      <a:solidFill>
+                        <a:srgbClr val="D9D9D9"/>
+                      </a:solidFill>
+                    </a:lnR>
+                    <a:lnT w="6350">
+                      <a:solidFill>
+                        <a:srgbClr val="D9D9D9"/>
+                      </a:solidFill>
+                    </a:lnT>
+                    <a:lnB w="6350">
+                      <a:solidFill>
+                        <a:srgbClr val="D9D9D9"/>
+                      </a:solidFill>
+                    </a:lnB>
                     <a:solidFill>
                       <a:srgbClr val="2F3C7E"/>
                     </a:solidFill>
@@ -2111,6 +2727,26 @@
                     </a:p>
                   </a:txBody>
                   <a:tcPr marL="45720" marR="45720" marT="22860" marB="22860" anchor="ctr">
+                    <a:lnL w="6350">
+                      <a:solidFill>
+                        <a:srgbClr val="D9D9D9"/>
+                      </a:solidFill>
+                    </a:lnL>
+                    <a:lnR w="6350">
+                      <a:solidFill>
+                        <a:srgbClr val="D9D9D9"/>
+                      </a:solidFill>
+                    </a:lnR>
+                    <a:lnT w="6350">
+                      <a:solidFill>
+                        <a:srgbClr val="D9D9D9"/>
+                      </a:solidFill>
+                    </a:lnT>
+                    <a:lnB w="6350">
+                      <a:solidFill>
+                        <a:srgbClr val="D9D9D9"/>
+                      </a:solidFill>
+                    </a:lnB>
                     <a:solidFill>
                       <a:srgbClr val="2F3C7E"/>
                     </a:solidFill>
@@ -2136,6 +2772,26 @@
                     </a:p>
                   </a:txBody>
                   <a:tcPr marL="45720" marR="45720" marT="22860" marB="22860" anchor="ctr">
+                    <a:lnL w="6350">
+                      <a:solidFill>
+                        <a:srgbClr val="D9D9D9"/>
+                      </a:solidFill>
+                    </a:lnL>
+                    <a:lnR w="6350">
+                      <a:solidFill>
+                        <a:srgbClr val="D9D9D9"/>
+                      </a:solidFill>
+                    </a:lnR>
+                    <a:lnT w="6350">
+                      <a:solidFill>
+                        <a:srgbClr val="D9D9D9"/>
+                      </a:solidFill>
+                    </a:lnT>
+                    <a:lnB w="6350">
+                      <a:solidFill>
+                        <a:srgbClr val="D9D9D9"/>
+                      </a:solidFill>
+                    </a:lnB>
                     <a:solidFill>
                       <a:srgbClr val="FFFFFF"/>
                     </a:solidFill>
@@ -2159,6 +2815,26 @@
                     </a:p>
                   </a:txBody>
                   <a:tcPr marL="45720" marR="45720" marT="22860" marB="22860" anchor="ctr">
+                    <a:lnL w="6350">
+                      <a:solidFill>
+                        <a:srgbClr val="D9D9D9"/>
+                      </a:solidFill>
+                    </a:lnL>
+                    <a:lnR w="6350">
+                      <a:solidFill>
+                        <a:srgbClr val="D9D9D9"/>
+                      </a:solidFill>
+                    </a:lnR>
+                    <a:lnT w="6350">
+                      <a:solidFill>
+                        <a:srgbClr val="D9D9D9"/>
+                      </a:solidFill>
+                    </a:lnT>
+                    <a:lnB w="6350">
+                      <a:solidFill>
+                        <a:srgbClr val="D9D9D9"/>
+                      </a:solidFill>
+                    </a:lnB>
                     <a:solidFill>
                       <a:srgbClr val="FFFFFF"/>
                     </a:solidFill>
@@ -2182,6 +2858,26 @@
                     </a:p>
                   </a:txBody>
                   <a:tcPr marL="45720" marR="45720" marT="22860" marB="22860" anchor="ctr">
+                    <a:lnL w="6350">
+                      <a:solidFill>
+                        <a:srgbClr val="D9D9D9"/>
+                      </a:solidFill>
+                    </a:lnL>
+                    <a:lnR w="6350">
+                      <a:solidFill>
+                        <a:srgbClr val="D9D9D9"/>
+                      </a:solidFill>
+                    </a:lnR>
+                    <a:lnT w="6350">
+                      <a:solidFill>
+                        <a:srgbClr val="D9D9D9"/>
+                      </a:solidFill>
+                    </a:lnT>
+                    <a:lnB w="6350">
+                      <a:solidFill>
+                        <a:srgbClr val="D9D9D9"/>
+                      </a:solidFill>
+                    </a:lnB>
                     <a:solidFill>
                       <a:srgbClr val="FFFFFF"/>
                     </a:solidFill>
@@ -2205,6 +2901,26 @@
                     </a:p>
                   </a:txBody>
                   <a:tcPr marL="45720" marR="45720" marT="22860" marB="22860" anchor="ctr">
+                    <a:lnL w="6350">
+                      <a:solidFill>
+                        <a:srgbClr val="D9D9D9"/>
+                      </a:solidFill>
+                    </a:lnL>
+                    <a:lnR w="6350">
+                      <a:solidFill>
+                        <a:srgbClr val="D9D9D9"/>
+                      </a:solidFill>
+                    </a:lnR>
+                    <a:lnT w="6350">
+                      <a:solidFill>
+                        <a:srgbClr val="D9D9D9"/>
+                      </a:solidFill>
+                    </a:lnT>
+                    <a:lnB w="6350">
+                      <a:solidFill>
+                        <a:srgbClr val="D9D9D9"/>
+                      </a:solidFill>
+                    </a:lnB>
                     <a:solidFill>
                       <a:srgbClr val="FFFFFF"/>
                     </a:solidFill>
@@ -2230,6 +2946,26 @@
                     </a:p>
                   </a:txBody>
                   <a:tcPr marL="45720" marR="45720" marT="22860" marB="22860" anchor="ctr">
+                    <a:lnL w="6350">
+                      <a:solidFill>
+                        <a:srgbClr val="D9D9D9"/>
+                      </a:solidFill>
+                    </a:lnL>
+                    <a:lnR w="6350">
+                      <a:solidFill>
+                        <a:srgbClr val="D9D9D9"/>
+                      </a:solidFill>
+                    </a:lnR>
+                    <a:lnT w="6350">
+                      <a:solidFill>
+                        <a:srgbClr val="D9D9D9"/>
+                      </a:solidFill>
+                    </a:lnT>
+                    <a:lnB w="6350">
+                      <a:solidFill>
+                        <a:srgbClr val="D9D9D9"/>
+                      </a:solidFill>
+                    </a:lnB>
                     <a:solidFill>
                       <a:srgbClr val="FFFFFF"/>
                     </a:solidFill>
@@ -2253,6 +2989,26 @@
                     </a:p>
                   </a:txBody>
                   <a:tcPr marL="45720" marR="45720" marT="22860" marB="22860" anchor="ctr">
+                    <a:lnL w="6350">
+                      <a:solidFill>
+                        <a:srgbClr val="D9D9D9"/>
+                      </a:solidFill>
+                    </a:lnL>
+                    <a:lnR w="6350">
+                      <a:solidFill>
+                        <a:srgbClr val="D9D9D9"/>
+                      </a:solidFill>
+                    </a:lnR>
+                    <a:lnT w="6350">
+                      <a:solidFill>
+                        <a:srgbClr val="D9D9D9"/>
+                      </a:solidFill>
+                    </a:lnT>
+                    <a:lnB w="6350">
+                      <a:solidFill>
+                        <a:srgbClr val="D9D9D9"/>
+                      </a:solidFill>
+                    </a:lnB>
                     <a:solidFill>
                       <a:srgbClr val="FFFFFF"/>
                     </a:solidFill>
@@ -2276,6 +3032,26 @@
                     </a:p>
                   </a:txBody>
                   <a:tcPr marL="45720" marR="45720" marT="22860" marB="22860" anchor="ctr">
+                    <a:lnL w="6350">
+                      <a:solidFill>
+                        <a:srgbClr val="D9D9D9"/>
+                      </a:solidFill>
+                    </a:lnL>
+                    <a:lnR w="6350">
+                      <a:solidFill>
+                        <a:srgbClr val="D9D9D9"/>
+                      </a:solidFill>
+                    </a:lnR>
+                    <a:lnT w="6350">
+                      <a:solidFill>
+                        <a:srgbClr val="D9D9D9"/>
+                      </a:solidFill>
+                    </a:lnT>
+                    <a:lnB w="6350">
+                      <a:solidFill>
+                        <a:srgbClr val="D9D9D9"/>
+                      </a:solidFill>
+                    </a:lnB>
                     <a:solidFill>
                       <a:srgbClr val="FFFFFF"/>
                     </a:solidFill>
@@ -2299,6 +3075,26 @@
                     </a:p>
                   </a:txBody>
                   <a:tcPr marL="45720" marR="45720" marT="22860" marB="22860" anchor="ctr">
+                    <a:lnL w="6350">
+                      <a:solidFill>
+                        <a:srgbClr val="D9D9D9"/>
+                      </a:solidFill>
+                    </a:lnL>
+                    <a:lnR w="6350">
+                      <a:solidFill>
+                        <a:srgbClr val="D9D9D9"/>
+                      </a:solidFill>
+                    </a:lnR>
+                    <a:lnT w="6350">
+                      <a:solidFill>
+                        <a:srgbClr val="D9D9D9"/>
+                      </a:solidFill>
+                    </a:lnT>
+                    <a:lnB w="6350">
+                      <a:solidFill>
+                        <a:srgbClr val="D9D9D9"/>
+                      </a:solidFill>
+                    </a:lnB>
                     <a:solidFill>
                       <a:srgbClr val="FFFFFF"/>
                     </a:solidFill>
@@ -2324,6 +3120,26 @@
                     </a:p>
                   </a:txBody>
                   <a:tcPr marL="45720" marR="45720" marT="22860" marB="22860" anchor="ctr">
+                    <a:lnL w="6350">
+                      <a:solidFill>
+                        <a:srgbClr val="D9D9D9"/>
+                      </a:solidFill>
+                    </a:lnL>
+                    <a:lnR w="6350">
+                      <a:solidFill>
+                        <a:srgbClr val="D9D9D9"/>
+                      </a:solidFill>
+                    </a:lnR>
+                    <a:lnT w="6350">
+                      <a:solidFill>
+                        <a:srgbClr val="D9D9D9"/>
+                      </a:solidFill>
+                    </a:lnT>
+                    <a:lnB w="6350">
+                      <a:solidFill>
+                        <a:srgbClr val="D9D9D9"/>
+                      </a:solidFill>
+                    </a:lnB>
                     <a:solidFill>
                       <a:srgbClr val="FFFFFF"/>
                     </a:solidFill>
@@ -2347,6 +3163,26 @@
                     </a:p>
                   </a:txBody>
                   <a:tcPr marL="45720" marR="45720" marT="22860" marB="22860" anchor="ctr">
+                    <a:lnL w="6350">
+                      <a:solidFill>
+                        <a:srgbClr val="D9D9D9"/>
+                      </a:solidFill>
+                    </a:lnL>
+                    <a:lnR w="6350">
+                      <a:solidFill>
+                        <a:srgbClr val="D9D9D9"/>
+                      </a:solidFill>
+                    </a:lnR>
+                    <a:lnT w="6350">
+                      <a:solidFill>
+                        <a:srgbClr val="D9D9D9"/>
+                      </a:solidFill>
+                    </a:lnT>
+                    <a:lnB w="6350">
+                      <a:solidFill>
+                        <a:srgbClr val="D9D9D9"/>
+                      </a:solidFill>
+                    </a:lnB>
                     <a:solidFill>
                       <a:srgbClr val="FFFFFF"/>
                     </a:solidFill>
@@ -2370,6 +3206,26 @@
                     </a:p>
                   </a:txBody>
                   <a:tcPr marL="45720" marR="45720" marT="22860" marB="22860" anchor="ctr">
+                    <a:lnL w="6350">
+                      <a:solidFill>
+                        <a:srgbClr val="D9D9D9"/>
+                      </a:solidFill>
+                    </a:lnL>
+                    <a:lnR w="6350">
+                      <a:solidFill>
+                        <a:srgbClr val="D9D9D9"/>
+                      </a:solidFill>
+                    </a:lnR>
+                    <a:lnT w="6350">
+                      <a:solidFill>
+                        <a:srgbClr val="D9D9D9"/>
+                      </a:solidFill>
+                    </a:lnT>
+                    <a:lnB w="6350">
+                      <a:solidFill>
+                        <a:srgbClr val="D9D9D9"/>
+                      </a:solidFill>
+                    </a:lnB>
                     <a:solidFill>
                       <a:srgbClr val="FFFFFF"/>
                     </a:solidFill>
@@ -2393,6 +3249,26 @@
                     </a:p>
                   </a:txBody>
                   <a:tcPr marL="45720" marR="45720" marT="22860" marB="22860" anchor="ctr">
+                    <a:lnL w="6350">
+                      <a:solidFill>
+                        <a:srgbClr val="D9D9D9"/>
+                      </a:solidFill>
+                    </a:lnL>
+                    <a:lnR w="6350">
+                      <a:solidFill>
+                        <a:srgbClr val="D9D9D9"/>
+                      </a:solidFill>
+                    </a:lnR>
+                    <a:lnT w="6350">
+                      <a:solidFill>
+                        <a:srgbClr val="D9D9D9"/>
+                      </a:solidFill>
+                    </a:lnT>
+                    <a:lnB w="6350">
+                      <a:solidFill>
+                        <a:srgbClr val="D9D9D9"/>
+                      </a:solidFill>
+                    </a:lnB>
                     <a:solidFill>
                       <a:srgbClr val="FFFFFF"/>
                     </a:solidFill>
@@ -2418,6 +3294,26 @@
                     </a:p>
                   </a:txBody>
                   <a:tcPr marL="45720" marR="45720" marT="22860" marB="22860" anchor="ctr">
+                    <a:lnL w="6350">
+                      <a:solidFill>
+                        <a:srgbClr val="D9D9D9"/>
+                      </a:solidFill>
+                    </a:lnL>
+                    <a:lnR w="6350">
+                      <a:solidFill>
+                        <a:srgbClr val="D9D9D9"/>
+                      </a:solidFill>
+                    </a:lnR>
+                    <a:lnT w="6350">
+                      <a:solidFill>
+                        <a:srgbClr val="D9D9D9"/>
+                      </a:solidFill>
+                    </a:lnT>
+                    <a:lnB w="6350">
+                      <a:solidFill>
+                        <a:srgbClr val="D9D9D9"/>
+                      </a:solidFill>
+                    </a:lnB>
                     <a:solidFill>
                       <a:srgbClr val="FFFFFF"/>
                     </a:solidFill>
@@ -2441,6 +3337,26 @@
                     </a:p>
                   </a:txBody>
                   <a:tcPr marL="45720" marR="45720" marT="22860" marB="22860" anchor="ctr">
+                    <a:lnL w="6350">
+                      <a:solidFill>
+                        <a:srgbClr val="D9D9D9"/>
+                      </a:solidFill>
+                    </a:lnL>
+                    <a:lnR w="6350">
+                      <a:solidFill>
+                        <a:srgbClr val="D9D9D9"/>
+                      </a:solidFill>
+                    </a:lnR>
+                    <a:lnT w="6350">
+                      <a:solidFill>
+                        <a:srgbClr val="D9D9D9"/>
+                      </a:solidFill>
+                    </a:lnT>
+                    <a:lnB w="6350">
+                      <a:solidFill>
+                        <a:srgbClr val="D9D9D9"/>
+                      </a:solidFill>
+                    </a:lnB>
                     <a:solidFill>
                       <a:srgbClr val="FFFFFF"/>
                     </a:solidFill>
@@ -2464,6 +3380,26 @@
                     </a:p>
                   </a:txBody>
                   <a:tcPr marL="45720" marR="45720" marT="22860" marB="22860" anchor="ctr">
+                    <a:lnL w="6350">
+                      <a:solidFill>
+                        <a:srgbClr val="D9D9D9"/>
+                      </a:solidFill>
+                    </a:lnL>
+                    <a:lnR w="6350">
+                      <a:solidFill>
+                        <a:srgbClr val="D9D9D9"/>
+                      </a:solidFill>
+                    </a:lnR>
+                    <a:lnT w="6350">
+                      <a:solidFill>
+                        <a:srgbClr val="D9D9D9"/>
+                      </a:solidFill>
+                    </a:lnT>
+                    <a:lnB w="6350">
+                      <a:solidFill>
+                        <a:srgbClr val="D9D9D9"/>
+                      </a:solidFill>
+                    </a:lnB>
                     <a:solidFill>
                       <a:srgbClr val="FFFFFF"/>
                     </a:solidFill>
@@ -2487,6 +3423,26 @@
                     </a:p>
                   </a:txBody>
                   <a:tcPr marL="45720" marR="45720" marT="22860" marB="22860" anchor="ctr">
+                    <a:lnL w="6350">
+                      <a:solidFill>
+                        <a:srgbClr val="D9D9D9"/>
+                      </a:solidFill>
+                    </a:lnL>
+                    <a:lnR w="6350">
+                      <a:solidFill>
+                        <a:srgbClr val="D9D9D9"/>
+                      </a:solidFill>
+                    </a:lnR>
+                    <a:lnT w="6350">
+                      <a:solidFill>
+                        <a:srgbClr val="D9D9D9"/>
+                      </a:solidFill>
+                    </a:lnT>
+                    <a:lnB w="6350">
+                      <a:solidFill>
+                        <a:srgbClr val="D9D9D9"/>
+                      </a:solidFill>
+                    </a:lnB>
                     <a:solidFill>
                       <a:srgbClr val="FFFFFF"/>
                     </a:solidFill>
@@ -2512,6 +3468,26 @@
                     </a:p>
                   </a:txBody>
                   <a:tcPr marL="45720" marR="45720" marT="22860" marB="22860" anchor="ctr">
+                    <a:lnL w="6350">
+                      <a:solidFill>
+                        <a:srgbClr val="D9D9D9"/>
+                      </a:solidFill>
+                    </a:lnL>
+                    <a:lnR w="6350">
+                      <a:solidFill>
+                        <a:srgbClr val="D9D9D9"/>
+                      </a:solidFill>
+                    </a:lnR>
+                    <a:lnT w="6350">
+                      <a:solidFill>
+                        <a:srgbClr val="D9D9D9"/>
+                      </a:solidFill>
+                    </a:lnT>
+                    <a:lnB w="6350">
+                      <a:solidFill>
+                        <a:srgbClr val="D9D9D9"/>
+                      </a:solidFill>
+                    </a:lnB>
                     <a:solidFill>
                       <a:srgbClr val="FFFFFF"/>
                     </a:solidFill>
@@ -2535,6 +3511,26 @@
                     </a:p>
                   </a:txBody>
                   <a:tcPr marL="45720" marR="45720" marT="22860" marB="22860" anchor="ctr">
+                    <a:lnL w="6350">
+                      <a:solidFill>
+                        <a:srgbClr val="D9D9D9"/>
+                      </a:solidFill>
+                    </a:lnL>
+                    <a:lnR w="6350">
+                      <a:solidFill>
+                        <a:srgbClr val="D9D9D9"/>
+                      </a:solidFill>
+                    </a:lnR>
+                    <a:lnT w="6350">
+                      <a:solidFill>
+                        <a:srgbClr val="D9D9D9"/>
+                      </a:solidFill>
+                    </a:lnT>
+                    <a:lnB w="6350">
+                      <a:solidFill>
+                        <a:srgbClr val="D9D9D9"/>
+                      </a:solidFill>
+                    </a:lnB>
                     <a:solidFill>
                       <a:srgbClr val="FFFFFF"/>
                     </a:solidFill>
@@ -2558,6 +3554,26 @@
                     </a:p>
                   </a:txBody>
                   <a:tcPr marL="45720" marR="45720" marT="22860" marB="22860" anchor="ctr">
+                    <a:lnL w="6350">
+                      <a:solidFill>
+                        <a:srgbClr val="D9D9D9"/>
+                      </a:solidFill>
+                    </a:lnL>
+                    <a:lnR w="6350">
+                      <a:solidFill>
+                        <a:srgbClr val="D9D9D9"/>
+                      </a:solidFill>
+                    </a:lnR>
+                    <a:lnT w="6350">
+                      <a:solidFill>
+                        <a:srgbClr val="D9D9D9"/>
+                      </a:solidFill>
+                    </a:lnT>
+                    <a:lnB w="6350">
+                      <a:solidFill>
+                        <a:srgbClr val="D9D9D9"/>
+                      </a:solidFill>
+                    </a:lnB>
                     <a:solidFill>
                       <a:srgbClr val="FFFFFF"/>
                     </a:solidFill>
@@ -2581,6 +3597,26 @@
                     </a:p>
                   </a:txBody>
                   <a:tcPr marL="45720" marR="45720" marT="22860" marB="22860" anchor="ctr">
+                    <a:lnL w="6350">
+                      <a:solidFill>
+                        <a:srgbClr val="D9D9D9"/>
+                      </a:solidFill>
+                    </a:lnL>
+                    <a:lnR w="6350">
+                      <a:solidFill>
+                        <a:srgbClr val="D9D9D9"/>
+                      </a:solidFill>
+                    </a:lnR>
+                    <a:lnT w="6350">
+                      <a:solidFill>
+                        <a:srgbClr val="D9D9D9"/>
+                      </a:solidFill>
+                    </a:lnT>
+                    <a:lnB w="6350">
+                      <a:solidFill>
+                        <a:srgbClr val="D9D9D9"/>
+                      </a:solidFill>
+                    </a:lnB>
                     <a:solidFill>
                       <a:srgbClr val="FFFFFF"/>
                     </a:solidFill>
@@ -2606,6 +3642,26 @@
                     </a:p>
                   </a:txBody>
                   <a:tcPr marL="45720" marR="45720" marT="22860" marB="22860" anchor="ctr">
+                    <a:lnL w="6350">
+                      <a:solidFill>
+                        <a:srgbClr val="D9D9D9"/>
+                      </a:solidFill>
+                    </a:lnL>
+                    <a:lnR w="6350">
+                      <a:solidFill>
+                        <a:srgbClr val="D9D9D9"/>
+                      </a:solidFill>
+                    </a:lnR>
+                    <a:lnT w="6350">
+                      <a:solidFill>
+                        <a:srgbClr val="D9D9D9"/>
+                      </a:solidFill>
+                    </a:lnT>
+                    <a:lnB w="6350">
+                      <a:solidFill>
+                        <a:srgbClr val="D9D9D9"/>
+                      </a:solidFill>
+                    </a:lnB>
                     <a:solidFill>
                       <a:srgbClr val="FFFFFF"/>
                     </a:solidFill>
@@ -2629,6 +3685,26 @@
                     </a:p>
                   </a:txBody>
                   <a:tcPr marL="45720" marR="45720" marT="22860" marB="22860" anchor="ctr">
+                    <a:lnL w="6350">
+                      <a:solidFill>
+                        <a:srgbClr val="D9D9D9"/>
+                      </a:solidFill>
+                    </a:lnL>
+                    <a:lnR w="6350">
+                      <a:solidFill>
+                        <a:srgbClr val="D9D9D9"/>
+                      </a:solidFill>
+                    </a:lnR>
+                    <a:lnT w="6350">
+                      <a:solidFill>
+                        <a:srgbClr val="D9D9D9"/>
+                      </a:solidFill>
+                    </a:lnT>
+                    <a:lnB w="6350">
+                      <a:solidFill>
+                        <a:srgbClr val="D9D9D9"/>
+                      </a:solidFill>
+                    </a:lnB>
                     <a:solidFill>
                       <a:srgbClr val="FFFFFF"/>
                     </a:solidFill>
@@ -2652,6 +3728,26 @@
                     </a:p>
                   </a:txBody>
                   <a:tcPr marL="45720" marR="45720" marT="22860" marB="22860" anchor="ctr">
+                    <a:lnL w="6350">
+                      <a:solidFill>
+                        <a:srgbClr val="D9D9D9"/>
+                      </a:solidFill>
+                    </a:lnL>
+                    <a:lnR w="6350">
+                      <a:solidFill>
+                        <a:srgbClr val="D9D9D9"/>
+                      </a:solidFill>
+                    </a:lnR>
+                    <a:lnT w="6350">
+                      <a:solidFill>
+                        <a:srgbClr val="D9D9D9"/>
+                      </a:solidFill>
+                    </a:lnT>
+                    <a:lnB w="6350">
+                      <a:solidFill>
+                        <a:srgbClr val="D9D9D9"/>
+                      </a:solidFill>
+                    </a:lnB>
                     <a:solidFill>
                       <a:srgbClr val="FFFFFF"/>
                     </a:solidFill>
@@ -2675,6 +3771,26 @@
                     </a:p>
                   </a:txBody>
                   <a:tcPr marL="45720" marR="45720" marT="22860" marB="22860" anchor="ctr">
+                    <a:lnL w="6350">
+                      <a:solidFill>
+                        <a:srgbClr val="D9D9D9"/>
+                      </a:solidFill>
+                    </a:lnL>
+                    <a:lnR w="6350">
+                      <a:solidFill>
+                        <a:srgbClr val="D9D9D9"/>
+                      </a:solidFill>
+                    </a:lnR>
+                    <a:lnT w="6350">
+                      <a:solidFill>
+                        <a:srgbClr val="D9D9D9"/>
+                      </a:solidFill>
+                    </a:lnT>
+                    <a:lnB w="6350">
+                      <a:solidFill>
+                        <a:srgbClr val="D9D9D9"/>
+                      </a:solidFill>
+                    </a:lnB>
                     <a:solidFill>
                       <a:srgbClr val="FFFFFF"/>
                     </a:solidFill>
@@ -3160,9 +4276,7 @@
         <a:graphic>
           <a:graphicData uri="http://schemas.openxmlformats.org/drawingml/2006/table">
             <a:tbl>
-              <a:tblPr firstRow="1" bandRow="0">
-                <a:tableStyleId>{5C22544A-7EE6-4342-B048-85BDC9FD1C3A}</a:tableStyleId>
-              </a:tblPr>
+              <a:tblPr firstRow="1" bandRow="0"/>
               <a:tblGrid>
                 <a:gridCol w="3108960"/>
                 <a:gridCol w="2423160"/>
@@ -3188,6 +4302,26 @@
                     </a:p>
                   </a:txBody>
                   <a:tcPr marL="45720" marR="45720" marT="22860" marB="22860" anchor="ctr">
+                    <a:lnL w="6350">
+                      <a:solidFill>
+                        <a:srgbClr val="D9D9D9"/>
+                      </a:solidFill>
+                    </a:lnL>
+                    <a:lnR w="6350">
+                      <a:solidFill>
+                        <a:srgbClr val="D9D9D9"/>
+                      </a:solidFill>
+                    </a:lnR>
+                    <a:lnT w="6350">
+                      <a:solidFill>
+                        <a:srgbClr val="D9D9D9"/>
+                      </a:solidFill>
+                    </a:lnT>
+                    <a:lnB w="6350">
+                      <a:solidFill>
+                        <a:srgbClr val="D9D9D9"/>
+                      </a:solidFill>
+                    </a:lnB>
                     <a:solidFill>
                       <a:srgbClr val="2F3C7E"/>
                     </a:solidFill>
@@ -3211,6 +4345,26 @@
                     </a:p>
                   </a:txBody>
                   <a:tcPr marL="45720" marR="45720" marT="22860" marB="22860" anchor="ctr">
+                    <a:lnL w="6350">
+                      <a:solidFill>
+                        <a:srgbClr val="D9D9D9"/>
+                      </a:solidFill>
+                    </a:lnL>
+                    <a:lnR w="6350">
+                      <a:solidFill>
+                        <a:srgbClr val="D9D9D9"/>
+                      </a:solidFill>
+                    </a:lnR>
+                    <a:lnT w="6350">
+                      <a:solidFill>
+                        <a:srgbClr val="D9D9D9"/>
+                      </a:solidFill>
+                    </a:lnT>
+                    <a:lnB w="6350">
+                      <a:solidFill>
+                        <a:srgbClr val="D9D9D9"/>
+                      </a:solidFill>
+                    </a:lnB>
                     <a:solidFill>
                       <a:srgbClr val="2F3C7E"/>
                     </a:solidFill>
@@ -3234,6 +4388,26 @@
                     </a:p>
                   </a:txBody>
                   <a:tcPr marL="45720" marR="45720" marT="22860" marB="22860" anchor="ctr">
+                    <a:lnL w="6350">
+                      <a:solidFill>
+                        <a:srgbClr val="D9D9D9"/>
+                      </a:solidFill>
+                    </a:lnL>
+                    <a:lnR w="6350">
+                      <a:solidFill>
+                        <a:srgbClr val="D9D9D9"/>
+                      </a:solidFill>
+                    </a:lnR>
+                    <a:lnT w="6350">
+                      <a:solidFill>
+                        <a:srgbClr val="D9D9D9"/>
+                      </a:solidFill>
+                    </a:lnT>
+                    <a:lnB w="6350">
+                      <a:solidFill>
+                        <a:srgbClr val="D9D9D9"/>
+                      </a:solidFill>
+                    </a:lnB>
                     <a:solidFill>
                       <a:srgbClr val="2F3C7E"/>
                     </a:solidFill>
@@ -3257,6 +4431,26 @@
                     </a:p>
                   </a:txBody>
                   <a:tcPr marL="45720" marR="45720" marT="22860" marB="22860" anchor="ctr">
+                    <a:lnL w="6350">
+                      <a:solidFill>
+                        <a:srgbClr val="D9D9D9"/>
+                      </a:solidFill>
+                    </a:lnL>
+                    <a:lnR w="6350">
+                      <a:solidFill>
+                        <a:srgbClr val="D9D9D9"/>
+                      </a:solidFill>
+                    </a:lnR>
+                    <a:lnT w="6350">
+                      <a:solidFill>
+                        <a:srgbClr val="D9D9D9"/>
+                      </a:solidFill>
+                    </a:lnT>
+                    <a:lnB w="6350">
+                      <a:solidFill>
+                        <a:srgbClr val="D9D9D9"/>
+                      </a:solidFill>
+                    </a:lnB>
                     <a:solidFill>
                       <a:srgbClr val="2F3C7E"/>
                     </a:solidFill>
@@ -3282,6 +4476,26 @@
                     </a:p>
                   </a:txBody>
                   <a:tcPr marL="45720" marR="45720" marT="22860" marB="22860" anchor="ctr">
+                    <a:lnL w="6350">
+                      <a:solidFill>
+                        <a:srgbClr val="D9D9D9"/>
+                      </a:solidFill>
+                    </a:lnL>
+                    <a:lnR w="6350">
+                      <a:solidFill>
+                        <a:srgbClr val="D9D9D9"/>
+                      </a:solidFill>
+                    </a:lnR>
+                    <a:lnT w="6350">
+                      <a:solidFill>
+                        <a:srgbClr val="D9D9D9"/>
+                      </a:solidFill>
+                    </a:lnT>
+                    <a:lnB w="6350">
+                      <a:solidFill>
+                        <a:srgbClr val="D9D9D9"/>
+                      </a:solidFill>
+                    </a:lnB>
                     <a:solidFill>
                       <a:srgbClr val="FFFFFF"/>
                     </a:solidFill>
@@ -3305,6 +4519,26 @@
                     </a:p>
                   </a:txBody>
                   <a:tcPr marL="45720" marR="45720" marT="22860" marB="22860" anchor="ctr">
+                    <a:lnL w="6350">
+                      <a:solidFill>
+                        <a:srgbClr val="D9D9D9"/>
+                      </a:solidFill>
+                    </a:lnL>
+                    <a:lnR w="6350">
+                      <a:solidFill>
+                        <a:srgbClr val="D9D9D9"/>
+                      </a:solidFill>
+                    </a:lnR>
+                    <a:lnT w="6350">
+                      <a:solidFill>
+                        <a:srgbClr val="D9D9D9"/>
+                      </a:solidFill>
+                    </a:lnT>
+                    <a:lnB w="6350">
+                      <a:solidFill>
+                        <a:srgbClr val="D9D9D9"/>
+                      </a:solidFill>
+                    </a:lnB>
                     <a:solidFill>
                       <a:srgbClr val="FFFFFF"/>
                     </a:solidFill>
@@ -3328,6 +4562,26 @@
                     </a:p>
                   </a:txBody>
                   <a:tcPr marL="45720" marR="45720" marT="22860" marB="22860" anchor="ctr">
+                    <a:lnL w="6350">
+                      <a:solidFill>
+                        <a:srgbClr val="D9D9D9"/>
+                      </a:solidFill>
+                    </a:lnL>
+                    <a:lnR w="6350">
+                      <a:solidFill>
+                        <a:srgbClr val="D9D9D9"/>
+                      </a:solidFill>
+                    </a:lnR>
+                    <a:lnT w="6350">
+                      <a:solidFill>
+                        <a:srgbClr val="D9D9D9"/>
+                      </a:solidFill>
+                    </a:lnT>
+                    <a:lnB w="6350">
+                      <a:solidFill>
+                        <a:srgbClr val="D9D9D9"/>
+                      </a:solidFill>
+                    </a:lnB>
                     <a:solidFill>
                       <a:srgbClr val="FFFFFF"/>
                     </a:solidFill>
@@ -3351,6 +4605,26 @@
                     </a:p>
                   </a:txBody>
                   <a:tcPr marL="45720" marR="45720" marT="22860" marB="22860" anchor="ctr">
+                    <a:lnL w="6350">
+                      <a:solidFill>
+                        <a:srgbClr val="D9D9D9"/>
+                      </a:solidFill>
+                    </a:lnL>
+                    <a:lnR w="6350">
+                      <a:solidFill>
+                        <a:srgbClr val="D9D9D9"/>
+                      </a:solidFill>
+                    </a:lnR>
+                    <a:lnT w="6350">
+                      <a:solidFill>
+                        <a:srgbClr val="D9D9D9"/>
+                      </a:solidFill>
+                    </a:lnT>
+                    <a:lnB w="6350">
+                      <a:solidFill>
+                        <a:srgbClr val="D9D9D9"/>
+                      </a:solidFill>
+                    </a:lnB>
                     <a:solidFill>
                       <a:srgbClr val="FFFFFF"/>
                     </a:solidFill>
@@ -3376,6 +4650,26 @@
                     </a:p>
                   </a:txBody>
                   <a:tcPr marL="45720" marR="45720" marT="22860" marB="22860" anchor="ctr">
+                    <a:lnL w="6350">
+                      <a:solidFill>
+                        <a:srgbClr val="D9D9D9"/>
+                      </a:solidFill>
+                    </a:lnL>
+                    <a:lnR w="6350">
+                      <a:solidFill>
+                        <a:srgbClr val="D9D9D9"/>
+                      </a:solidFill>
+                    </a:lnR>
+                    <a:lnT w="6350">
+                      <a:solidFill>
+                        <a:srgbClr val="D9D9D9"/>
+                      </a:solidFill>
+                    </a:lnT>
+                    <a:lnB w="6350">
+                      <a:solidFill>
+                        <a:srgbClr val="D9D9D9"/>
+                      </a:solidFill>
+                    </a:lnB>
                     <a:solidFill>
                       <a:srgbClr val="FFFFFF"/>
                     </a:solidFill>
@@ -3399,6 +4693,26 @@
                     </a:p>
                   </a:txBody>
                   <a:tcPr marL="45720" marR="45720" marT="22860" marB="22860" anchor="ctr">
+                    <a:lnL w="6350">
+                      <a:solidFill>
+                        <a:srgbClr val="D9D9D9"/>
+                      </a:solidFill>
+                    </a:lnL>
+                    <a:lnR w="6350">
+                      <a:solidFill>
+                        <a:srgbClr val="D9D9D9"/>
+                      </a:solidFill>
+                    </a:lnR>
+                    <a:lnT w="6350">
+                      <a:solidFill>
+                        <a:srgbClr val="D9D9D9"/>
+                      </a:solidFill>
+                    </a:lnT>
+                    <a:lnB w="6350">
+                      <a:solidFill>
+                        <a:srgbClr val="D9D9D9"/>
+                      </a:solidFill>
+                    </a:lnB>
                     <a:solidFill>
                       <a:srgbClr val="FFFFFF"/>
                     </a:solidFill>
@@ -3422,6 +4736,26 @@
                     </a:p>
                   </a:txBody>
                   <a:tcPr marL="45720" marR="45720" marT="22860" marB="22860" anchor="ctr">
+                    <a:lnL w="6350">
+                      <a:solidFill>
+                        <a:srgbClr val="D9D9D9"/>
+                      </a:solidFill>
+                    </a:lnL>
+                    <a:lnR w="6350">
+                      <a:solidFill>
+                        <a:srgbClr val="D9D9D9"/>
+                      </a:solidFill>
+                    </a:lnR>
+                    <a:lnT w="6350">
+                      <a:solidFill>
+                        <a:srgbClr val="D9D9D9"/>
+                      </a:solidFill>
+                    </a:lnT>
+                    <a:lnB w="6350">
+                      <a:solidFill>
+                        <a:srgbClr val="D9D9D9"/>
+                      </a:solidFill>
+                    </a:lnB>
                     <a:solidFill>
                       <a:srgbClr val="FFFFFF"/>
                     </a:solidFill>
@@ -3445,6 +4779,26 @@
                     </a:p>
                   </a:txBody>
                   <a:tcPr marL="45720" marR="45720" marT="22860" marB="22860" anchor="ctr">
+                    <a:lnL w="6350">
+                      <a:solidFill>
+                        <a:srgbClr val="D9D9D9"/>
+                      </a:solidFill>
+                    </a:lnL>
+                    <a:lnR w="6350">
+                      <a:solidFill>
+                        <a:srgbClr val="D9D9D9"/>
+                      </a:solidFill>
+                    </a:lnR>
+                    <a:lnT w="6350">
+                      <a:solidFill>
+                        <a:srgbClr val="D9D9D9"/>
+                      </a:solidFill>
+                    </a:lnT>
+                    <a:lnB w="6350">
+                      <a:solidFill>
+                        <a:srgbClr val="D9D9D9"/>
+                      </a:solidFill>
+                    </a:lnB>
                     <a:solidFill>
                       <a:srgbClr val="FFFFFF"/>
                     </a:solidFill>
@@ -3470,6 +4824,26 @@
                     </a:p>
                   </a:txBody>
                   <a:tcPr marL="45720" marR="45720" marT="22860" marB="22860" anchor="ctr">
+                    <a:lnL w="6350">
+                      <a:solidFill>
+                        <a:srgbClr val="D9D9D9"/>
+                      </a:solidFill>
+                    </a:lnL>
+                    <a:lnR w="6350">
+                      <a:solidFill>
+                        <a:srgbClr val="D9D9D9"/>
+                      </a:solidFill>
+                    </a:lnR>
+                    <a:lnT w="6350">
+                      <a:solidFill>
+                        <a:srgbClr val="D9D9D9"/>
+                      </a:solidFill>
+                    </a:lnT>
+                    <a:lnB w="6350">
+                      <a:solidFill>
+                        <a:srgbClr val="D9D9D9"/>
+                      </a:solidFill>
+                    </a:lnB>
                     <a:solidFill>
                       <a:srgbClr val="FFFFFF"/>
                     </a:solidFill>
@@ -3493,6 +4867,26 @@
                     </a:p>
                   </a:txBody>
                   <a:tcPr marL="45720" marR="45720" marT="22860" marB="22860" anchor="ctr">
+                    <a:lnL w="6350">
+                      <a:solidFill>
+                        <a:srgbClr val="D9D9D9"/>
+                      </a:solidFill>
+                    </a:lnL>
+                    <a:lnR w="6350">
+                      <a:solidFill>
+                        <a:srgbClr val="D9D9D9"/>
+                      </a:solidFill>
+                    </a:lnR>
+                    <a:lnT w="6350">
+                      <a:solidFill>
+                        <a:srgbClr val="D9D9D9"/>
+                      </a:solidFill>
+                    </a:lnT>
+                    <a:lnB w="6350">
+                      <a:solidFill>
+                        <a:srgbClr val="D9D9D9"/>
+                      </a:solidFill>
+                    </a:lnB>
                     <a:solidFill>
                       <a:srgbClr val="FFFFFF"/>
                     </a:solidFill>
@@ -3516,6 +4910,26 @@
                     </a:p>
                   </a:txBody>
                   <a:tcPr marL="45720" marR="45720" marT="22860" marB="22860" anchor="ctr">
+                    <a:lnL w="6350">
+                      <a:solidFill>
+                        <a:srgbClr val="D9D9D9"/>
+                      </a:solidFill>
+                    </a:lnL>
+                    <a:lnR w="6350">
+                      <a:solidFill>
+                        <a:srgbClr val="D9D9D9"/>
+                      </a:solidFill>
+                    </a:lnR>
+                    <a:lnT w="6350">
+                      <a:solidFill>
+                        <a:srgbClr val="D9D9D9"/>
+                      </a:solidFill>
+                    </a:lnT>
+                    <a:lnB w="6350">
+                      <a:solidFill>
+                        <a:srgbClr val="D9D9D9"/>
+                      </a:solidFill>
+                    </a:lnB>
                     <a:solidFill>
                       <a:srgbClr val="FFFFFF"/>
                     </a:solidFill>
@@ -3539,6 +4953,26 @@
                     </a:p>
                   </a:txBody>
                   <a:tcPr marL="45720" marR="45720" marT="22860" marB="22860" anchor="ctr">
+                    <a:lnL w="6350">
+                      <a:solidFill>
+                        <a:srgbClr val="D9D9D9"/>
+                      </a:solidFill>
+                    </a:lnL>
+                    <a:lnR w="6350">
+                      <a:solidFill>
+                        <a:srgbClr val="D9D9D9"/>
+                      </a:solidFill>
+                    </a:lnR>
+                    <a:lnT w="6350">
+                      <a:solidFill>
+                        <a:srgbClr val="D9D9D9"/>
+                      </a:solidFill>
+                    </a:lnT>
+                    <a:lnB w="6350">
+                      <a:solidFill>
+                        <a:srgbClr val="D9D9D9"/>
+                      </a:solidFill>
+                    </a:lnB>
                     <a:solidFill>
                       <a:srgbClr val="FFFFFF"/>
                     </a:solidFill>
@@ -3702,9 +5136,7 @@
         <a:graphic>
           <a:graphicData uri="http://schemas.openxmlformats.org/drawingml/2006/table">
             <a:tbl>
-              <a:tblPr firstRow="1" bandRow="0">
-                <a:tableStyleId>{5C22544A-7EE6-4342-B048-85BDC9FD1C3A}</a:tableStyleId>
-              </a:tblPr>
+              <a:tblPr firstRow="1" bandRow="0"/>
               <a:tblGrid>
                 <a:gridCol w="731520"/>
                 <a:gridCol w="2011680"/>
@@ -3731,6 +5163,26 @@
                     </a:p>
                   </a:txBody>
                   <a:tcPr marL="45720" marR="45720" marT="22860" marB="22860" anchor="ctr">
+                    <a:lnL w="6350">
+                      <a:solidFill>
+                        <a:srgbClr val="D9D9D9"/>
+                      </a:solidFill>
+                    </a:lnL>
+                    <a:lnR w="6350">
+                      <a:solidFill>
+                        <a:srgbClr val="D9D9D9"/>
+                      </a:solidFill>
+                    </a:lnR>
+                    <a:lnT w="6350">
+                      <a:solidFill>
+                        <a:srgbClr val="D9D9D9"/>
+                      </a:solidFill>
+                    </a:lnT>
+                    <a:lnB w="6350">
+                      <a:solidFill>
+                        <a:srgbClr val="D9D9D9"/>
+                      </a:solidFill>
+                    </a:lnB>
                     <a:solidFill>
                       <a:srgbClr val="2F3C7E"/>
                     </a:solidFill>
@@ -3754,6 +5206,26 @@
                     </a:p>
                   </a:txBody>
                   <a:tcPr marL="45720" marR="45720" marT="22860" marB="22860" anchor="ctr">
+                    <a:lnL w="6350">
+                      <a:solidFill>
+                        <a:srgbClr val="D9D9D9"/>
+                      </a:solidFill>
+                    </a:lnL>
+                    <a:lnR w="6350">
+                      <a:solidFill>
+                        <a:srgbClr val="D9D9D9"/>
+                      </a:solidFill>
+                    </a:lnR>
+                    <a:lnT w="6350">
+                      <a:solidFill>
+                        <a:srgbClr val="D9D9D9"/>
+                      </a:solidFill>
+                    </a:lnT>
+                    <a:lnB w="6350">
+                      <a:solidFill>
+                        <a:srgbClr val="D9D9D9"/>
+                      </a:solidFill>
+                    </a:lnB>
                     <a:solidFill>
                       <a:srgbClr val="2F3C7E"/>
                     </a:solidFill>
@@ -3777,6 +5249,26 @@
                     </a:p>
                   </a:txBody>
                   <a:tcPr marL="45720" marR="45720" marT="22860" marB="22860" anchor="ctr">
+                    <a:lnL w="6350">
+                      <a:solidFill>
+                        <a:srgbClr val="D9D9D9"/>
+                      </a:solidFill>
+                    </a:lnL>
+                    <a:lnR w="6350">
+                      <a:solidFill>
+                        <a:srgbClr val="D9D9D9"/>
+                      </a:solidFill>
+                    </a:lnR>
+                    <a:lnT w="6350">
+                      <a:solidFill>
+                        <a:srgbClr val="D9D9D9"/>
+                      </a:solidFill>
+                    </a:lnT>
+                    <a:lnB w="6350">
+                      <a:solidFill>
+                        <a:srgbClr val="D9D9D9"/>
+                      </a:solidFill>
+                    </a:lnB>
                     <a:solidFill>
                       <a:srgbClr val="2F3C7E"/>
                     </a:solidFill>
@@ -3800,6 +5292,26 @@
                     </a:p>
                   </a:txBody>
                   <a:tcPr marL="45720" marR="45720" marT="22860" marB="22860" anchor="ctr">
+                    <a:lnL w="6350">
+                      <a:solidFill>
+                        <a:srgbClr val="D9D9D9"/>
+                      </a:solidFill>
+                    </a:lnL>
+                    <a:lnR w="6350">
+                      <a:solidFill>
+                        <a:srgbClr val="D9D9D9"/>
+                      </a:solidFill>
+                    </a:lnR>
+                    <a:lnT w="6350">
+                      <a:solidFill>
+                        <a:srgbClr val="D9D9D9"/>
+                      </a:solidFill>
+                    </a:lnT>
+                    <a:lnB w="6350">
+                      <a:solidFill>
+                        <a:srgbClr val="D9D9D9"/>
+                      </a:solidFill>
+                    </a:lnB>
                     <a:solidFill>
                       <a:srgbClr val="2F3C7E"/>
                     </a:solidFill>
@@ -3823,6 +5335,26 @@
                     </a:p>
                   </a:txBody>
                   <a:tcPr marL="45720" marR="45720" marT="22860" marB="22860" anchor="ctr">
+                    <a:lnL w="6350">
+                      <a:solidFill>
+                        <a:srgbClr val="D9D9D9"/>
+                      </a:solidFill>
+                    </a:lnL>
+                    <a:lnR w="6350">
+                      <a:solidFill>
+                        <a:srgbClr val="D9D9D9"/>
+                      </a:solidFill>
+                    </a:lnR>
+                    <a:lnT w="6350">
+                      <a:solidFill>
+                        <a:srgbClr val="D9D9D9"/>
+                      </a:solidFill>
+                    </a:lnT>
+                    <a:lnB w="6350">
+                      <a:solidFill>
+                        <a:srgbClr val="D9D9D9"/>
+                      </a:solidFill>
+                    </a:lnB>
                     <a:solidFill>
                       <a:srgbClr val="2F3C7E"/>
                     </a:solidFill>
@@ -3848,6 +5380,26 @@
                     </a:p>
                   </a:txBody>
                   <a:tcPr marL="45720" marR="45720" marT="22860" marB="22860" anchor="ctr">
+                    <a:lnL w="6350">
+                      <a:solidFill>
+                        <a:srgbClr val="D9D9D9"/>
+                      </a:solidFill>
+                    </a:lnL>
+                    <a:lnR w="6350">
+                      <a:solidFill>
+                        <a:srgbClr val="D9D9D9"/>
+                      </a:solidFill>
+                    </a:lnR>
+                    <a:lnT w="6350">
+                      <a:solidFill>
+                        <a:srgbClr val="D9D9D9"/>
+                      </a:solidFill>
+                    </a:lnT>
+                    <a:lnB w="6350">
+                      <a:solidFill>
+                        <a:srgbClr val="D9D9D9"/>
+                      </a:solidFill>
+                    </a:lnB>
                     <a:solidFill>
                       <a:srgbClr val="FFFFFF"/>
                     </a:solidFill>
@@ -3871,6 +5423,26 @@
                     </a:p>
                   </a:txBody>
                   <a:tcPr marL="45720" marR="45720" marT="22860" marB="22860" anchor="ctr">
+                    <a:lnL w="6350">
+                      <a:solidFill>
+                        <a:srgbClr val="D9D9D9"/>
+                      </a:solidFill>
+                    </a:lnL>
+                    <a:lnR w="6350">
+                      <a:solidFill>
+                        <a:srgbClr val="D9D9D9"/>
+                      </a:solidFill>
+                    </a:lnR>
+                    <a:lnT w="6350">
+                      <a:solidFill>
+                        <a:srgbClr val="D9D9D9"/>
+                      </a:solidFill>
+                    </a:lnT>
+                    <a:lnB w="6350">
+                      <a:solidFill>
+                        <a:srgbClr val="D9D9D9"/>
+                      </a:solidFill>
+                    </a:lnB>
                     <a:solidFill>
                       <a:srgbClr val="FFFFFF"/>
                     </a:solidFill>
@@ -3894,6 +5466,26 @@
                     </a:p>
                   </a:txBody>
                   <a:tcPr marL="45720" marR="45720" marT="22860" marB="22860" anchor="ctr">
+                    <a:lnL w="6350">
+                      <a:solidFill>
+                        <a:srgbClr val="D9D9D9"/>
+                      </a:solidFill>
+                    </a:lnL>
+                    <a:lnR w="6350">
+                      <a:solidFill>
+                        <a:srgbClr val="D9D9D9"/>
+                      </a:solidFill>
+                    </a:lnR>
+                    <a:lnT w="6350">
+                      <a:solidFill>
+                        <a:srgbClr val="D9D9D9"/>
+                      </a:solidFill>
+                    </a:lnT>
+                    <a:lnB w="6350">
+                      <a:solidFill>
+                        <a:srgbClr val="D9D9D9"/>
+                      </a:solidFill>
+                    </a:lnB>
                     <a:solidFill>
                       <a:srgbClr val="FFFFFF"/>
                     </a:solidFill>
@@ -3917,6 +5509,26 @@
                     </a:p>
                   </a:txBody>
                   <a:tcPr marL="45720" marR="45720" marT="22860" marB="22860" anchor="ctr">
+                    <a:lnL w="6350">
+                      <a:solidFill>
+                        <a:srgbClr val="D9D9D9"/>
+                      </a:solidFill>
+                    </a:lnL>
+                    <a:lnR w="6350">
+                      <a:solidFill>
+                        <a:srgbClr val="D9D9D9"/>
+                      </a:solidFill>
+                    </a:lnR>
+                    <a:lnT w="6350">
+                      <a:solidFill>
+                        <a:srgbClr val="D9D9D9"/>
+                      </a:solidFill>
+                    </a:lnT>
+                    <a:lnB w="6350">
+                      <a:solidFill>
+                        <a:srgbClr val="D9D9D9"/>
+                      </a:solidFill>
+                    </a:lnB>
                     <a:solidFill>
                       <a:srgbClr val="FFFFFF"/>
                     </a:solidFill>
@@ -3940,6 +5552,26 @@
                     </a:p>
                   </a:txBody>
                   <a:tcPr marL="45720" marR="45720" marT="22860" marB="22860" anchor="ctr">
+                    <a:lnL w="6350">
+                      <a:solidFill>
+                        <a:srgbClr val="D9D9D9"/>
+                      </a:solidFill>
+                    </a:lnL>
+                    <a:lnR w="6350">
+                      <a:solidFill>
+                        <a:srgbClr val="D9D9D9"/>
+                      </a:solidFill>
+                    </a:lnR>
+                    <a:lnT w="6350">
+                      <a:solidFill>
+                        <a:srgbClr val="D9D9D9"/>
+                      </a:solidFill>
+                    </a:lnT>
+                    <a:lnB w="6350">
+                      <a:solidFill>
+                        <a:srgbClr val="D9D9D9"/>
+                      </a:solidFill>
+                    </a:lnB>
                     <a:solidFill>
                       <a:srgbClr val="FFFFFF"/>
                     </a:solidFill>
@@ -3965,6 +5597,26 @@
                     </a:p>
                   </a:txBody>
                   <a:tcPr marL="45720" marR="45720" marT="22860" marB="22860" anchor="ctr">
+                    <a:lnL w="6350">
+                      <a:solidFill>
+                        <a:srgbClr val="D9D9D9"/>
+                      </a:solidFill>
+                    </a:lnL>
+                    <a:lnR w="6350">
+                      <a:solidFill>
+                        <a:srgbClr val="D9D9D9"/>
+                      </a:solidFill>
+                    </a:lnR>
+                    <a:lnT w="6350">
+                      <a:solidFill>
+                        <a:srgbClr val="D9D9D9"/>
+                      </a:solidFill>
+                    </a:lnT>
+                    <a:lnB w="6350">
+                      <a:solidFill>
+                        <a:srgbClr val="D9D9D9"/>
+                      </a:solidFill>
+                    </a:lnB>
                     <a:solidFill>
                       <a:srgbClr val="FFFFFF"/>
                     </a:solidFill>
@@ -3988,6 +5640,26 @@
                     </a:p>
                   </a:txBody>
                   <a:tcPr marL="45720" marR="45720" marT="22860" marB="22860" anchor="ctr">
+                    <a:lnL w="6350">
+                      <a:solidFill>
+                        <a:srgbClr val="D9D9D9"/>
+                      </a:solidFill>
+                    </a:lnL>
+                    <a:lnR w="6350">
+                      <a:solidFill>
+                        <a:srgbClr val="D9D9D9"/>
+                      </a:solidFill>
+                    </a:lnR>
+                    <a:lnT w="6350">
+                      <a:solidFill>
+                        <a:srgbClr val="D9D9D9"/>
+                      </a:solidFill>
+                    </a:lnT>
+                    <a:lnB w="6350">
+                      <a:solidFill>
+                        <a:srgbClr val="D9D9D9"/>
+                      </a:solidFill>
+                    </a:lnB>
                     <a:solidFill>
                       <a:srgbClr val="FFFFFF"/>
                     </a:solidFill>
@@ -4011,6 +5683,26 @@
                     </a:p>
                   </a:txBody>
                   <a:tcPr marL="45720" marR="45720" marT="22860" marB="22860" anchor="ctr">
+                    <a:lnL w="6350">
+                      <a:solidFill>
+                        <a:srgbClr val="D9D9D9"/>
+                      </a:solidFill>
+                    </a:lnL>
+                    <a:lnR w="6350">
+                      <a:solidFill>
+                        <a:srgbClr val="D9D9D9"/>
+                      </a:solidFill>
+                    </a:lnR>
+                    <a:lnT w="6350">
+                      <a:solidFill>
+                        <a:srgbClr val="D9D9D9"/>
+                      </a:solidFill>
+                    </a:lnT>
+                    <a:lnB w="6350">
+                      <a:solidFill>
+                        <a:srgbClr val="D9D9D9"/>
+                      </a:solidFill>
+                    </a:lnB>
                     <a:solidFill>
                       <a:srgbClr val="FFFFFF"/>
                     </a:solidFill>
@@ -4034,6 +5726,26 @@
                     </a:p>
                   </a:txBody>
                   <a:tcPr marL="45720" marR="45720" marT="22860" marB="22860" anchor="ctr">
+                    <a:lnL w="6350">
+                      <a:solidFill>
+                        <a:srgbClr val="D9D9D9"/>
+                      </a:solidFill>
+                    </a:lnL>
+                    <a:lnR w="6350">
+                      <a:solidFill>
+                        <a:srgbClr val="D9D9D9"/>
+                      </a:solidFill>
+                    </a:lnR>
+                    <a:lnT w="6350">
+                      <a:solidFill>
+                        <a:srgbClr val="D9D9D9"/>
+                      </a:solidFill>
+                    </a:lnT>
+                    <a:lnB w="6350">
+                      <a:solidFill>
+                        <a:srgbClr val="D9D9D9"/>
+                      </a:solidFill>
+                    </a:lnB>
                     <a:solidFill>
                       <a:srgbClr val="FFFFFF"/>
                     </a:solidFill>
@@ -4057,6 +5769,26 @@
                     </a:p>
                   </a:txBody>
                   <a:tcPr marL="45720" marR="45720" marT="22860" marB="22860" anchor="ctr">
+                    <a:lnL w="6350">
+                      <a:solidFill>
+                        <a:srgbClr val="D9D9D9"/>
+                      </a:solidFill>
+                    </a:lnL>
+                    <a:lnR w="6350">
+                      <a:solidFill>
+                        <a:srgbClr val="D9D9D9"/>
+                      </a:solidFill>
+                    </a:lnR>
+                    <a:lnT w="6350">
+                      <a:solidFill>
+                        <a:srgbClr val="D9D9D9"/>
+                      </a:solidFill>
+                    </a:lnT>
+                    <a:lnB w="6350">
+                      <a:solidFill>
+                        <a:srgbClr val="D9D9D9"/>
+                      </a:solidFill>
+                    </a:lnB>
                     <a:solidFill>
                       <a:srgbClr val="FFFFFF"/>
                     </a:solidFill>
@@ -4082,6 +5814,26 @@
                     </a:p>
                   </a:txBody>
                   <a:tcPr marL="45720" marR="45720" marT="22860" marB="22860" anchor="ctr">
+                    <a:lnL w="6350">
+                      <a:solidFill>
+                        <a:srgbClr val="D9D9D9"/>
+                      </a:solidFill>
+                    </a:lnL>
+                    <a:lnR w="6350">
+                      <a:solidFill>
+                        <a:srgbClr val="D9D9D9"/>
+                      </a:solidFill>
+                    </a:lnR>
+                    <a:lnT w="6350">
+                      <a:solidFill>
+                        <a:srgbClr val="D9D9D9"/>
+                      </a:solidFill>
+                    </a:lnT>
+                    <a:lnB w="6350">
+                      <a:solidFill>
+                        <a:srgbClr val="D9D9D9"/>
+                      </a:solidFill>
+                    </a:lnB>
                     <a:solidFill>
                       <a:srgbClr val="FFFFFF"/>
                     </a:solidFill>
@@ -4105,6 +5857,26 @@
                     </a:p>
                   </a:txBody>
                   <a:tcPr marL="45720" marR="45720" marT="22860" marB="22860" anchor="ctr">
+                    <a:lnL w="6350">
+                      <a:solidFill>
+                        <a:srgbClr val="D9D9D9"/>
+                      </a:solidFill>
+                    </a:lnL>
+                    <a:lnR w="6350">
+                      <a:solidFill>
+                        <a:srgbClr val="D9D9D9"/>
+                      </a:solidFill>
+                    </a:lnR>
+                    <a:lnT w="6350">
+                      <a:solidFill>
+                        <a:srgbClr val="D9D9D9"/>
+                      </a:solidFill>
+                    </a:lnT>
+                    <a:lnB w="6350">
+                      <a:solidFill>
+                        <a:srgbClr val="D9D9D9"/>
+                      </a:solidFill>
+                    </a:lnB>
                     <a:solidFill>
                       <a:srgbClr val="FFFFFF"/>
                     </a:solidFill>
@@ -4128,6 +5900,26 @@
                     </a:p>
                   </a:txBody>
                   <a:tcPr marL="45720" marR="45720" marT="22860" marB="22860" anchor="ctr">
+                    <a:lnL w="6350">
+                      <a:solidFill>
+                        <a:srgbClr val="D9D9D9"/>
+                      </a:solidFill>
+                    </a:lnL>
+                    <a:lnR w="6350">
+                      <a:solidFill>
+                        <a:srgbClr val="D9D9D9"/>
+                      </a:solidFill>
+                    </a:lnR>
+                    <a:lnT w="6350">
+                      <a:solidFill>
+                        <a:srgbClr val="D9D9D9"/>
+                      </a:solidFill>
+                    </a:lnT>
+                    <a:lnB w="6350">
+                      <a:solidFill>
+                        <a:srgbClr val="D9D9D9"/>
+                      </a:solidFill>
+                    </a:lnB>
                     <a:solidFill>
                       <a:srgbClr val="FFFFFF"/>
                     </a:solidFill>
@@ -4151,6 +5943,26 @@
                     </a:p>
                   </a:txBody>
                   <a:tcPr marL="45720" marR="45720" marT="22860" marB="22860" anchor="ctr">
+                    <a:lnL w="6350">
+                      <a:solidFill>
+                        <a:srgbClr val="D9D9D9"/>
+                      </a:solidFill>
+                    </a:lnL>
+                    <a:lnR w="6350">
+                      <a:solidFill>
+                        <a:srgbClr val="D9D9D9"/>
+                      </a:solidFill>
+                    </a:lnR>
+                    <a:lnT w="6350">
+                      <a:solidFill>
+                        <a:srgbClr val="D9D9D9"/>
+                      </a:solidFill>
+                    </a:lnT>
+                    <a:lnB w="6350">
+                      <a:solidFill>
+                        <a:srgbClr val="D9D9D9"/>
+                      </a:solidFill>
+                    </a:lnB>
                     <a:solidFill>
                       <a:srgbClr val="FFFFFF"/>
                     </a:solidFill>
@@ -4174,6 +5986,26 @@
                     </a:p>
                   </a:txBody>
                   <a:tcPr marL="45720" marR="45720" marT="22860" marB="22860" anchor="ctr">
+                    <a:lnL w="6350">
+                      <a:solidFill>
+                        <a:srgbClr val="D9D9D9"/>
+                      </a:solidFill>
+                    </a:lnL>
+                    <a:lnR w="6350">
+                      <a:solidFill>
+                        <a:srgbClr val="D9D9D9"/>
+                      </a:solidFill>
+                    </a:lnR>
+                    <a:lnT w="6350">
+                      <a:solidFill>
+                        <a:srgbClr val="D9D9D9"/>
+                      </a:solidFill>
+                    </a:lnT>
+                    <a:lnB w="6350">
+                      <a:solidFill>
+                        <a:srgbClr val="D9D9D9"/>
+                      </a:solidFill>
+                    </a:lnB>
                     <a:solidFill>
                       <a:srgbClr val="FFFFFF"/>
                     </a:solidFill>
@@ -4199,6 +6031,26 @@
                     </a:p>
                   </a:txBody>
                   <a:tcPr marL="45720" marR="45720" marT="22860" marB="22860" anchor="ctr">
+                    <a:lnL w="6350">
+                      <a:solidFill>
+                        <a:srgbClr val="D9D9D9"/>
+                      </a:solidFill>
+                    </a:lnL>
+                    <a:lnR w="6350">
+                      <a:solidFill>
+                        <a:srgbClr val="D9D9D9"/>
+                      </a:solidFill>
+                    </a:lnR>
+                    <a:lnT w="6350">
+                      <a:solidFill>
+                        <a:srgbClr val="D9D9D9"/>
+                      </a:solidFill>
+                    </a:lnT>
+                    <a:lnB w="6350">
+                      <a:solidFill>
+                        <a:srgbClr val="D9D9D9"/>
+                      </a:solidFill>
+                    </a:lnB>
                     <a:solidFill>
                       <a:srgbClr val="EAF3EF"/>
                     </a:solidFill>
@@ -4222,6 +6074,26 @@
                     </a:p>
                   </a:txBody>
                   <a:tcPr marL="45720" marR="45720" marT="22860" marB="22860" anchor="ctr">
+                    <a:lnL w="6350">
+                      <a:solidFill>
+                        <a:srgbClr val="D9D9D9"/>
+                      </a:solidFill>
+                    </a:lnL>
+                    <a:lnR w="6350">
+                      <a:solidFill>
+                        <a:srgbClr val="D9D9D9"/>
+                      </a:solidFill>
+                    </a:lnR>
+                    <a:lnT w="6350">
+                      <a:solidFill>
+                        <a:srgbClr val="D9D9D9"/>
+                      </a:solidFill>
+                    </a:lnT>
+                    <a:lnB w="6350">
+                      <a:solidFill>
+                        <a:srgbClr val="D9D9D9"/>
+                      </a:solidFill>
+                    </a:lnB>
                     <a:solidFill>
                       <a:srgbClr val="EAF3EF"/>
                     </a:solidFill>
@@ -4245,6 +6117,26 @@
                     </a:p>
                   </a:txBody>
                   <a:tcPr marL="45720" marR="45720" marT="22860" marB="22860" anchor="ctr">
+                    <a:lnL w="6350">
+                      <a:solidFill>
+                        <a:srgbClr val="D9D9D9"/>
+                      </a:solidFill>
+                    </a:lnL>
+                    <a:lnR w="6350">
+                      <a:solidFill>
+                        <a:srgbClr val="D9D9D9"/>
+                      </a:solidFill>
+                    </a:lnR>
+                    <a:lnT w="6350">
+                      <a:solidFill>
+                        <a:srgbClr val="D9D9D9"/>
+                      </a:solidFill>
+                    </a:lnT>
+                    <a:lnB w="6350">
+                      <a:solidFill>
+                        <a:srgbClr val="D9D9D9"/>
+                      </a:solidFill>
+                    </a:lnB>
                     <a:solidFill>
                       <a:srgbClr val="EAF3EF"/>
                     </a:solidFill>
@@ -4268,6 +6160,26 @@
                     </a:p>
                   </a:txBody>
                   <a:tcPr marL="45720" marR="45720" marT="22860" marB="22860" anchor="ctr">
+                    <a:lnL w="6350">
+                      <a:solidFill>
+                        <a:srgbClr val="D9D9D9"/>
+                      </a:solidFill>
+                    </a:lnL>
+                    <a:lnR w="6350">
+                      <a:solidFill>
+                        <a:srgbClr val="D9D9D9"/>
+                      </a:solidFill>
+                    </a:lnR>
+                    <a:lnT w="6350">
+                      <a:solidFill>
+                        <a:srgbClr val="D9D9D9"/>
+                      </a:solidFill>
+                    </a:lnT>
+                    <a:lnB w="6350">
+                      <a:solidFill>
+                        <a:srgbClr val="D9D9D9"/>
+                      </a:solidFill>
+                    </a:lnB>
                     <a:solidFill>
                       <a:srgbClr val="EAF3EF"/>
                     </a:solidFill>
@@ -4291,6 +6203,26 @@
                     </a:p>
                   </a:txBody>
                   <a:tcPr marL="45720" marR="45720" marT="22860" marB="22860" anchor="ctr">
+                    <a:lnL w="6350">
+                      <a:solidFill>
+                        <a:srgbClr val="D9D9D9"/>
+                      </a:solidFill>
+                    </a:lnL>
+                    <a:lnR w="6350">
+                      <a:solidFill>
+                        <a:srgbClr val="D9D9D9"/>
+                      </a:solidFill>
+                    </a:lnR>
+                    <a:lnT w="6350">
+                      <a:solidFill>
+                        <a:srgbClr val="D9D9D9"/>
+                      </a:solidFill>
+                    </a:lnT>
+                    <a:lnB w="6350">
+                      <a:solidFill>
+                        <a:srgbClr val="D9D9D9"/>
+                      </a:solidFill>
+                    </a:lnB>
                     <a:solidFill>
                       <a:srgbClr val="EAF3EF"/>
                     </a:solidFill>
@@ -4316,6 +6248,26 @@
                     </a:p>
                   </a:txBody>
                   <a:tcPr marL="45720" marR="45720" marT="22860" marB="22860" anchor="ctr">
+                    <a:lnL w="6350">
+                      <a:solidFill>
+                        <a:srgbClr val="D9D9D9"/>
+                      </a:solidFill>
+                    </a:lnL>
+                    <a:lnR w="6350">
+                      <a:solidFill>
+                        <a:srgbClr val="D9D9D9"/>
+                      </a:solidFill>
+                    </a:lnR>
+                    <a:lnT w="6350">
+                      <a:solidFill>
+                        <a:srgbClr val="D9D9D9"/>
+                      </a:solidFill>
+                    </a:lnT>
+                    <a:lnB w="6350">
+                      <a:solidFill>
+                        <a:srgbClr val="D9D9D9"/>
+                      </a:solidFill>
+                    </a:lnB>
                     <a:solidFill>
                       <a:srgbClr val="FFFFFF"/>
                     </a:solidFill>
@@ -4339,6 +6291,26 @@
                     </a:p>
                   </a:txBody>
                   <a:tcPr marL="45720" marR="45720" marT="22860" marB="22860" anchor="ctr">
+                    <a:lnL w="6350">
+                      <a:solidFill>
+                        <a:srgbClr val="D9D9D9"/>
+                      </a:solidFill>
+                    </a:lnL>
+                    <a:lnR w="6350">
+                      <a:solidFill>
+                        <a:srgbClr val="D9D9D9"/>
+                      </a:solidFill>
+                    </a:lnR>
+                    <a:lnT w="6350">
+                      <a:solidFill>
+                        <a:srgbClr val="D9D9D9"/>
+                      </a:solidFill>
+                    </a:lnT>
+                    <a:lnB w="6350">
+                      <a:solidFill>
+                        <a:srgbClr val="D9D9D9"/>
+                      </a:solidFill>
+                    </a:lnB>
                     <a:solidFill>
                       <a:srgbClr val="FFFFFF"/>
                     </a:solidFill>
@@ -4362,6 +6334,26 @@
                     </a:p>
                   </a:txBody>
                   <a:tcPr marL="45720" marR="45720" marT="22860" marB="22860" anchor="ctr">
+                    <a:lnL w="6350">
+                      <a:solidFill>
+                        <a:srgbClr val="D9D9D9"/>
+                      </a:solidFill>
+                    </a:lnL>
+                    <a:lnR w="6350">
+                      <a:solidFill>
+                        <a:srgbClr val="D9D9D9"/>
+                      </a:solidFill>
+                    </a:lnR>
+                    <a:lnT w="6350">
+                      <a:solidFill>
+                        <a:srgbClr val="D9D9D9"/>
+                      </a:solidFill>
+                    </a:lnT>
+                    <a:lnB w="6350">
+                      <a:solidFill>
+                        <a:srgbClr val="D9D9D9"/>
+                      </a:solidFill>
+                    </a:lnB>
                     <a:solidFill>
                       <a:srgbClr val="FFFFFF"/>
                     </a:solidFill>
@@ -4385,6 +6377,26 @@
                     </a:p>
                   </a:txBody>
                   <a:tcPr marL="45720" marR="45720" marT="22860" marB="22860" anchor="ctr">
+                    <a:lnL w="6350">
+                      <a:solidFill>
+                        <a:srgbClr val="D9D9D9"/>
+                      </a:solidFill>
+                    </a:lnL>
+                    <a:lnR w="6350">
+                      <a:solidFill>
+                        <a:srgbClr val="D9D9D9"/>
+                      </a:solidFill>
+                    </a:lnR>
+                    <a:lnT w="6350">
+                      <a:solidFill>
+                        <a:srgbClr val="D9D9D9"/>
+                      </a:solidFill>
+                    </a:lnT>
+                    <a:lnB w="6350">
+                      <a:solidFill>
+                        <a:srgbClr val="D9D9D9"/>
+                      </a:solidFill>
+                    </a:lnB>
                     <a:solidFill>
                       <a:srgbClr val="FFFFFF"/>
                     </a:solidFill>
@@ -4408,6 +6420,26 @@
                     </a:p>
                   </a:txBody>
                   <a:tcPr marL="45720" marR="45720" marT="22860" marB="22860" anchor="ctr">
+                    <a:lnL w="6350">
+                      <a:solidFill>
+                        <a:srgbClr val="D9D9D9"/>
+                      </a:solidFill>
+                    </a:lnL>
+                    <a:lnR w="6350">
+                      <a:solidFill>
+                        <a:srgbClr val="D9D9D9"/>
+                      </a:solidFill>
+                    </a:lnR>
+                    <a:lnT w="6350">
+                      <a:solidFill>
+                        <a:srgbClr val="D9D9D9"/>
+                      </a:solidFill>
+                    </a:lnT>
+                    <a:lnB w="6350">
+                      <a:solidFill>
+                        <a:srgbClr val="D9D9D9"/>
+                      </a:solidFill>
+                    </a:lnB>
                     <a:solidFill>
                       <a:srgbClr val="FFFFFF"/>
                     </a:solidFill>
@@ -4433,6 +6465,26 @@
                     </a:p>
                   </a:txBody>
                   <a:tcPr marL="45720" marR="45720" marT="22860" marB="22860" anchor="ctr">
+                    <a:lnL w="6350">
+                      <a:solidFill>
+                        <a:srgbClr val="D9D9D9"/>
+                      </a:solidFill>
+                    </a:lnL>
+                    <a:lnR w="6350">
+                      <a:solidFill>
+                        <a:srgbClr val="D9D9D9"/>
+                      </a:solidFill>
+                    </a:lnR>
+                    <a:lnT w="6350">
+                      <a:solidFill>
+                        <a:srgbClr val="D9D9D9"/>
+                      </a:solidFill>
+                    </a:lnT>
+                    <a:lnB w="6350">
+                      <a:solidFill>
+                        <a:srgbClr val="D9D9D9"/>
+                      </a:solidFill>
+                    </a:lnB>
                     <a:solidFill>
                       <a:srgbClr val="EAF3EF"/>
                     </a:solidFill>
@@ -4456,6 +6508,26 @@
                     </a:p>
                   </a:txBody>
                   <a:tcPr marL="45720" marR="45720" marT="22860" marB="22860" anchor="ctr">
+                    <a:lnL w="6350">
+                      <a:solidFill>
+                        <a:srgbClr val="D9D9D9"/>
+                      </a:solidFill>
+                    </a:lnL>
+                    <a:lnR w="6350">
+                      <a:solidFill>
+                        <a:srgbClr val="D9D9D9"/>
+                      </a:solidFill>
+                    </a:lnR>
+                    <a:lnT w="6350">
+                      <a:solidFill>
+                        <a:srgbClr val="D9D9D9"/>
+                      </a:solidFill>
+                    </a:lnT>
+                    <a:lnB w="6350">
+                      <a:solidFill>
+                        <a:srgbClr val="D9D9D9"/>
+                      </a:solidFill>
+                    </a:lnB>
                     <a:solidFill>
                       <a:srgbClr val="EAF3EF"/>
                     </a:solidFill>
@@ -4479,6 +6551,26 @@
                     </a:p>
                   </a:txBody>
                   <a:tcPr marL="45720" marR="45720" marT="22860" marB="22860" anchor="ctr">
+                    <a:lnL w="6350">
+                      <a:solidFill>
+                        <a:srgbClr val="D9D9D9"/>
+                      </a:solidFill>
+                    </a:lnL>
+                    <a:lnR w="6350">
+                      <a:solidFill>
+                        <a:srgbClr val="D9D9D9"/>
+                      </a:solidFill>
+                    </a:lnR>
+                    <a:lnT w="6350">
+                      <a:solidFill>
+                        <a:srgbClr val="D9D9D9"/>
+                      </a:solidFill>
+                    </a:lnT>
+                    <a:lnB w="6350">
+                      <a:solidFill>
+                        <a:srgbClr val="D9D9D9"/>
+                      </a:solidFill>
+                    </a:lnB>
                     <a:solidFill>
                       <a:srgbClr val="EAF3EF"/>
                     </a:solidFill>
@@ -4502,6 +6594,26 @@
                     </a:p>
                   </a:txBody>
                   <a:tcPr marL="45720" marR="45720" marT="22860" marB="22860" anchor="ctr">
+                    <a:lnL w="6350">
+                      <a:solidFill>
+                        <a:srgbClr val="D9D9D9"/>
+                      </a:solidFill>
+                    </a:lnL>
+                    <a:lnR w="6350">
+                      <a:solidFill>
+                        <a:srgbClr val="D9D9D9"/>
+                      </a:solidFill>
+                    </a:lnR>
+                    <a:lnT w="6350">
+                      <a:solidFill>
+                        <a:srgbClr val="D9D9D9"/>
+                      </a:solidFill>
+                    </a:lnT>
+                    <a:lnB w="6350">
+                      <a:solidFill>
+                        <a:srgbClr val="D9D9D9"/>
+                      </a:solidFill>
+                    </a:lnB>
                     <a:solidFill>
                       <a:srgbClr val="EAF3EF"/>
                     </a:solidFill>
@@ -4525,6 +6637,26 @@
                     </a:p>
                   </a:txBody>
                   <a:tcPr marL="45720" marR="45720" marT="22860" marB="22860" anchor="ctr">
+                    <a:lnL w="6350">
+                      <a:solidFill>
+                        <a:srgbClr val="D9D9D9"/>
+                      </a:solidFill>
+                    </a:lnL>
+                    <a:lnR w="6350">
+                      <a:solidFill>
+                        <a:srgbClr val="D9D9D9"/>
+                      </a:solidFill>
+                    </a:lnR>
+                    <a:lnT w="6350">
+                      <a:solidFill>
+                        <a:srgbClr val="D9D9D9"/>
+                      </a:solidFill>
+                    </a:lnT>
+                    <a:lnB w="6350">
+                      <a:solidFill>
+                        <a:srgbClr val="D9D9D9"/>
+                      </a:solidFill>
+                    </a:lnB>
                     <a:solidFill>
                       <a:srgbClr val="EAF3EF"/>
                     </a:solidFill>
@@ -4585,9 +6717,7 @@
         <a:graphic>
           <a:graphicData uri="http://schemas.openxmlformats.org/drawingml/2006/table">
             <a:tbl>
-              <a:tblPr firstRow="1" bandRow="0">
-                <a:tableStyleId>{5C22544A-7EE6-4342-B048-85BDC9FD1C3A}</a:tableStyleId>
-              </a:tblPr>
+              <a:tblPr firstRow="1" bandRow="0"/>
               <a:tblGrid>
                 <a:gridCol w="731520"/>
                 <a:gridCol w="2011680"/>
@@ -4614,6 +6744,26 @@
                     </a:p>
                   </a:txBody>
                   <a:tcPr marL="45720" marR="45720" marT="22860" marB="22860" anchor="ctr">
+                    <a:lnL w="6350">
+                      <a:solidFill>
+                        <a:srgbClr val="D9D9D9"/>
+                      </a:solidFill>
+                    </a:lnL>
+                    <a:lnR w="6350">
+                      <a:solidFill>
+                        <a:srgbClr val="D9D9D9"/>
+                      </a:solidFill>
+                    </a:lnR>
+                    <a:lnT w="6350">
+                      <a:solidFill>
+                        <a:srgbClr val="D9D9D9"/>
+                      </a:solidFill>
+                    </a:lnT>
+                    <a:lnB w="6350">
+                      <a:solidFill>
+                        <a:srgbClr val="D9D9D9"/>
+                      </a:solidFill>
+                    </a:lnB>
                     <a:solidFill>
                       <a:srgbClr val="2F3C7E"/>
                     </a:solidFill>
@@ -4637,6 +6787,26 @@
                     </a:p>
                   </a:txBody>
                   <a:tcPr marL="45720" marR="45720" marT="22860" marB="22860" anchor="ctr">
+                    <a:lnL w="6350">
+                      <a:solidFill>
+                        <a:srgbClr val="D9D9D9"/>
+                      </a:solidFill>
+                    </a:lnL>
+                    <a:lnR w="6350">
+                      <a:solidFill>
+                        <a:srgbClr val="D9D9D9"/>
+                      </a:solidFill>
+                    </a:lnR>
+                    <a:lnT w="6350">
+                      <a:solidFill>
+                        <a:srgbClr val="D9D9D9"/>
+                      </a:solidFill>
+                    </a:lnT>
+                    <a:lnB w="6350">
+                      <a:solidFill>
+                        <a:srgbClr val="D9D9D9"/>
+                      </a:solidFill>
+                    </a:lnB>
                     <a:solidFill>
                       <a:srgbClr val="2F3C7E"/>
                     </a:solidFill>
@@ -4660,6 +6830,26 @@
                     </a:p>
                   </a:txBody>
                   <a:tcPr marL="45720" marR="45720" marT="22860" marB="22860" anchor="ctr">
+                    <a:lnL w="6350">
+                      <a:solidFill>
+                        <a:srgbClr val="D9D9D9"/>
+                      </a:solidFill>
+                    </a:lnL>
+                    <a:lnR w="6350">
+                      <a:solidFill>
+                        <a:srgbClr val="D9D9D9"/>
+                      </a:solidFill>
+                    </a:lnR>
+                    <a:lnT w="6350">
+                      <a:solidFill>
+                        <a:srgbClr val="D9D9D9"/>
+                      </a:solidFill>
+                    </a:lnT>
+                    <a:lnB w="6350">
+                      <a:solidFill>
+                        <a:srgbClr val="D9D9D9"/>
+                      </a:solidFill>
+                    </a:lnB>
                     <a:solidFill>
                       <a:srgbClr val="2F3C7E"/>
                     </a:solidFill>
@@ -4683,6 +6873,26 @@
                     </a:p>
                   </a:txBody>
                   <a:tcPr marL="45720" marR="45720" marT="22860" marB="22860" anchor="ctr">
+                    <a:lnL w="6350">
+                      <a:solidFill>
+                        <a:srgbClr val="D9D9D9"/>
+                      </a:solidFill>
+                    </a:lnL>
+                    <a:lnR w="6350">
+                      <a:solidFill>
+                        <a:srgbClr val="D9D9D9"/>
+                      </a:solidFill>
+                    </a:lnR>
+                    <a:lnT w="6350">
+                      <a:solidFill>
+                        <a:srgbClr val="D9D9D9"/>
+                      </a:solidFill>
+                    </a:lnT>
+                    <a:lnB w="6350">
+                      <a:solidFill>
+                        <a:srgbClr val="D9D9D9"/>
+                      </a:solidFill>
+                    </a:lnB>
                     <a:solidFill>
                       <a:srgbClr val="2F3C7E"/>
                     </a:solidFill>
@@ -4706,6 +6916,26 @@
                     </a:p>
                   </a:txBody>
                   <a:tcPr marL="45720" marR="45720" marT="22860" marB="22860" anchor="ctr">
+                    <a:lnL w="6350">
+                      <a:solidFill>
+                        <a:srgbClr val="D9D9D9"/>
+                      </a:solidFill>
+                    </a:lnL>
+                    <a:lnR w="6350">
+                      <a:solidFill>
+                        <a:srgbClr val="D9D9D9"/>
+                      </a:solidFill>
+                    </a:lnR>
+                    <a:lnT w="6350">
+                      <a:solidFill>
+                        <a:srgbClr val="D9D9D9"/>
+                      </a:solidFill>
+                    </a:lnT>
+                    <a:lnB w="6350">
+                      <a:solidFill>
+                        <a:srgbClr val="D9D9D9"/>
+                      </a:solidFill>
+                    </a:lnB>
                     <a:solidFill>
                       <a:srgbClr val="2F3C7E"/>
                     </a:solidFill>
@@ -4731,6 +6961,26 @@
                     </a:p>
                   </a:txBody>
                   <a:tcPr marL="45720" marR="45720" marT="22860" marB="22860" anchor="ctr">
+                    <a:lnL w="6350">
+                      <a:solidFill>
+                        <a:srgbClr val="D9D9D9"/>
+                      </a:solidFill>
+                    </a:lnL>
+                    <a:lnR w="6350">
+                      <a:solidFill>
+                        <a:srgbClr val="D9D9D9"/>
+                      </a:solidFill>
+                    </a:lnR>
+                    <a:lnT w="6350">
+                      <a:solidFill>
+                        <a:srgbClr val="D9D9D9"/>
+                      </a:solidFill>
+                    </a:lnT>
+                    <a:lnB w="6350">
+                      <a:solidFill>
+                        <a:srgbClr val="D9D9D9"/>
+                      </a:solidFill>
+                    </a:lnB>
                     <a:solidFill>
                       <a:srgbClr val="FFFFFF"/>
                     </a:solidFill>
@@ -4754,6 +7004,26 @@
                     </a:p>
                   </a:txBody>
                   <a:tcPr marL="45720" marR="45720" marT="22860" marB="22860" anchor="ctr">
+                    <a:lnL w="6350">
+                      <a:solidFill>
+                        <a:srgbClr val="D9D9D9"/>
+                      </a:solidFill>
+                    </a:lnL>
+                    <a:lnR w="6350">
+                      <a:solidFill>
+                        <a:srgbClr val="D9D9D9"/>
+                      </a:solidFill>
+                    </a:lnR>
+                    <a:lnT w="6350">
+                      <a:solidFill>
+                        <a:srgbClr val="D9D9D9"/>
+                      </a:solidFill>
+                    </a:lnT>
+                    <a:lnB w="6350">
+                      <a:solidFill>
+                        <a:srgbClr val="D9D9D9"/>
+                      </a:solidFill>
+                    </a:lnB>
                     <a:solidFill>
                       <a:srgbClr val="FFFFFF"/>
                     </a:solidFill>
@@ -4777,6 +7047,26 @@
                     </a:p>
                   </a:txBody>
                   <a:tcPr marL="45720" marR="45720" marT="22860" marB="22860" anchor="ctr">
+                    <a:lnL w="6350">
+                      <a:solidFill>
+                        <a:srgbClr val="D9D9D9"/>
+                      </a:solidFill>
+                    </a:lnL>
+                    <a:lnR w="6350">
+                      <a:solidFill>
+                        <a:srgbClr val="D9D9D9"/>
+                      </a:solidFill>
+                    </a:lnR>
+                    <a:lnT w="6350">
+                      <a:solidFill>
+                        <a:srgbClr val="D9D9D9"/>
+                      </a:solidFill>
+                    </a:lnT>
+                    <a:lnB w="6350">
+                      <a:solidFill>
+                        <a:srgbClr val="D9D9D9"/>
+                      </a:solidFill>
+                    </a:lnB>
                     <a:solidFill>
                       <a:srgbClr val="FFFFFF"/>
                     </a:solidFill>
@@ -4800,6 +7090,26 @@
                     </a:p>
                   </a:txBody>
                   <a:tcPr marL="45720" marR="45720" marT="22860" marB="22860" anchor="ctr">
+                    <a:lnL w="6350">
+                      <a:solidFill>
+                        <a:srgbClr val="D9D9D9"/>
+                      </a:solidFill>
+                    </a:lnL>
+                    <a:lnR w="6350">
+                      <a:solidFill>
+                        <a:srgbClr val="D9D9D9"/>
+                      </a:solidFill>
+                    </a:lnR>
+                    <a:lnT w="6350">
+                      <a:solidFill>
+                        <a:srgbClr val="D9D9D9"/>
+                      </a:solidFill>
+                    </a:lnT>
+                    <a:lnB w="6350">
+                      <a:solidFill>
+                        <a:srgbClr val="D9D9D9"/>
+                      </a:solidFill>
+                    </a:lnB>
                     <a:solidFill>
                       <a:srgbClr val="FFFFFF"/>
                     </a:solidFill>
@@ -4823,6 +7133,26 @@
                     </a:p>
                   </a:txBody>
                   <a:tcPr marL="45720" marR="45720" marT="22860" marB="22860" anchor="ctr">
+                    <a:lnL w="6350">
+                      <a:solidFill>
+                        <a:srgbClr val="D9D9D9"/>
+                      </a:solidFill>
+                    </a:lnL>
+                    <a:lnR w="6350">
+                      <a:solidFill>
+                        <a:srgbClr val="D9D9D9"/>
+                      </a:solidFill>
+                    </a:lnR>
+                    <a:lnT w="6350">
+                      <a:solidFill>
+                        <a:srgbClr val="D9D9D9"/>
+                      </a:solidFill>
+                    </a:lnT>
+                    <a:lnB w="6350">
+                      <a:solidFill>
+                        <a:srgbClr val="D9D9D9"/>
+                      </a:solidFill>
+                    </a:lnB>
                     <a:solidFill>
                       <a:srgbClr val="FFFFFF"/>
                     </a:solidFill>
@@ -4848,6 +7178,26 @@
                     </a:p>
                   </a:txBody>
                   <a:tcPr marL="45720" marR="45720" marT="22860" marB="22860" anchor="ctr">
+                    <a:lnL w="6350">
+                      <a:solidFill>
+                        <a:srgbClr val="D9D9D9"/>
+                      </a:solidFill>
+                    </a:lnL>
+                    <a:lnR w="6350">
+                      <a:solidFill>
+                        <a:srgbClr val="D9D9D9"/>
+                      </a:solidFill>
+                    </a:lnR>
+                    <a:lnT w="6350">
+                      <a:solidFill>
+                        <a:srgbClr val="D9D9D9"/>
+                      </a:solidFill>
+                    </a:lnT>
+                    <a:lnB w="6350">
+                      <a:solidFill>
+                        <a:srgbClr val="D9D9D9"/>
+                      </a:solidFill>
+                    </a:lnB>
                     <a:solidFill>
                       <a:srgbClr val="FFFFFF"/>
                     </a:solidFill>
@@ -4871,6 +7221,26 @@
                     </a:p>
                   </a:txBody>
                   <a:tcPr marL="45720" marR="45720" marT="22860" marB="22860" anchor="ctr">
+                    <a:lnL w="6350">
+                      <a:solidFill>
+                        <a:srgbClr val="D9D9D9"/>
+                      </a:solidFill>
+                    </a:lnL>
+                    <a:lnR w="6350">
+                      <a:solidFill>
+                        <a:srgbClr val="D9D9D9"/>
+                      </a:solidFill>
+                    </a:lnR>
+                    <a:lnT w="6350">
+                      <a:solidFill>
+                        <a:srgbClr val="D9D9D9"/>
+                      </a:solidFill>
+                    </a:lnT>
+                    <a:lnB w="6350">
+                      <a:solidFill>
+                        <a:srgbClr val="D9D9D9"/>
+                      </a:solidFill>
+                    </a:lnB>
                     <a:solidFill>
                       <a:srgbClr val="FFFFFF"/>
                     </a:solidFill>
@@ -4894,6 +7264,26 @@
                     </a:p>
                   </a:txBody>
                   <a:tcPr marL="45720" marR="45720" marT="22860" marB="22860" anchor="ctr">
+                    <a:lnL w="6350">
+                      <a:solidFill>
+                        <a:srgbClr val="D9D9D9"/>
+                      </a:solidFill>
+                    </a:lnL>
+                    <a:lnR w="6350">
+                      <a:solidFill>
+                        <a:srgbClr val="D9D9D9"/>
+                      </a:solidFill>
+                    </a:lnR>
+                    <a:lnT w="6350">
+                      <a:solidFill>
+                        <a:srgbClr val="D9D9D9"/>
+                      </a:solidFill>
+                    </a:lnT>
+                    <a:lnB w="6350">
+                      <a:solidFill>
+                        <a:srgbClr val="D9D9D9"/>
+                      </a:solidFill>
+                    </a:lnB>
                     <a:solidFill>
                       <a:srgbClr val="FFFFFF"/>
                     </a:solidFill>
@@ -4917,6 +7307,26 @@
                     </a:p>
                   </a:txBody>
                   <a:tcPr marL="45720" marR="45720" marT="22860" marB="22860" anchor="ctr">
+                    <a:lnL w="6350">
+                      <a:solidFill>
+                        <a:srgbClr val="D9D9D9"/>
+                      </a:solidFill>
+                    </a:lnL>
+                    <a:lnR w="6350">
+                      <a:solidFill>
+                        <a:srgbClr val="D9D9D9"/>
+                      </a:solidFill>
+                    </a:lnR>
+                    <a:lnT w="6350">
+                      <a:solidFill>
+                        <a:srgbClr val="D9D9D9"/>
+                      </a:solidFill>
+                    </a:lnT>
+                    <a:lnB w="6350">
+                      <a:solidFill>
+                        <a:srgbClr val="D9D9D9"/>
+                      </a:solidFill>
+                    </a:lnB>
                     <a:solidFill>
                       <a:srgbClr val="FFFFFF"/>
                     </a:solidFill>
@@ -4940,6 +7350,26 @@
                     </a:p>
                   </a:txBody>
                   <a:tcPr marL="45720" marR="45720" marT="22860" marB="22860" anchor="ctr">
+                    <a:lnL w="6350">
+                      <a:solidFill>
+                        <a:srgbClr val="D9D9D9"/>
+                      </a:solidFill>
+                    </a:lnL>
+                    <a:lnR w="6350">
+                      <a:solidFill>
+                        <a:srgbClr val="D9D9D9"/>
+                      </a:solidFill>
+                    </a:lnR>
+                    <a:lnT w="6350">
+                      <a:solidFill>
+                        <a:srgbClr val="D9D9D9"/>
+                      </a:solidFill>
+                    </a:lnT>
+                    <a:lnB w="6350">
+                      <a:solidFill>
+                        <a:srgbClr val="D9D9D9"/>
+                      </a:solidFill>
+                    </a:lnB>
                     <a:solidFill>
                       <a:srgbClr val="FFFFFF"/>
                     </a:solidFill>
@@ -4965,6 +7395,26 @@
                     </a:p>
                   </a:txBody>
                   <a:tcPr marL="45720" marR="45720" marT="22860" marB="22860" anchor="ctr">
+                    <a:lnL w="6350">
+                      <a:solidFill>
+                        <a:srgbClr val="D9D9D9"/>
+                      </a:solidFill>
+                    </a:lnL>
+                    <a:lnR w="6350">
+                      <a:solidFill>
+                        <a:srgbClr val="D9D9D9"/>
+                      </a:solidFill>
+                    </a:lnR>
+                    <a:lnT w="6350">
+                      <a:solidFill>
+                        <a:srgbClr val="D9D9D9"/>
+                      </a:solidFill>
+                    </a:lnT>
+                    <a:lnB w="6350">
+                      <a:solidFill>
+                        <a:srgbClr val="D9D9D9"/>
+                      </a:solidFill>
+                    </a:lnB>
                     <a:solidFill>
                       <a:srgbClr val="FFFFFF"/>
                     </a:solidFill>
@@ -4988,6 +7438,26 @@
                     </a:p>
                   </a:txBody>
                   <a:tcPr marL="45720" marR="45720" marT="22860" marB="22860" anchor="ctr">
+                    <a:lnL w="6350">
+                      <a:solidFill>
+                        <a:srgbClr val="D9D9D9"/>
+                      </a:solidFill>
+                    </a:lnL>
+                    <a:lnR w="6350">
+                      <a:solidFill>
+                        <a:srgbClr val="D9D9D9"/>
+                      </a:solidFill>
+                    </a:lnR>
+                    <a:lnT w="6350">
+                      <a:solidFill>
+                        <a:srgbClr val="D9D9D9"/>
+                      </a:solidFill>
+                    </a:lnT>
+                    <a:lnB w="6350">
+                      <a:solidFill>
+                        <a:srgbClr val="D9D9D9"/>
+                      </a:solidFill>
+                    </a:lnB>
                     <a:solidFill>
                       <a:srgbClr val="FFFFFF"/>
                     </a:solidFill>
@@ -5011,6 +7481,26 @@
                     </a:p>
                   </a:txBody>
                   <a:tcPr marL="45720" marR="45720" marT="22860" marB="22860" anchor="ctr">
+                    <a:lnL w="6350">
+                      <a:solidFill>
+                        <a:srgbClr val="D9D9D9"/>
+                      </a:solidFill>
+                    </a:lnL>
+                    <a:lnR w="6350">
+                      <a:solidFill>
+                        <a:srgbClr val="D9D9D9"/>
+                      </a:solidFill>
+                    </a:lnR>
+                    <a:lnT w="6350">
+                      <a:solidFill>
+                        <a:srgbClr val="D9D9D9"/>
+                      </a:solidFill>
+                    </a:lnT>
+                    <a:lnB w="6350">
+                      <a:solidFill>
+                        <a:srgbClr val="D9D9D9"/>
+                      </a:solidFill>
+                    </a:lnB>
                     <a:solidFill>
                       <a:srgbClr val="FFFFFF"/>
                     </a:solidFill>
@@ -5034,6 +7524,26 @@
                     </a:p>
                   </a:txBody>
                   <a:tcPr marL="45720" marR="45720" marT="22860" marB="22860" anchor="ctr">
+                    <a:lnL w="6350">
+                      <a:solidFill>
+                        <a:srgbClr val="D9D9D9"/>
+                      </a:solidFill>
+                    </a:lnL>
+                    <a:lnR w="6350">
+                      <a:solidFill>
+                        <a:srgbClr val="D9D9D9"/>
+                      </a:solidFill>
+                    </a:lnR>
+                    <a:lnT w="6350">
+                      <a:solidFill>
+                        <a:srgbClr val="D9D9D9"/>
+                      </a:solidFill>
+                    </a:lnT>
+                    <a:lnB w="6350">
+                      <a:solidFill>
+                        <a:srgbClr val="D9D9D9"/>
+                      </a:solidFill>
+                    </a:lnB>
                     <a:solidFill>
                       <a:srgbClr val="FFFFFF"/>
                     </a:solidFill>
@@ -5057,6 +7567,26 @@
                     </a:p>
                   </a:txBody>
                   <a:tcPr marL="45720" marR="45720" marT="22860" marB="22860" anchor="ctr">
+                    <a:lnL w="6350">
+                      <a:solidFill>
+                        <a:srgbClr val="D9D9D9"/>
+                      </a:solidFill>
+                    </a:lnL>
+                    <a:lnR w="6350">
+                      <a:solidFill>
+                        <a:srgbClr val="D9D9D9"/>
+                      </a:solidFill>
+                    </a:lnR>
+                    <a:lnT w="6350">
+                      <a:solidFill>
+                        <a:srgbClr val="D9D9D9"/>
+                      </a:solidFill>
+                    </a:lnT>
+                    <a:lnB w="6350">
+                      <a:solidFill>
+                        <a:srgbClr val="D9D9D9"/>
+                      </a:solidFill>
+                    </a:lnB>
                     <a:solidFill>
                       <a:srgbClr val="FFFFFF"/>
                     </a:solidFill>
@@ -5082,6 +7612,26 @@
                     </a:p>
                   </a:txBody>
                   <a:tcPr marL="45720" marR="45720" marT="22860" marB="22860" anchor="ctr">
+                    <a:lnL w="6350">
+                      <a:solidFill>
+                        <a:srgbClr val="D9D9D9"/>
+                      </a:solidFill>
+                    </a:lnL>
+                    <a:lnR w="6350">
+                      <a:solidFill>
+                        <a:srgbClr val="D9D9D9"/>
+                      </a:solidFill>
+                    </a:lnR>
+                    <a:lnT w="6350">
+                      <a:solidFill>
+                        <a:srgbClr val="D9D9D9"/>
+                      </a:solidFill>
+                    </a:lnT>
+                    <a:lnB w="6350">
+                      <a:solidFill>
+                        <a:srgbClr val="D9D9D9"/>
+                      </a:solidFill>
+                    </a:lnB>
                     <a:solidFill>
                       <a:srgbClr val="FFFFFF"/>
                     </a:solidFill>
@@ -5105,6 +7655,26 @@
                     </a:p>
                   </a:txBody>
                   <a:tcPr marL="45720" marR="45720" marT="22860" marB="22860" anchor="ctr">
+                    <a:lnL w="6350">
+                      <a:solidFill>
+                        <a:srgbClr val="D9D9D9"/>
+                      </a:solidFill>
+                    </a:lnL>
+                    <a:lnR w="6350">
+                      <a:solidFill>
+                        <a:srgbClr val="D9D9D9"/>
+                      </a:solidFill>
+                    </a:lnR>
+                    <a:lnT w="6350">
+                      <a:solidFill>
+                        <a:srgbClr val="D9D9D9"/>
+                      </a:solidFill>
+                    </a:lnT>
+                    <a:lnB w="6350">
+                      <a:solidFill>
+                        <a:srgbClr val="D9D9D9"/>
+                      </a:solidFill>
+                    </a:lnB>
                     <a:solidFill>
                       <a:srgbClr val="FFFFFF"/>
                     </a:solidFill>
@@ -5128,6 +7698,26 @@
                     </a:p>
                   </a:txBody>
                   <a:tcPr marL="45720" marR="45720" marT="22860" marB="22860" anchor="ctr">
+                    <a:lnL w="6350">
+                      <a:solidFill>
+                        <a:srgbClr val="D9D9D9"/>
+                      </a:solidFill>
+                    </a:lnL>
+                    <a:lnR w="6350">
+                      <a:solidFill>
+                        <a:srgbClr val="D9D9D9"/>
+                      </a:solidFill>
+                    </a:lnR>
+                    <a:lnT w="6350">
+                      <a:solidFill>
+                        <a:srgbClr val="D9D9D9"/>
+                      </a:solidFill>
+                    </a:lnT>
+                    <a:lnB w="6350">
+                      <a:solidFill>
+                        <a:srgbClr val="D9D9D9"/>
+                      </a:solidFill>
+                    </a:lnB>
                     <a:solidFill>
                       <a:srgbClr val="FFFFFF"/>
                     </a:solidFill>
@@ -5151,6 +7741,26 @@
                     </a:p>
                   </a:txBody>
                   <a:tcPr marL="45720" marR="45720" marT="22860" marB="22860" anchor="ctr">
+                    <a:lnL w="6350">
+                      <a:solidFill>
+                        <a:srgbClr val="D9D9D9"/>
+                      </a:solidFill>
+                    </a:lnL>
+                    <a:lnR w="6350">
+                      <a:solidFill>
+                        <a:srgbClr val="D9D9D9"/>
+                      </a:solidFill>
+                    </a:lnR>
+                    <a:lnT w="6350">
+                      <a:solidFill>
+                        <a:srgbClr val="D9D9D9"/>
+                      </a:solidFill>
+                    </a:lnT>
+                    <a:lnB w="6350">
+                      <a:solidFill>
+                        <a:srgbClr val="D9D9D9"/>
+                      </a:solidFill>
+                    </a:lnB>
                     <a:solidFill>
                       <a:srgbClr val="FFFFFF"/>
                     </a:solidFill>
@@ -5174,6 +7784,26 @@
                     </a:p>
                   </a:txBody>
                   <a:tcPr marL="45720" marR="45720" marT="22860" marB="22860" anchor="ctr">
+                    <a:lnL w="6350">
+                      <a:solidFill>
+                        <a:srgbClr val="D9D9D9"/>
+                      </a:solidFill>
+                    </a:lnL>
+                    <a:lnR w="6350">
+                      <a:solidFill>
+                        <a:srgbClr val="D9D9D9"/>
+                      </a:solidFill>
+                    </a:lnR>
+                    <a:lnT w="6350">
+                      <a:solidFill>
+                        <a:srgbClr val="D9D9D9"/>
+                      </a:solidFill>
+                    </a:lnT>
+                    <a:lnB w="6350">
+                      <a:solidFill>
+                        <a:srgbClr val="D9D9D9"/>
+                      </a:solidFill>
+                    </a:lnB>
                     <a:solidFill>
                       <a:srgbClr val="FFFFFF"/>
                     </a:solidFill>
@@ -5199,6 +7829,26 @@
                     </a:p>
                   </a:txBody>
                   <a:tcPr marL="45720" marR="45720" marT="22860" marB="22860" anchor="ctr">
+                    <a:lnL w="6350">
+                      <a:solidFill>
+                        <a:srgbClr val="D9D9D9"/>
+                      </a:solidFill>
+                    </a:lnL>
+                    <a:lnR w="6350">
+                      <a:solidFill>
+                        <a:srgbClr val="D9D9D9"/>
+                      </a:solidFill>
+                    </a:lnR>
+                    <a:lnT w="6350">
+                      <a:solidFill>
+                        <a:srgbClr val="D9D9D9"/>
+                      </a:solidFill>
+                    </a:lnT>
+                    <a:lnB w="6350">
+                      <a:solidFill>
+                        <a:srgbClr val="D9D9D9"/>
+                      </a:solidFill>
+                    </a:lnB>
                     <a:solidFill>
                       <a:srgbClr val="EAF3EF"/>
                     </a:solidFill>
@@ -5222,6 +7872,26 @@
                     </a:p>
                   </a:txBody>
                   <a:tcPr marL="45720" marR="45720" marT="22860" marB="22860" anchor="ctr">
+                    <a:lnL w="6350">
+                      <a:solidFill>
+                        <a:srgbClr val="D9D9D9"/>
+                      </a:solidFill>
+                    </a:lnL>
+                    <a:lnR w="6350">
+                      <a:solidFill>
+                        <a:srgbClr val="D9D9D9"/>
+                      </a:solidFill>
+                    </a:lnR>
+                    <a:lnT w="6350">
+                      <a:solidFill>
+                        <a:srgbClr val="D9D9D9"/>
+                      </a:solidFill>
+                    </a:lnT>
+                    <a:lnB w="6350">
+                      <a:solidFill>
+                        <a:srgbClr val="D9D9D9"/>
+                      </a:solidFill>
+                    </a:lnB>
                     <a:solidFill>
                       <a:srgbClr val="EAF3EF"/>
                     </a:solidFill>
@@ -5245,6 +7915,26 @@
                     </a:p>
                   </a:txBody>
                   <a:tcPr marL="45720" marR="45720" marT="22860" marB="22860" anchor="ctr">
+                    <a:lnL w="6350">
+                      <a:solidFill>
+                        <a:srgbClr val="D9D9D9"/>
+                      </a:solidFill>
+                    </a:lnL>
+                    <a:lnR w="6350">
+                      <a:solidFill>
+                        <a:srgbClr val="D9D9D9"/>
+                      </a:solidFill>
+                    </a:lnR>
+                    <a:lnT w="6350">
+                      <a:solidFill>
+                        <a:srgbClr val="D9D9D9"/>
+                      </a:solidFill>
+                    </a:lnT>
+                    <a:lnB w="6350">
+                      <a:solidFill>
+                        <a:srgbClr val="D9D9D9"/>
+                      </a:solidFill>
+                    </a:lnB>
                     <a:solidFill>
                       <a:srgbClr val="EAF3EF"/>
                     </a:solidFill>
@@ -5268,6 +7958,26 @@
                     </a:p>
                   </a:txBody>
                   <a:tcPr marL="45720" marR="45720" marT="22860" marB="22860" anchor="ctr">
+                    <a:lnL w="6350">
+                      <a:solidFill>
+                        <a:srgbClr val="D9D9D9"/>
+                      </a:solidFill>
+                    </a:lnL>
+                    <a:lnR w="6350">
+                      <a:solidFill>
+                        <a:srgbClr val="D9D9D9"/>
+                      </a:solidFill>
+                    </a:lnR>
+                    <a:lnT w="6350">
+                      <a:solidFill>
+                        <a:srgbClr val="D9D9D9"/>
+                      </a:solidFill>
+                    </a:lnT>
+                    <a:lnB w="6350">
+                      <a:solidFill>
+                        <a:srgbClr val="D9D9D9"/>
+                      </a:solidFill>
+                    </a:lnB>
                     <a:solidFill>
                       <a:srgbClr val="EAF3EF"/>
                     </a:solidFill>
@@ -5291,6 +8001,26 @@
                     </a:p>
                   </a:txBody>
                   <a:tcPr marL="45720" marR="45720" marT="22860" marB="22860" anchor="ctr">
+                    <a:lnL w="6350">
+                      <a:solidFill>
+                        <a:srgbClr val="D9D9D9"/>
+                      </a:solidFill>
+                    </a:lnL>
+                    <a:lnR w="6350">
+                      <a:solidFill>
+                        <a:srgbClr val="D9D9D9"/>
+                      </a:solidFill>
+                    </a:lnR>
+                    <a:lnT w="6350">
+                      <a:solidFill>
+                        <a:srgbClr val="D9D9D9"/>
+                      </a:solidFill>
+                    </a:lnT>
+                    <a:lnB w="6350">
+                      <a:solidFill>
+                        <a:srgbClr val="D9D9D9"/>
+                      </a:solidFill>
+                    </a:lnB>
                     <a:solidFill>
                       <a:srgbClr val="EAF3EF"/>
                     </a:solidFill>
@@ -5512,9 +8242,7 @@
         <a:graphic>
           <a:graphicData uri="http://schemas.openxmlformats.org/drawingml/2006/table">
             <a:tbl>
-              <a:tblPr firstRow="1" bandRow="0">
-                <a:tableStyleId>{5C22544A-7EE6-4342-B048-85BDC9FD1C3A}</a:tableStyleId>
-              </a:tblPr>
+              <a:tblPr firstRow="1" bandRow="0"/>
               <a:tblGrid>
                 <a:gridCol w="1371600"/>
                 <a:gridCol w="3017520"/>
@@ -5540,6 +8268,26 @@
                     </a:p>
                   </a:txBody>
                   <a:tcPr marL="45720" marR="45720" marT="22860" marB="22860" anchor="ctr">
+                    <a:lnL w="6350">
+                      <a:solidFill>
+                        <a:srgbClr val="D9D9D9"/>
+                      </a:solidFill>
+                    </a:lnL>
+                    <a:lnR w="6350">
+                      <a:solidFill>
+                        <a:srgbClr val="D9D9D9"/>
+                      </a:solidFill>
+                    </a:lnR>
+                    <a:lnT w="6350">
+                      <a:solidFill>
+                        <a:srgbClr val="D9D9D9"/>
+                      </a:solidFill>
+                    </a:lnT>
+                    <a:lnB w="6350">
+                      <a:solidFill>
+                        <a:srgbClr val="D9D9D9"/>
+                      </a:solidFill>
+                    </a:lnB>
                     <a:solidFill>
                       <a:srgbClr val="2F3C7E"/>
                     </a:solidFill>
@@ -5563,6 +8311,26 @@
                     </a:p>
                   </a:txBody>
                   <a:tcPr marL="45720" marR="45720" marT="22860" marB="22860" anchor="ctr">
+                    <a:lnL w="6350">
+                      <a:solidFill>
+                        <a:srgbClr val="D9D9D9"/>
+                      </a:solidFill>
+                    </a:lnL>
+                    <a:lnR w="6350">
+                      <a:solidFill>
+                        <a:srgbClr val="D9D9D9"/>
+                      </a:solidFill>
+                    </a:lnR>
+                    <a:lnT w="6350">
+                      <a:solidFill>
+                        <a:srgbClr val="D9D9D9"/>
+                      </a:solidFill>
+                    </a:lnT>
+                    <a:lnB w="6350">
+                      <a:solidFill>
+                        <a:srgbClr val="D9D9D9"/>
+                      </a:solidFill>
+                    </a:lnB>
                     <a:solidFill>
                       <a:srgbClr val="2F3C7E"/>
                     </a:solidFill>
@@ -5586,6 +8354,26 @@
                     </a:p>
                   </a:txBody>
                   <a:tcPr marL="45720" marR="45720" marT="22860" marB="22860" anchor="ctr">
+                    <a:lnL w="6350">
+                      <a:solidFill>
+                        <a:srgbClr val="D9D9D9"/>
+                      </a:solidFill>
+                    </a:lnL>
+                    <a:lnR w="6350">
+                      <a:solidFill>
+                        <a:srgbClr val="D9D9D9"/>
+                      </a:solidFill>
+                    </a:lnR>
+                    <a:lnT w="6350">
+                      <a:solidFill>
+                        <a:srgbClr val="D9D9D9"/>
+                      </a:solidFill>
+                    </a:lnT>
+                    <a:lnB w="6350">
+                      <a:solidFill>
+                        <a:srgbClr val="D9D9D9"/>
+                      </a:solidFill>
+                    </a:lnB>
                     <a:solidFill>
                       <a:srgbClr val="2F3C7E"/>
                     </a:solidFill>
@@ -5609,6 +8397,26 @@
                     </a:p>
                   </a:txBody>
                   <a:tcPr marL="45720" marR="45720" marT="22860" marB="22860" anchor="ctr">
+                    <a:lnL w="6350">
+                      <a:solidFill>
+                        <a:srgbClr val="D9D9D9"/>
+                      </a:solidFill>
+                    </a:lnL>
+                    <a:lnR w="6350">
+                      <a:solidFill>
+                        <a:srgbClr val="D9D9D9"/>
+                      </a:solidFill>
+                    </a:lnR>
+                    <a:lnT w="6350">
+                      <a:solidFill>
+                        <a:srgbClr val="D9D9D9"/>
+                      </a:solidFill>
+                    </a:lnT>
+                    <a:lnB w="6350">
+                      <a:solidFill>
+                        <a:srgbClr val="D9D9D9"/>
+                      </a:solidFill>
+                    </a:lnB>
                     <a:solidFill>
                       <a:srgbClr val="2F3C7E"/>
                     </a:solidFill>
@@ -5634,6 +8442,26 @@
                     </a:p>
                   </a:txBody>
                   <a:tcPr marL="45720" marR="45720" marT="22860" marB="22860" anchor="ctr">
+                    <a:lnL w="6350">
+                      <a:solidFill>
+                        <a:srgbClr val="D9D9D9"/>
+                      </a:solidFill>
+                    </a:lnL>
+                    <a:lnR w="6350">
+                      <a:solidFill>
+                        <a:srgbClr val="D9D9D9"/>
+                      </a:solidFill>
+                    </a:lnR>
+                    <a:lnT w="6350">
+                      <a:solidFill>
+                        <a:srgbClr val="D9D9D9"/>
+                      </a:solidFill>
+                    </a:lnT>
+                    <a:lnB w="6350">
+                      <a:solidFill>
+                        <a:srgbClr val="D9D9D9"/>
+                      </a:solidFill>
+                    </a:lnB>
                     <a:solidFill>
                       <a:srgbClr val="FFFFFF"/>
                     </a:solidFill>
@@ -5657,6 +8485,26 @@
                     </a:p>
                   </a:txBody>
                   <a:tcPr marL="45720" marR="45720" marT="22860" marB="22860" anchor="ctr">
+                    <a:lnL w="6350">
+                      <a:solidFill>
+                        <a:srgbClr val="D9D9D9"/>
+                      </a:solidFill>
+                    </a:lnL>
+                    <a:lnR w="6350">
+                      <a:solidFill>
+                        <a:srgbClr val="D9D9D9"/>
+                      </a:solidFill>
+                    </a:lnR>
+                    <a:lnT w="6350">
+                      <a:solidFill>
+                        <a:srgbClr val="D9D9D9"/>
+                      </a:solidFill>
+                    </a:lnT>
+                    <a:lnB w="6350">
+                      <a:solidFill>
+                        <a:srgbClr val="D9D9D9"/>
+                      </a:solidFill>
+                    </a:lnB>
                     <a:solidFill>
                       <a:srgbClr val="FFFFFF"/>
                     </a:solidFill>
@@ -5680,6 +8528,26 @@
                     </a:p>
                   </a:txBody>
                   <a:tcPr marL="45720" marR="45720" marT="22860" marB="22860" anchor="ctr">
+                    <a:lnL w="6350">
+                      <a:solidFill>
+                        <a:srgbClr val="D9D9D9"/>
+                      </a:solidFill>
+                    </a:lnL>
+                    <a:lnR w="6350">
+                      <a:solidFill>
+                        <a:srgbClr val="D9D9D9"/>
+                      </a:solidFill>
+                    </a:lnR>
+                    <a:lnT w="6350">
+                      <a:solidFill>
+                        <a:srgbClr val="D9D9D9"/>
+                      </a:solidFill>
+                    </a:lnT>
+                    <a:lnB w="6350">
+                      <a:solidFill>
+                        <a:srgbClr val="D9D9D9"/>
+                      </a:solidFill>
+                    </a:lnB>
                     <a:solidFill>
                       <a:srgbClr val="FFFFFF"/>
                     </a:solidFill>
@@ -5703,6 +8571,26 @@
                     </a:p>
                   </a:txBody>
                   <a:tcPr marL="45720" marR="45720" marT="22860" marB="22860" anchor="ctr">
+                    <a:lnL w="6350">
+                      <a:solidFill>
+                        <a:srgbClr val="D9D9D9"/>
+                      </a:solidFill>
+                    </a:lnL>
+                    <a:lnR w="6350">
+                      <a:solidFill>
+                        <a:srgbClr val="D9D9D9"/>
+                      </a:solidFill>
+                    </a:lnR>
+                    <a:lnT w="6350">
+                      <a:solidFill>
+                        <a:srgbClr val="D9D9D9"/>
+                      </a:solidFill>
+                    </a:lnT>
+                    <a:lnB w="6350">
+                      <a:solidFill>
+                        <a:srgbClr val="D9D9D9"/>
+                      </a:solidFill>
+                    </a:lnB>
                     <a:solidFill>
                       <a:srgbClr val="FFFFFF"/>
                     </a:solidFill>
@@ -5728,6 +8616,26 @@
                     </a:p>
                   </a:txBody>
                   <a:tcPr marL="45720" marR="45720" marT="22860" marB="22860" anchor="ctr">
+                    <a:lnL w="6350">
+                      <a:solidFill>
+                        <a:srgbClr val="D9D9D9"/>
+                      </a:solidFill>
+                    </a:lnL>
+                    <a:lnR w="6350">
+                      <a:solidFill>
+                        <a:srgbClr val="D9D9D9"/>
+                      </a:solidFill>
+                    </a:lnR>
+                    <a:lnT w="6350">
+                      <a:solidFill>
+                        <a:srgbClr val="D9D9D9"/>
+                      </a:solidFill>
+                    </a:lnT>
+                    <a:lnB w="6350">
+                      <a:solidFill>
+                        <a:srgbClr val="D9D9D9"/>
+                      </a:solidFill>
+                    </a:lnB>
                     <a:solidFill>
                       <a:srgbClr val="FFFFFF"/>
                     </a:solidFill>
@@ -5751,6 +8659,26 @@
                     </a:p>
                   </a:txBody>
                   <a:tcPr marL="45720" marR="45720" marT="22860" marB="22860" anchor="ctr">
+                    <a:lnL w="6350">
+                      <a:solidFill>
+                        <a:srgbClr val="D9D9D9"/>
+                      </a:solidFill>
+                    </a:lnL>
+                    <a:lnR w="6350">
+                      <a:solidFill>
+                        <a:srgbClr val="D9D9D9"/>
+                      </a:solidFill>
+                    </a:lnR>
+                    <a:lnT w="6350">
+                      <a:solidFill>
+                        <a:srgbClr val="D9D9D9"/>
+                      </a:solidFill>
+                    </a:lnT>
+                    <a:lnB w="6350">
+                      <a:solidFill>
+                        <a:srgbClr val="D9D9D9"/>
+                      </a:solidFill>
+                    </a:lnB>
                     <a:solidFill>
                       <a:srgbClr val="FFFFFF"/>
                     </a:solidFill>
@@ -5774,6 +8702,26 @@
                     </a:p>
                   </a:txBody>
                   <a:tcPr marL="45720" marR="45720" marT="22860" marB="22860" anchor="ctr">
+                    <a:lnL w="6350">
+                      <a:solidFill>
+                        <a:srgbClr val="D9D9D9"/>
+                      </a:solidFill>
+                    </a:lnL>
+                    <a:lnR w="6350">
+                      <a:solidFill>
+                        <a:srgbClr val="D9D9D9"/>
+                      </a:solidFill>
+                    </a:lnR>
+                    <a:lnT w="6350">
+                      <a:solidFill>
+                        <a:srgbClr val="D9D9D9"/>
+                      </a:solidFill>
+                    </a:lnT>
+                    <a:lnB w="6350">
+                      <a:solidFill>
+                        <a:srgbClr val="D9D9D9"/>
+                      </a:solidFill>
+                    </a:lnB>
                     <a:solidFill>
                       <a:srgbClr val="FFFFFF"/>
                     </a:solidFill>
@@ -5797,6 +8745,26 @@
                     </a:p>
                   </a:txBody>
                   <a:tcPr marL="45720" marR="45720" marT="22860" marB="22860" anchor="ctr">
+                    <a:lnL w="6350">
+                      <a:solidFill>
+                        <a:srgbClr val="D9D9D9"/>
+                      </a:solidFill>
+                    </a:lnL>
+                    <a:lnR w="6350">
+                      <a:solidFill>
+                        <a:srgbClr val="D9D9D9"/>
+                      </a:solidFill>
+                    </a:lnR>
+                    <a:lnT w="6350">
+                      <a:solidFill>
+                        <a:srgbClr val="D9D9D9"/>
+                      </a:solidFill>
+                    </a:lnT>
+                    <a:lnB w="6350">
+                      <a:solidFill>
+                        <a:srgbClr val="D9D9D9"/>
+                      </a:solidFill>
+                    </a:lnB>
                     <a:solidFill>
                       <a:srgbClr val="FFFFFF"/>
                     </a:solidFill>
@@ -5822,6 +8790,26 @@
                     </a:p>
                   </a:txBody>
                   <a:tcPr marL="45720" marR="45720" marT="22860" marB="22860" anchor="ctr">
+                    <a:lnL w="6350">
+                      <a:solidFill>
+                        <a:srgbClr val="D9D9D9"/>
+                      </a:solidFill>
+                    </a:lnL>
+                    <a:lnR w="6350">
+                      <a:solidFill>
+                        <a:srgbClr val="D9D9D9"/>
+                      </a:solidFill>
+                    </a:lnR>
+                    <a:lnT w="6350">
+                      <a:solidFill>
+                        <a:srgbClr val="D9D9D9"/>
+                      </a:solidFill>
+                    </a:lnT>
+                    <a:lnB w="6350">
+                      <a:solidFill>
+                        <a:srgbClr val="D9D9D9"/>
+                      </a:solidFill>
+                    </a:lnB>
                     <a:solidFill>
                       <a:srgbClr val="FFFFFF"/>
                     </a:solidFill>
@@ -5845,6 +8833,26 @@
                     </a:p>
                   </a:txBody>
                   <a:tcPr marL="45720" marR="45720" marT="22860" marB="22860" anchor="ctr">
+                    <a:lnL w="6350">
+                      <a:solidFill>
+                        <a:srgbClr val="D9D9D9"/>
+                      </a:solidFill>
+                    </a:lnL>
+                    <a:lnR w="6350">
+                      <a:solidFill>
+                        <a:srgbClr val="D9D9D9"/>
+                      </a:solidFill>
+                    </a:lnR>
+                    <a:lnT w="6350">
+                      <a:solidFill>
+                        <a:srgbClr val="D9D9D9"/>
+                      </a:solidFill>
+                    </a:lnT>
+                    <a:lnB w="6350">
+                      <a:solidFill>
+                        <a:srgbClr val="D9D9D9"/>
+                      </a:solidFill>
+                    </a:lnB>
                     <a:solidFill>
                       <a:srgbClr val="FFFFFF"/>
                     </a:solidFill>
@@ -5868,6 +8876,26 @@
                     </a:p>
                   </a:txBody>
                   <a:tcPr marL="45720" marR="45720" marT="22860" marB="22860" anchor="ctr">
+                    <a:lnL w="6350">
+                      <a:solidFill>
+                        <a:srgbClr val="D9D9D9"/>
+                      </a:solidFill>
+                    </a:lnL>
+                    <a:lnR w="6350">
+                      <a:solidFill>
+                        <a:srgbClr val="D9D9D9"/>
+                      </a:solidFill>
+                    </a:lnR>
+                    <a:lnT w="6350">
+                      <a:solidFill>
+                        <a:srgbClr val="D9D9D9"/>
+                      </a:solidFill>
+                    </a:lnT>
+                    <a:lnB w="6350">
+                      <a:solidFill>
+                        <a:srgbClr val="D9D9D9"/>
+                      </a:solidFill>
+                    </a:lnB>
                     <a:solidFill>
                       <a:srgbClr val="FFFFFF"/>
                     </a:solidFill>
@@ -5891,6 +8919,26 @@
                     </a:p>
                   </a:txBody>
                   <a:tcPr marL="45720" marR="45720" marT="22860" marB="22860" anchor="ctr">
+                    <a:lnL w="6350">
+                      <a:solidFill>
+                        <a:srgbClr val="D9D9D9"/>
+                      </a:solidFill>
+                    </a:lnL>
+                    <a:lnR w="6350">
+                      <a:solidFill>
+                        <a:srgbClr val="D9D9D9"/>
+                      </a:solidFill>
+                    </a:lnR>
+                    <a:lnT w="6350">
+                      <a:solidFill>
+                        <a:srgbClr val="D9D9D9"/>
+                      </a:solidFill>
+                    </a:lnT>
+                    <a:lnB w="6350">
+                      <a:solidFill>
+                        <a:srgbClr val="D9D9D9"/>
+                      </a:solidFill>
+                    </a:lnB>
                     <a:solidFill>
                       <a:srgbClr val="FFFFFF"/>
                     </a:solidFill>
@@ -5916,6 +8964,26 @@
                     </a:p>
                   </a:txBody>
                   <a:tcPr marL="45720" marR="45720" marT="22860" marB="22860" anchor="ctr">
+                    <a:lnL w="6350">
+                      <a:solidFill>
+                        <a:srgbClr val="D9D9D9"/>
+                      </a:solidFill>
+                    </a:lnL>
+                    <a:lnR w="6350">
+                      <a:solidFill>
+                        <a:srgbClr val="D9D9D9"/>
+                      </a:solidFill>
+                    </a:lnR>
+                    <a:lnT w="6350">
+                      <a:solidFill>
+                        <a:srgbClr val="D9D9D9"/>
+                      </a:solidFill>
+                    </a:lnT>
+                    <a:lnB w="6350">
+                      <a:solidFill>
+                        <a:srgbClr val="D9D9D9"/>
+                      </a:solidFill>
+                    </a:lnB>
                     <a:solidFill>
                       <a:srgbClr val="FFFFFF"/>
                     </a:solidFill>
@@ -5939,6 +9007,26 @@
                     </a:p>
                   </a:txBody>
                   <a:tcPr marL="45720" marR="45720" marT="22860" marB="22860" anchor="ctr">
+                    <a:lnL w="6350">
+                      <a:solidFill>
+                        <a:srgbClr val="D9D9D9"/>
+                      </a:solidFill>
+                    </a:lnL>
+                    <a:lnR w="6350">
+                      <a:solidFill>
+                        <a:srgbClr val="D9D9D9"/>
+                      </a:solidFill>
+                    </a:lnR>
+                    <a:lnT w="6350">
+                      <a:solidFill>
+                        <a:srgbClr val="D9D9D9"/>
+                      </a:solidFill>
+                    </a:lnT>
+                    <a:lnB w="6350">
+                      <a:solidFill>
+                        <a:srgbClr val="D9D9D9"/>
+                      </a:solidFill>
+                    </a:lnB>
                     <a:solidFill>
                       <a:srgbClr val="FFFFFF"/>
                     </a:solidFill>
@@ -5962,6 +9050,26 @@
                     </a:p>
                   </a:txBody>
                   <a:tcPr marL="45720" marR="45720" marT="22860" marB="22860" anchor="ctr">
+                    <a:lnL w="6350">
+                      <a:solidFill>
+                        <a:srgbClr val="D9D9D9"/>
+                      </a:solidFill>
+                    </a:lnL>
+                    <a:lnR w="6350">
+                      <a:solidFill>
+                        <a:srgbClr val="D9D9D9"/>
+                      </a:solidFill>
+                    </a:lnR>
+                    <a:lnT w="6350">
+                      <a:solidFill>
+                        <a:srgbClr val="D9D9D9"/>
+                      </a:solidFill>
+                    </a:lnT>
+                    <a:lnB w="6350">
+                      <a:solidFill>
+                        <a:srgbClr val="D9D9D9"/>
+                      </a:solidFill>
+                    </a:lnB>
                     <a:solidFill>
                       <a:srgbClr val="FFFFFF"/>
                     </a:solidFill>
@@ -5985,6 +9093,26 @@
                     </a:p>
                   </a:txBody>
                   <a:tcPr marL="45720" marR="45720" marT="22860" marB="22860" anchor="ctr">
+                    <a:lnL w="6350">
+                      <a:solidFill>
+                        <a:srgbClr val="D9D9D9"/>
+                      </a:solidFill>
+                    </a:lnL>
+                    <a:lnR w="6350">
+                      <a:solidFill>
+                        <a:srgbClr val="D9D9D9"/>
+                      </a:solidFill>
+                    </a:lnR>
+                    <a:lnT w="6350">
+                      <a:solidFill>
+                        <a:srgbClr val="D9D9D9"/>
+                      </a:solidFill>
+                    </a:lnT>
+                    <a:lnB w="6350">
+                      <a:solidFill>
+                        <a:srgbClr val="D9D9D9"/>
+                      </a:solidFill>
+                    </a:lnB>
                     <a:solidFill>
                       <a:srgbClr val="FFFFFF"/>
                     </a:solidFill>
@@ -6010,6 +9138,26 @@
                     </a:p>
                   </a:txBody>
                   <a:tcPr marL="45720" marR="45720" marT="22860" marB="22860" anchor="ctr">
+                    <a:lnL w="6350">
+                      <a:solidFill>
+                        <a:srgbClr val="D9D9D9"/>
+                      </a:solidFill>
+                    </a:lnL>
+                    <a:lnR w="6350">
+                      <a:solidFill>
+                        <a:srgbClr val="D9D9D9"/>
+                      </a:solidFill>
+                    </a:lnR>
+                    <a:lnT w="6350">
+                      <a:solidFill>
+                        <a:srgbClr val="D9D9D9"/>
+                      </a:solidFill>
+                    </a:lnT>
+                    <a:lnB w="6350">
+                      <a:solidFill>
+                        <a:srgbClr val="D9D9D9"/>
+                      </a:solidFill>
+                    </a:lnB>
                     <a:solidFill>
                       <a:srgbClr val="FFFFFF"/>
                     </a:solidFill>
@@ -6033,6 +9181,26 @@
                     </a:p>
                   </a:txBody>
                   <a:tcPr marL="45720" marR="45720" marT="22860" marB="22860" anchor="ctr">
+                    <a:lnL w="6350">
+                      <a:solidFill>
+                        <a:srgbClr val="D9D9D9"/>
+                      </a:solidFill>
+                    </a:lnL>
+                    <a:lnR w="6350">
+                      <a:solidFill>
+                        <a:srgbClr val="D9D9D9"/>
+                      </a:solidFill>
+                    </a:lnR>
+                    <a:lnT w="6350">
+                      <a:solidFill>
+                        <a:srgbClr val="D9D9D9"/>
+                      </a:solidFill>
+                    </a:lnT>
+                    <a:lnB w="6350">
+                      <a:solidFill>
+                        <a:srgbClr val="D9D9D9"/>
+                      </a:solidFill>
+                    </a:lnB>
                     <a:solidFill>
                       <a:srgbClr val="FFFFFF"/>
                     </a:solidFill>
@@ -6056,6 +9224,26 @@
                     </a:p>
                   </a:txBody>
                   <a:tcPr marL="45720" marR="45720" marT="22860" marB="22860" anchor="ctr">
+                    <a:lnL w="6350">
+                      <a:solidFill>
+                        <a:srgbClr val="D9D9D9"/>
+                      </a:solidFill>
+                    </a:lnL>
+                    <a:lnR w="6350">
+                      <a:solidFill>
+                        <a:srgbClr val="D9D9D9"/>
+                      </a:solidFill>
+                    </a:lnR>
+                    <a:lnT w="6350">
+                      <a:solidFill>
+                        <a:srgbClr val="D9D9D9"/>
+                      </a:solidFill>
+                    </a:lnT>
+                    <a:lnB w="6350">
+                      <a:solidFill>
+                        <a:srgbClr val="D9D9D9"/>
+                      </a:solidFill>
+                    </a:lnB>
                     <a:solidFill>
                       <a:srgbClr val="FFFFFF"/>
                     </a:solidFill>
@@ -6079,6 +9267,26 @@
                     </a:p>
                   </a:txBody>
                   <a:tcPr marL="45720" marR="45720" marT="22860" marB="22860" anchor="ctr">
+                    <a:lnL w="6350">
+                      <a:solidFill>
+                        <a:srgbClr val="D9D9D9"/>
+                      </a:solidFill>
+                    </a:lnL>
+                    <a:lnR w="6350">
+                      <a:solidFill>
+                        <a:srgbClr val="D9D9D9"/>
+                      </a:solidFill>
+                    </a:lnR>
+                    <a:lnT w="6350">
+                      <a:solidFill>
+                        <a:srgbClr val="D9D9D9"/>
+                      </a:solidFill>
+                    </a:lnT>
+                    <a:lnB w="6350">
+                      <a:solidFill>
+                        <a:srgbClr val="D9D9D9"/>
+                      </a:solidFill>
+                    </a:lnB>
                     <a:solidFill>
                       <a:srgbClr val="FFFFFF"/>
                     </a:solidFill>
@@ -6139,9 +9347,7 @@
         <a:graphic>
           <a:graphicData uri="http://schemas.openxmlformats.org/drawingml/2006/table">
             <a:tbl>
-              <a:tblPr firstRow="1" bandRow="0">
-                <a:tableStyleId>{5C22544A-7EE6-4342-B048-85BDC9FD1C3A}</a:tableStyleId>
-              </a:tblPr>
+              <a:tblPr firstRow="1" bandRow="0"/>
               <a:tblGrid>
                 <a:gridCol w="3657600"/>
                 <a:gridCol w="2468880"/>
@@ -6167,6 +9373,26 @@
                     </a:p>
                   </a:txBody>
                   <a:tcPr marL="45720" marR="45720" marT="22860" marB="22860" anchor="ctr">
+                    <a:lnL w="6350">
+                      <a:solidFill>
+                        <a:srgbClr val="D9D9D9"/>
+                      </a:solidFill>
+                    </a:lnL>
+                    <a:lnR w="6350">
+                      <a:solidFill>
+                        <a:srgbClr val="D9D9D9"/>
+                      </a:solidFill>
+                    </a:lnR>
+                    <a:lnT w="6350">
+                      <a:solidFill>
+                        <a:srgbClr val="D9D9D9"/>
+                      </a:solidFill>
+                    </a:lnT>
+                    <a:lnB w="6350">
+                      <a:solidFill>
+                        <a:srgbClr val="D9D9D9"/>
+                      </a:solidFill>
+                    </a:lnB>
                     <a:solidFill>
                       <a:srgbClr val="2F3C7E"/>
                     </a:solidFill>
@@ -6190,6 +9416,26 @@
                     </a:p>
                   </a:txBody>
                   <a:tcPr marL="45720" marR="45720" marT="22860" marB="22860" anchor="ctr">
+                    <a:lnL w="6350">
+                      <a:solidFill>
+                        <a:srgbClr val="D9D9D9"/>
+                      </a:solidFill>
+                    </a:lnL>
+                    <a:lnR w="6350">
+                      <a:solidFill>
+                        <a:srgbClr val="D9D9D9"/>
+                      </a:solidFill>
+                    </a:lnR>
+                    <a:lnT w="6350">
+                      <a:solidFill>
+                        <a:srgbClr val="D9D9D9"/>
+                      </a:solidFill>
+                    </a:lnT>
+                    <a:lnB w="6350">
+                      <a:solidFill>
+                        <a:srgbClr val="D9D9D9"/>
+                      </a:solidFill>
+                    </a:lnB>
                     <a:solidFill>
                       <a:srgbClr val="2F3C7E"/>
                     </a:solidFill>
@@ -6213,6 +9459,26 @@
                     </a:p>
                   </a:txBody>
                   <a:tcPr marL="45720" marR="45720" marT="22860" marB="22860" anchor="ctr">
+                    <a:lnL w="6350">
+                      <a:solidFill>
+                        <a:srgbClr val="D9D9D9"/>
+                      </a:solidFill>
+                    </a:lnL>
+                    <a:lnR w="6350">
+                      <a:solidFill>
+                        <a:srgbClr val="D9D9D9"/>
+                      </a:solidFill>
+                    </a:lnR>
+                    <a:lnT w="6350">
+                      <a:solidFill>
+                        <a:srgbClr val="D9D9D9"/>
+                      </a:solidFill>
+                    </a:lnT>
+                    <a:lnB w="6350">
+                      <a:solidFill>
+                        <a:srgbClr val="D9D9D9"/>
+                      </a:solidFill>
+                    </a:lnB>
                     <a:solidFill>
                       <a:srgbClr val="2F3C7E"/>
                     </a:solidFill>
@@ -6236,6 +9502,26 @@
                     </a:p>
                   </a:txBody>
                   <a:tcPr marL="45720" marR="45720" marT="22860" marB="22860" anchor="ctr">
+                    <a:lnL w="6350">
+                      <a:solidFill>
+                        <a:srgbClr val="D9D9D9"/>
+                      </a:solidFill>
+                    </a:lnL>
+                    <a:lnR w="6350">
+                      <a:solidFill>
+                        <a:srgbClr val="D9D9D9"/>
+                      </a:solidFill>
+                    </a:lnR>
+                    <a:lnT w="6350">
+                      <a:solidFill>
+                        <a:srgbClr val="D9D9D9"/>
+                      </a:solidFill>
+                    </a:lnT>
+                    <a:lnB w="6350">
+                      <a:solidFill>
+                        <a:srgbClr val="D9D9D9"/>
+                      </a:solidFill>
+                    </a:lnB>
                     <a:solidFill>
                       <a:srgbClr val="2F3C7E"/>
                     </a:solidFill>
@@ -6261,6 +9547,26 @@
                     </a:p>
                   </a:txBody>
                   <a:tcPr marL="45720" marR="45720" marT="22860" marB="22860" anchor="ctr">
+                    <a:lnL w="6350">
+                      <a:solidFill>
+                        <a:srgbClr val="D9D9D9"/>
+                      </a:solidFill>
+                    </a:lnL>
+                    <a:lnR w="6350">
+                      <a:solidFill>
+                        <a:srgbClr val="D9D9D9"/>
+                      </a:solidFill>
+                    </a:lnR>
+                    <a:lnT w="6350">
+                      <a:solidFill>
+                        <a:srgbClr val="D9D9D9"/>
+                      </a:solidFill>
+                    </a:lnT>
+                    <a:lnB w="6350">
+                      <a:solidFill>
+                        <a:srgbClr val="D9D9D9"/>
+                      </a:solidFill>
+                    </a:lnB>
                     <a:solidFill>
                       <a:srgbClr val="FFFFFF"/>
                     </a:solidFill>
@@ -6284,6 +9590,26 @@
                     </a:p>
                   </a:txBody>
                   <a:tcPr marL="45720" marR="45720" marT="22860" marB="22860" anchor="ctr">
+                    <a:lnL w="6350">
+                      <a:solidFill>
+                        <a:srgbClr val="D9D9D9"/>
+                      </a:solidFill>
+                    </a:lnL>
+                    <a:lnR w="6350">
+                      <a:solidFill>
+                        <a:srgbClr val="D9D9D9"/>
+                      </a:solidFill>
+                    </a:lnR>
+                    <a:lnT w="6350">
+                      <a:solidFill>
+                        <a:srgbClr val="D9D9D9"/>
+                      </a:solidFill>
+                    </a:lnT>
+                    <a:lnB w="6350">
+                      <a:solidFill>
+                        <a:srgbClr val="D9D9D9"/>
+                      </a:solidFill>
+                    </a:lnB>
                     <a:solidFill>
                       <a:srgbClr val="FFFFFF"/>
                     </a:solidFill>
@@ -6307,6 +9633,26 @@
                     </a:p>
                   </a:txBody>
                   <a:tcPr marL="45720" marR="45720" marT="22860" marB="22860" anchor="ctr">
+                    <a:lnL w="6350">
+                      <a:solidFill>
+                        <a:srgbClr val="D9D9D9"/>
+                      </a:solidFill>
+                    </a:lnL>
+                    <a:lnR w="6350">
+                      <a:solidFill>
+                        <a:srgbClr val="D9D9D9"/>
+                      </a:solidFill>
+                    </a:lnR>
+                    <a:lnT w="6350">
+                      <a:solidFill>
+                        <a:srgbClr val="D9D9D9"/>
+                      </a:solidFill>
+                    </a:lnT>
+                    <a:lnB w="6350">
+                      <a:solidFill>
+                        <a:srgbClr val="D9D9D9"/>
+                      </a:solidFill>
+                    </a:lnB>
                     <a:solidFill>
                       <a:srgbClr val="FFFFFF"/>
                     </a:solidFill>
@@ -6330,6 +9676,26 @@
                     </a:p>
                   </a:txBody>
                   <a:tcPr marL="45720" marR="45720" marT="22860" marB="22860" anchor="ctr">
+                    <a:lnL w="6350">
+                      <a:solidFill>
+                        <a:srgbClr val="D9D9D9"/>
+                      </a:solidFill>
+                    </a:lnL>
+                    <a:lnR w="6350">
+                      <a:solidFill>
+                        <a:srgbClr val="D9D9D9"/>
+                      </a:solidFill>
+                    </a:lnR>
+                    <a:lnT w="6350">
+                      <a:solidFill>
+                        <a:srgbClr val="D9D9D9"/>
+                      </a:solidFill>
+                    </a:lnT>
+                    <a:lnB w="6350">
+                      <a:solidFill>
+                        <a:srgbClr val="D9D9D9"/>
+                      </a:solidFill>
+                    </a:lnB>
                     <a:solidFill>
                       <a:srgbClr val="FFFFFF"/>
                     </a:solidFill>
@@ -6355,6 +9721,26 @@
                     </a:p>
                   </a:txBody>
                   <a:tcPr marL="45720" marR="45720" marT="22860" marB="22860" anchor="ctr">
+                    <a:lnL w="6350">
+                      <a:solidFill>
+                        <a:srgbClr val="D9D9D9"/>
+                      </a:solidFill>
+                    </a:lnL>
+                    <a:lnR w="6350">
+                      <a:solidFill>
+                        <a:srgbClr val="D9D9D9"/>
+                      </a:solidFill>
+                    </a:lnR>
+                    <a:lnT w="6350">
+                      <a:solidFill>
+                        <a:srgbClr val="D9D9D9"/>
+                      </a:solidFill>
+                    </a:lnT>
+                    <a:lnB w="6350">
+                      <a:solidFill>
+                        <a:srgbClr val="D9D9D9"/>
+                      </a:solidFill>
+                    </a:lnB>
                     <a:solidFill>
                       <a:srgbClr val="FFFFFF"/>
                     </a:solidFill>
@@ -6378,6 +9764,26 @@
                     </a:p>
                   </a:txBody>
                   <a:tcPr marL="45720" marR="45720" marT="22860" marB="22860" anchor="ctr">
+                    <a:lnL w="6350">
+                      <a:solidFill>
+                        <a:srgbClr val="D9D9D9"/>
+                      </a:solidFill>
+                    </a:lnL>
+                    <a:lnR w="6350">
+                      <a:solidFill>
+                        <a:srgbClr val="D9D9D9"/>
+                      </a:solidFill>
+                    </a:lnR>
+                    <a:lnT w="6350">
+                      <a:solidFill>
+                        <a:srgbClr val="D9D9D9"/>
+                      </a:solidFill>
+                    </a:lnT>
+                    <a:lnB w="6350">
+                      <a:solidFill>
+                        <a:srgbClr val="D9D9D9"/>
+                      </a:solidFill>
+                    </a:lnB>
                     <a:solidFill>
                       <a:srgbClr val="FFFFFF"/>
                     </a:solidFill>
@@ -6401,6 +9807,26 @@
                     </a:p>
                   </a:txBody>
                   <a:tcPr marL="45720" marR="45720" marT="22860" marB="22860" anchor="ctr">
+                    <a:lnL w="6350">
+                      <a:solidFill>
+                        <a:srgbClr val="D9D9D9"/>
+                      </a:solidFill>
+                    </a:lnL>
+                    <a:lnR w="6350">
+                      <a:solidFill>
+                        <a:srgbClr val="D9D9D9"/>
+                      </a:solidFill>
+                    </a:lnR>
+                    <a:lnT w="6350">
+                      <a:solidFill>
+                        <a:srgbClr val="D9D9D9"/>
+                      </a:solidFill>
+                    </a:lnT>
+                    <a:lnB w="6350">
+                      <a:solidFill>
+                        <a:srgbClr val="D9D9D9"/>
+                      </a:solidFill>
+                    </a:lnB>
                     <a:solidFill>
                       <a:srgbClr val="FFFFFF"/>
                     </a:solidFill>
@@ -6424,6 +9850,26 @@
                     </a:p>
                   </a:txBody>
                   <a:tcPr marL="45720" marR="45720" marT="22860" marB="22860" anchor="ctr">
+                    <a:lnL w="6350">
+                      <a:solidFill>
+                        <a:srgbClr val="D9D9D9"/>
+                      </a:solidFill>
+                    </a:lnL>
+                    <a:lnR w="6350">
+                      <a:solidFill>
+                        <a:srgbClr val="D9D9D9"/>
+                      </a:solidFill>
+                    </a:lnR>
+                    <a:lnT w="6350">
+                      <a:solidFill>
+                        <a:srgbClr val="D9D9D9"/>
+                      </a:solidFill>
+                    </a:lnT>
+                    <a:lnB w="6350">
+                      <a:solidFill>
+                        <a:srgbClr val="D9D9D9"/>
+                      </a:solidFill>
+                    </a:lnB>
                     <a:solidFill>
                       <a:srgbClr val="FFFFFF"/>
                     </a:solidFill>
@@ -6449,6 +9895,26 @@
                     </a:p>
                   </a:txBody>
                   <a:tcPr marL="45720" marR="45720" marT="22860" marB="22860" anchor="ctr">
+                    <a:lnL w="6350">
+                      <a:solidFill>
+                        <a:srgbClr val="D9D9D9"/>
+                      </a:solidFill>
+                    </a:lnL>
+                    <a:lnR w="6350">
+                      <a:solidFill>
+                        <a:srgbClr val="D9D9D9"/>
+                      </a:solidFill>
+                    </a:lnR>
+                    <a:lnT w="6350">
+                      <a:solidFill>
+                        <a:srgbClr val="D9D9D9"/>
+                      </a:solidFill>
+                    </a:lnT>
+                    <a:lnB w="6350">
+                      <a:solidFill>
+                        <a:srgbClr val="D9D9D9"/>
+                      </a:solidFill>
+                    </a:lnB>
                     <a:solidFill>
                       <a:srgbClr val="FFFFFF"/>
                     </a:solidFill>
@@ -6472,6 +9938,26 @@
                     </a:p>
                   </a:txBody>
                   <a:tcPr marL="45720" marR="45720" marT="22860" marB="22860" anchor="ctr">
+                    <a:lnL w="6350">
+                      <a:solidFill>
+                        <a:srgbClr val="D9D9D9"/>
+                      </a:solidFill>
+                    </a:lnL>
+                    <a:lnR w="6350">
+                      <a:solidFill>
+                        <a:srgbClr val="D9D9D9"/>
+                      </a:solidFill>
+                    </a:lnR>
+                    <a:lnT w="6350">
+                      <a:solidFill>
+                        <a:srgbClr val="D9D9D9"/>
+                      </a:solidFill>
+                    </a:lnT>
+                    <a:lnB w="6350">
+                      <a:solidFill>
+                        <a:srgbClr val="D9D9D9"/>
+                      </a:solidFill>
+                    </a:lnB>
                     <a:solidFill>
                       <a:srgbClr val="FFFFFF"/>
                     </a:solidFill>
@@ -6495,6 +9981,26 @@
                     </a:p>
                   </a:txBody>
                   <a:tcPr marL="45720" marR="45720" marT="22860" marB="22860" anchor="ctr">
+                    <a:lnL w="6350">
+                      <a:solidFill>
+                        <a:srgbClr val="D9D9D9"/>
+                      </a:solidFill>
+                    </a:lnL>
+                    <a:lnR w="6350">
+                      <a:solidFill>
+                        <a:srgbClr val="D9D9D9"/>
+                      </a:solidFill>
+                    </a:lnR>
+                    <a:lnT w="6350">
+                      <a:solidFill>
+                        <a:srgbClr val="D9D9D9"/>
+                      </a:solidFill>
+                    </a:lnT>
+                    <a:lnB w="6350">
+                      <a:solidFill>
+                        <a:srgbClr val="D9D9D9"/>
+                      </a:solidFill>
+                    </a:lnB>
                     <a:solidFill>
                       <a:srgbClr val="FFFFFF"/>
                     </a:solidFill>
@@ -6518,6 +10024,26 @@
                     </a:p>
                   </a:txBody>
                   <a:tcPr marL="45720" marR="45720" marT="22860" marB="22860" anchor="ctr">
+                    <a:lnL w="6350">
+                      <a:solidFill>
+                        <a:srgbClr val="D9D9D9"/>
+                      </a:solidFill>
+                    </a:lnL>
+                    <a:lnR w="6350">
+                      <a:solidFill>
+                        <a:srgbClr val="D9D9D9"/>
+                      </a:solidFill>
+                    </a:lnR>
+                    <a:lnT w="6350">
+                      <a:solidFill>
+                        <a:srgbClr val="D9D9D9"/>
+                      </a:solidFill>
+                    </a:lnT>
+                    <a:lnB w="6350">
+                      <a:solidFill>
+                        <a:srgbClr val="D9D9D9"/>
+                      </a:solidFill>
+                    </a:lnB>
                     <a:solidFill>
                       <a:srgbClr val="FFFFFF"/>
                     </a:solidFill>
@@ -6543,6 +10069,26 @@
                     </a:p>
                   </a:txBody>
                   <a:tcPr marL="45720" marR="45720" marT="22860" marB="22860" anchor="ctr">
+                    <a:lnL w="6350">
+                      <a:solidFill>
+                        <a:srgbClr val="D9D9D9"/>
+                      </a:solidFill>
+                    </a:lnL>
+                    <a:lnR w="6350">
+                      <a:solidFill>
+                        <a:srgbClr val="D9D9D9"/>
+                      </a:solidFill>
+                    </a:lnR>
+                    <a:lnT w="6350">
+                      <a:solidFill>
+                        <a:srgbClr val="D9D9D9"/>
+                      </a:solidFill>
+                    </a:lnT>
+                    <a:lnB w="6350">
+                      <a:solidFill>
+                        <a:srgbClr val="D9D9D9"/>
+                      </a:solidFill>
+                    </a:lnB>
                     <a:solidFill>
                       <a:srgbClr val="FFFFFF"/>
                     </a:solidFill>
@@ -6566,6 +10112,26 @@
                     </a:p>
                   </a:txBody>
                   <a:tcPr marL="45720" marR="45720" marT="22860" marB="22860" anchor="ctr">
+                    <a:lnL w="6350">
+                      <a:solidFill>
+                        <a:srgbClr val="D9D9D9"/>
+                      </a:solidFill>
+                    </a:lnL>
+                    <a:lnR w="6350">
+                      <a:solidFill>
+                        <a:srgbClr val="D9D9D9"/>
+                      </a:solidFill>
+                    </a:lnR>
+                    <a:lnT w="6350">
+                      <a:solidFill>
+                        <a:srgbClr val="D9D9D9"/>
+                      </a:solidFill>
+                    </a:lnT>
+                    <a:lnB w="6350">
+                      <a:solidFill>
+                        <a:srgbClr val="D9D9D9"/>
+                      </a:solidFill>
+                    </a:lnB>
                     <a:solidFill>
                       <a:srgbClr val="FFFFFF"/>
                     </a:solidFill>
@@ -6589,6 +10155,26 @@
                     </a:p>
                   </a:txBody>
                   <a:tcPr marL="45720" marR="45720" marT="22860" marB="22860" anchor="ctr">
+                    <a:lnL w="6350">
+                      <a:solidFill>
+                        <a:srgbClr val="D9D9D9"/>
+                      </a:solidFill>
+                    </a:lnL>
+                    <a:lnR w="6350">
+                      <a:solidFill>
+                        <a:srgbClr val="D9D9D9"/>
+                      </a:solidFill>
+                    </a:lnR>
+                    <a:lnT w="6350">
+                      <a:solidFill>
+                        <a:srgbClr val="D9D9D9"/>
+                      </a:solidFill>
+                    </a:lnT>
+                    <a:lnB w="6350">
+                      <a:solidFill>
+                        <a:srgbClr val="D9D9D9"/>
+                      </a:solidFill>
+                    </a:lnB>
                     <a:solidFill>
                       <a:srgbClr val="FFFFFF"/>
                     </a:solidFill>
@@ -6612,6 +10198,26 @@
                     </a:p>
                   </a:txBody>
                   <a:tcPr marL="45720" marR="45720" marT="22860" marB="22860" anchor="ctr">
+                    <a:lnL w="6350">
+                      <a:solidFill>
+                        <a:srgbClr val="D9D9D9"/>
+                      </a:solidFill>
+                    </a:lnL>
+                    <a:lnR w="6350">
+                      <a:solidFill>
+                        <a:srgbClr val="D9D9D9"/>
+                      </a:solidFill>
+                    </a:lnR>
+                    <a:lnT w="6350">
+                      <a:solidFill>
+                        <a:srgbClr val="D9D9D9"/>
+                      </a:solidFill>
+                    </a:lnT>
+                    <a:lnB w="6350">
+                      <a:solidFill>
+                        <a:srgbClr val="D9D9D9"/>
+                      </a:solidFill>
+                    </a:lnB>
                     <a:solidFill>
                       <a:srgbClr val="FFFFFF"/>
                     </a:solidFill>
@@ -6768,9 +10374,7 @@
         <a:graphic>
           <a:graphicData uri="http://schemas.openxmlformats.org/drawingml/2006/table">
             <a:tbl>
-              <a:tblPr firstRow="1" bandRow="0">
-                <a:tableStyleId>{5C22544A-7EE6-4342-B048-85BDC9FD1C3A}</a:tableStyleId>
-              </a:tblPr>
+              <a:tblPr firstRow="1" bandRow="0"/>
               <a:tblGrid>
                 <a:gridCol w="5577840"/>
                 <a:gridCol w="2194560"/>
@@ -6796,6 +10400,26 @@
                     </a:p>
                   </a:txBody>
                   <a:tcPr marL="45720" marR="45720" marT="22860" marB="22860" anchor="ctr">
+                    <a:lnL w="6350">
+                      <a:solidFill>
+                        <a:srgbClr val="D9D9D9"/>
+                      </a:solidFill>
+                    </a:lnL>
+                    <a:lnR w="6350">
+                      <a:solidFill>
+                        <a:srgbClr val="D9D9D9"/>
+                      </a:solidFill>
+                    </a:lnR>
+                    <a:lnT w="6350">
+                      <a:solidFill>
+                        <a:srgbClr val="D9D9D9"/>
+                      </a:solidFill>
+                    </a:lnT>
+                    <a:lnB w="6350">
+                      <a:solidFill>
+                        <a:srgbClr val="D9D9D9"/>
+                      </a:solidFill>
+                    </a:lnB>
                     <a:solidFill>
                       <a:srgbClr val="2F3C7E"/>
                     </a:solidFill>
@@ -6819,6 +10443,26 @@
                     </a:p>
                   </a:txBody>
                   <a:tcPr marL="45720" marR="45720" marT="22860" marB="22860" anchor="ctr">
+                    <a:lnL w="6350">
+                      <a:solidFill>
+                        <a:srgbClr val="D9D9D9"/>
+                      </a:solidFill>
+                    </a:lnL>
+                    <a:lnR w="6350">
+                      <a:solidFill>
+                        <a:srgbClr val="D9D9D9"/>
+                      </a:solidFill>
+                    </a:lnR>
+                    <a:lnT w="6350">
+                      <a:solidFill>
+                        <a:srgbClr val="D9D9D9"/>
+                      </a:solidFill>
+                    </a:lnT>
+                    <a:lnB w="6350">
+                      <a:solidFill>
+                        <a:srgbClr val="D9D9D9"/>
+                      </a:solidFill>
+                    </a:lnB>
                     <a:solidFill>
                       <a:srgbClr val="2F3C7E"/>
                     </a:solidFill>
@@ -6842,6 +10486,26 @@
                     </a:p>
                   </a:txBody>
                   <a:tcPr marL="45720" marR="45720" marT="22860" marB="22860" anchor="ctr">
+                    <a:lnL w="6350">
+                      <a:solidFill>
+                        <a:srgbClr val="D9D9D9"/>
+                      </a:solidFill>
+                    </a:lnL>
+                    <a:lnR w="6350">
+                      <a:solidFill>
+                        <a:srgbClr val="D9D9D9"/>
+                      </a:solidFill>
+                    </a:lnR>
+                    <a:lnT w="6350">
+                      <a:solidFill>
+                        <a:srgbClr val="D9D9D9"/>
+                      </a:solidFill>
+                    </a:lnT>
+                    <a:lnB w="6350">
+                      <a:solidFill>
+                        <a:srgbClr val="D9D9D9"/>
+                      </a:solidFill>
+                    </a:lnB>
                     <a:solidFill>
                       <a:srgbClr val="2F3C7E"/>
                     </a:solidFill>
@@ -6865,6 +10529,26 @@
                     </a:p>
                   </a:txBody>
                   <a:tcPr marL="45720" marR="45720" marT="22860" marB="22860" anchor="ctr">
+                    <a:lnL w="6350">
+                      <a:solidFill>
+                        <a:srgbClr val="D9D9D9"/>
+                      </a:solidFill>
+                    </a:lnL>
+                    <a:lnR w="6350">
+                      <a:solidFill>
+                        <a:srgbClr val="D9D9D9"/>
+                      </a:solidFill>
+                    </a:lnR>
+                    <a:lnT w="6350">
+                      <a:solidFill>
+                        <a:srgbClr val="D9D9D9"/>
+                      </a:solidFill>
+                    </a:lnT>
+                    <a:lnB w="6350">
+                      <a:solidFill>
+                        <a:srgbClr val="D9D9D9"/>
+                      </a:solidFill>
+                    </a:lnB>
                     <a:solidFill>
                       <a:srgbClr val="2F3C7E"/>
                     </a:solidFill>
@@ -6890,6 +10574,26 @@
                     </a:p>
                   </a:txBody>
                   <a:tcPr marL="45720" marR="45720" marT="22860" marB="22860" anchor="ctr">
+                    <a:lnL w="6350">
+                      <a:solidFill>
+                        <a:srgbClr val="D9D9D9"/>
+                      </a:solidFill>
+                    </a:lnL>
+                    <a:lnR w="6350">
+                      <a:solidFill>
+                        <a:srgbClr val="D9D9D9"/>
+                      </a:solidFill>
+                    </a:lnR>
+                    <a:lnT w="6350">
+                      <a:solidFill>
+                        <a:srgbClr val="D9D9D9"/>
+                      </a:solidFill>
+                    </a:lnT>
+                    <a:lnB w="6350">
+                      <a:solidFill>
+                        <a:srgbClr val="D9D9D9"/>
+                      </a:solidFill>
+                    </a:lnB>
                     <a:solidFill>
                       <a:srgbClr val="FFFFFF"/>
                     </a:solidFill>
@@ -6913,6 +10617,26 @@
                     </a:p>
                   </a:txBody>
                   <a:tcPr marL="45720" marR="45720" marT="22860" marB="22860" anchor="ctr">
+                    <a:lnL w="6350">
+                      <a:solidFill>
+                        <a:srgbClr val="D9D9D9"/>
+                      </a:solidFill>
+                    </a:lnL>
+                    <a:lnR w="6350">
+                      <a:solidFill>
+                        <a:srgbClr val="D9D9D9"/>
+                      </a:solidFill>
+                    </a:lnR>
+                    <a:lnT w="6350">
+                      <a:solidFill>
+                        <a:srgbClr val="D9D9D9"/>
+                      </a:solidFill>
+                    </a:lnT>
+                    <a:lnB w="6350">
+                      <a:solidFill>
+                        <a:srgbClr val="D9D9D9"/>
+                      </a:solidFill>
+                    </a:lnB>
                     <a:solidFill>
                       <a:srgbClr val="FFFFFF"/>
                     </a:solidFill>
@@ -6936,6 +10660,26 @@
                     </a:p>
                   </a:txBody>
                   <a:tcPr marL="45720" marR="45720" marT="22860" marB="22860" anchor="ctr">
+                    <a:lnL w="6350">
+                      <a:solidFill>
+                        <a:srgbClr val="D9D9D9"/>
+                      </a:solidFill>
+                    </a:lnL>
+                    <a:lnR w="6350">
+                      <a:solidFill>
+                        <a:srgbClr val="D9D9D9"/>
+                      </a:solidFill>
+                    </a:lnR>
+                    <a:lnT w="6350">
+                      <a:solidFill>
+                        <a:srgbClr val="D9D9D9"/>
+                      </a:solidFill>
+                    </a:lnT>
+                    <a:lnB w="6350">
+                      <a:solidFill>
+                        <a:srgbClr val="D9D9D9"/>
+                      </a:solidFill>
+                    </a:lnB>
                     <a:solidFill>
                       <a:srgbClr val="FFFFFF"/>
                     </a:solidFill>
@@ -6959,6 +10703,26 @@
                     </a:p>
                   </a:txBody>
                   <a:tcPr marL="45720" marR="45720" marT="22860" marB="22860" anchor="ctr">
+                    <a:lnL w="6350">
+                      <a:solidFill>
+                        <a:srgbClr val="D9D9D9"/>
+                      </a:solidFill>
+                    </a:lnL>
+                    <a:lnR w="6350">
+                      <a:solidFill>
+                        <a:srgbClr val="D9D9D9"/>
+                      </a:solidFill>
+                    </a:lnR>
+                    <a:lnT w="6350">
+                      <a:solidFill>
+                        <a:srgbClr val="D9D9D9"/>
+                      </a:solidFill>
+                    </a:lnT>
+                    <a:lnB w="6350">
+                      <a:solidFill>
+                        <a:srgbClr val="D9D9D9"/>
+                      </a:solidFill>
+                    </a:lnB>
                     <a:solidFill>
                       <a:srgbClr val="FFFFFF"/>
                     </a:solidFill>
@@ -6984,6 +10748,26 @@
                     </a:p>
                   </a:txBody>
                   <a:tcPr marL="45720" marR="45720" marT="22860" marB="22860" anchor="ctr">
+                    <a:lnL w="6350">
+                      <a:solidFill>
+                        <a:srgbClr val="D9D9D9"/>
+                      </a:solidFill>
+                    </a:lnL>
+                    <a:lnR w="6350">
+                      <a:solidFill>
+                        <a:srgbClr val="D9D9D9"/>
+                      </a:solidFill>
+                    </a:lnR>
+                    <a:lnT w="6350">
+                      <a:solidFill>
+                        <a:srgbClr val="D9D9D9"/>
+                      </a:solidFill>
+                    </a:lnT>
+                    <a:lnB w="6350">
+                      <a:solidFill>
+                        <a:srgbClr val="D9D9D9"/>
+                      </a:solidFill>
+                    </a:lnB>
                     <a:solidFill>
                       <a:srgbClr val="FFFFFF"/>
                     </a:solidFill>
@@ -7007,6 +10791,26 @@
                     </a:p>
                   </a:txBody>
                   <a:tcPr marL="45720" marR="45720" marT="22860" marB="22860" anchor="ctr">
+                    <a:lnL w="6350">
+                      <a:solidFill>
+                        <a:srgbClr val="D9D9D9"/>
+                      </a:solidFill>
+                    </a:lnL>
+                    <a:lnR w="6350">
+                      <a:solidFill>
+                        <a:srgbClr val="D9D9D9"/>
+                      </a:solidFill>
+                    </a:lnR>
+                    <a:lnT w="6350">
+                      <a:solidFill>
+                        <a:srgbClr val="D9D9D9"/>
+                      </a:solidFill>
+                    </a:lnT>
+                    <a:lnB w="6350">
+                      <a:solidFill>
+                        <a:srgbClr val="D9D9D9"/>
+                      </a:solidFill>
+                    </a:lnB>
                     <a:solidFill>
                       <a:srgbClr val="FFFFFF"/>
                     </a:solidFill>
@@ -7030,6 +10834,26 @@
                     </a:p>
                   </a:txBody>
                   <a:tcPr marL="45720" marR="45720" marT="22860" marB="22860" anchor="ctr">
+                    <a:lnL w="6350">
+                      <a:solidFill>
+                        <a:srgbClr val="D9D9D9"/>
+                      </a:solidFill>
+                    </a:lnL>
+                    <a:lnR w="6350">
+                      <a:solidFill>
+                        <a:srgbClr val="D9D9D9"/>
+                      </a:solidFill>
+                    </a:lnR>
+                    <a:lnT w="6350">
+                      <a:solidFill>
+                        <a:srgbClr val="D9D9D9"/>
+                      </a:solidFill>
+                    </a:lnT>
+                    <a:lnB w="6350">
+                      <a:solidFill>
+                        <a:srgbClr val="D9D9D9"/>
+                      </a:solidFill>
+                    </a:lnB>
                     <a:solidFill>
                       <a:srgbClr val="FFFFFF"/>
                     </a:solidFill>
@@ -7053,6 +10877,26 @@
                     </a:p>
                   </a:txBody>
                   <a:tcPr marL="45720" marR="45720" marT="22860" marB="22860" anchor="ctr">
+                    <a:lnL w="6350">
+                      <a:solidFill>
+                        <a:srgbClr val="D9D9D9"/>
+                      </a:solidFill>
+                    </a:lnL>
+                    <a:lnR w="6350">
+                      <a:solidFill>
+                        <a:srgbClr val="D9D9D9"/>
+                      </a:solidFill>
+                    </a:lnR>
+                    <a:lnT w="6350">
+                      <a:solidFill>
+                        <a:srgbClr val="D9D9D9"/>
+                      </a:solidFill>
+                    </a:lnT>
+                    <a:lnB w="6350">
+                      <a:solidFill>
+                        <a:srgbClr val="D9D9D9"/>
+                      </a:solidFill>
+                    </a:lnB>
                     <a:solidFill>
                       <a:srgbClr val="FFFFFF"/>
                     </a:solidFill>
@@ -7078,6 +10922,26 @@
                     </a:p>
                   </a:txBody>
                   <a:tcPr marL="45720" marR="45720" marT="22860" marB="22860" anchor="ctr">
+                    <a:lnL w="6350">
+                      <a:solidFill>
+                        <a:srgbClr val="D9D9D9"/>
+                      </a:solidFill>
+                    </a:lnL>
+                    <a:lnR w="6350">
+                      <a:solidFill>
+                        <a:srgbClr val="D9D9D9"/>
+                      </a:solidFill>
+                    </a:lnR>
+                    <a:lnT w="6350">
+                      <a:solidFill>
+                        <a:srgbClr val="D9D9D9"/>
+                      </a:solidFill>
+                    </a:lnT>
+                    <a:lnB w="6350">
+                      <a:solidFill>
+                        <a:srgbClr val="D9D9D9"/>
+                      </a:solidFill>
+                    </a:lnB>
                     <a:solidFill>
                       <a:srgbClr val="FFFFFF"/>
                     </a:solidFill>
@@ -7101,6 +10965,26 @@
                     </a:p>
                   </a:txBody>
                   <a:tcPr marL="45720" marR="45720" marT="22860" marB="22860" anchor="ctr">
+                    <a:lnL w="6350">
+                      <a:solidFill>
+                        <a:srgbClr val="D9D9D9"/>
+                      </a:solidFill>
+                    </a:lnL>
+                    <a:lnR w="6350">
+                      <a:solidFill>
+                        <a:srgbClr val="D9D9D9"/>
+                      </a:solidFill>
+                    </a:lnR>
+                    <a:lnT w="6350">
+                      <a:solidFill>
+                        <a:srgbClr val="D9D9D9"/>
+                      </a:solidFill>
+                    </a:lnT>
+                    <a:lnB w="6350">
+                      <a:solidFill>
+                        <a:srgbClr val="D9D9D9"/>
+                      </a:solidFill>
+                    </a:lnB>
                     <a:solidFill>
                       <a:srgbClr val="FFFFFF"/>
                     </a:solidFill>
@@ -7124,6 +11008,26 @@
                     </a:p>
                   </a:txBody>
                   <a:tcPr marL="45720" marR="45720" marT="22860" marB="22860" anchor="ctr">
+                    <a:lnL w="6350">
+                      <a:solidFill>
+                        <a:srgbClr val="D9D9D9"/>
+                      </a:solidFill>
+                    </a:lnL>
+                    <a:lnR w="6350">
+                      <a:solidFill>
+                        <a:srgbClr val="D9D9D9"/>
+                      </a:solidFill>
+                    </a:lnR>
+                    <a:lnT w="6350">
+                      <a:solidFill>
+                        <a:srgbClr val="D9D9D9"/>
+                      </a:solidFill>
+                    </a:lnT>
+                    <a:lnB w="6350">
+                      <a:solidFill>
+                        <a:srgbClr val="D9D9D9"/>
+                      </a:solidFill>
+                    </a:lnB>
                     <a:solidFill>
                       <a:srgbClr val="FFFFFF"/>
                     </a:solidFill>
@@ -7147,6 +11051,26 @@
                     </a:p>
                   </a:txBody>
                   <a:tcPr marL="45720" marR="45720" marT="22860" marB="22860" anchor="ctr">
+                    <a:lnL w="6350">
+                      <a:solidFill>
+                        <a:srgbClr val="D9D9D9"/>
+                      </a:solidFill>
+                    </a:lnL>
+                    <a:lnR w="6350">
+                      <a:solidFill>
+                        <a:srgbClr val="D9D9D9"/>
+                      </a:solidFill>
+                    </a:lnR>
+                    <a:lnT w="6350">
+                      <a:solidFill>
+                        <a:srgbClr val="D9D9D9"/>
+                      </a:solidFill>
+                    </a:lnT>
+                    <a:lnB w="6350">
+                      <a:solidFill>
+                        <a:srgbClr val="D9D9D9"/>
+                      </a:solidFill>
+                    </a:lnB>
                     <a:solidFill>
                       <a:srgbClr val="FFFFFF"/>
                     </a:solidFill>
@@ -7172,6 +11096,26 @@
                     </a:p>
                   </a:txBody>
                   <a:tcPr marL="45720" marR="45720" marT="22860" marB="22860" anchor="ctr">
+                    <a:lnL w="6350">
+                      <a:solidFill>
+                        <a:srgbClr val="D9D9D9"/>
+                      </a:solidFill>
+                    </a:lnL>
+                    <a:lnR w="6350">
+                      <a:solidFill>
+                        <a:srgbClr val="D9D9D9"/>
+                      </a:solidFill>
+                    </a:lnR>
+                    <a:lnT w="6350">
+                      <a:solidFill>
+                        <a:srgbClr val="D9D9D9"/>
+                      </a:solidFill>
+                    </a:lnT>
+                    <a:lnB w="6350">
+                      <a:solidFill>
+                        <a:srgbClr val="D9D9D9"/>
+                      </a:solidFill>
+                    </a:lnB>
                     <a:solidFill>
                       <a:srgbClr val="FFFFFF"/>
                     </a:solidFill>
@@ -7195,6 +11139,26 @@
                     </a:p>
                   </a:txBody>
                   <a:tcPr marL="45720" marR="45720" marT="22860" marB="22860" anchor="ctr">
+                    <a:lnL w="6350">
+                      <a:solidFill>
+                        <a:srgbClr val="D9D9D9"/>
+                      </a:solidFill>
+                    </a:lnL>
+                    <a:lnR w="6350">
+                      <a:solidFill>
+                        <a:srgbClr val="D9D9D9"/>
+                      </a:solidFill>
+                    </a:lnR>
+                    <a:lnT w="6350">
+                      <a:solidFill>
+                        <a:srgbClr val="D9D9D9"/>
+                      </a:solidFill>
+                    </a:lnT>
+                    <a:lnB w="6350">
+                      <a:solidFill>
+                        <a:srgbClr val="D9D9D9"/>
+                      </a:solidFill>
+                    </a:lnB>
                     <a:solidFill>
                       <a:srgbClr val="FFFFFF"/>
                     </a:solidFill>
@@ -7218,6 +11182,26 @@
                     </a:p>
                   </a:txBody>
                   <a:tcPr marL="45720" marR="45720" marT="22860" marB="22860" anchor="ctr">
+                    <a:lnL w="6350">
+                      <a:solidFill>
+                        <a:srgbClr val="D9D9D9"/>
+                      </a:solidFill>
+                    </a:lnL>
+                    <a:lnR w="6350">
+                      <a:solidFill>
+                        <a:srgbClr val="D9D9D9"/>
+                      </a:solidFill>
+                    </a:lnR>
+                    <a:lnT w="6350">
+                      <a:solidFill>
+                        <a:srgbClr val="D9D9D9"/>
+                      </a:solidFill>
+                    </a:lnT>
+                    <a:lnB w="6350">
+                      <a:solidFill>
+                        <a:srgbClr val="D9D9D9"/>
+                      </a:solidFill>
+                    </a:lnB>
                     <a:solidFill>
                       <a:srgbClr val="FFFFFF"/>
                     </a:solidFill>
@@ -7241,6 +11225,26 @@
                     </a:p>
                   </a:txBody>
                   <a:tcPr marL="45720" marR="45720" marT="22860" marB="22860" anchor="ctr">
+                    <a:lnL w="6350">
+                      <a:solidFill>
+                        <a:srgbClr val="D9D9D9"/>
+                      </a:solidFill>
+                    </a:lnL>
+                    <a:lnR w="6350">
+                      <a:solidFill>
+                        <a:srgbClr val="D9D9D9"/>
+                      </a:solidFill>
+                    </a:lnR>
+                    <a:lnT w="6350">
+                      <a:solidFill>
+                        <a:srgbClr val="D9D9D9"/>
+                      </a:solidFill>
+                    </a:lnT>
+                    <a:lnB w="6350">
+                      <a:solidFill>
+                        <a:srgbClr val="D9D9D9"/>
+                      </a:solidFill>
+                    </a:lnB>
                     <a:solidFill>
                       <a:srgbClr val="FFFFFF"/>
                     </a:solidFill>
@@ -7266,6 +11270,26 @@
                     </a:p>
                   </a:txBody>
                   <a:tcPr marL="45720" marR="45720" marT="22860" marB="22860" anchor="ctr">
+                    <a:lnL w="6350">
+                      <a:solidFill>
+                        <a:srgbClr val="D9D9D9"/>
+                      </a:solidFill>
+                    </a:lnL>
+                    <a:lnR w="6350">
+                      <a:solidFill>
+                        <a:srgbClr val="D9D9D9"/>
+                      </a:solidFill>
+                    </a:lnR>
+                    <a:lnT w="6350">
+                      <a:solidFill>
+                        <a:srgbClr val="D9D9D9"/>
+                      </a:solidFill>
+                    </a:lnT>
+                    <a:lnB w="6350">
+                      <a:solidFill>
+                        <a:srgbClr val="D9D9D9"/>
+                      </a:solidFill>
+                    </a:lnB>
                     <a:solidFill>
                       <a:srgbClr val="FFFFFF"/>
                     </a:solidFill>
@@ -7289,6 +11313,26 @@
                     </a:p>
                   </a:txBody>
                   <a:tcPr marL="45720" marR="45720" marT="22860" marB="22860" anchor="ctr">
+                    <a:lnL w="6350">
+                      <a:solidFill>
+                        <a:srgbClr val="D9D9D9"/>
+                      </a:solidFill>
+                    </a:lnL>
+                    <a:lnR w="6350">
+                      <a:solidFill>
+                        <a:srgbClr val="D9D9D9"/>
+                      </a:solidFill>
+                    </a:lnR>
+                    <a:lnT w="6350">
+                      <a:solidFill>
+                        <a:srgbClr val="D9D9D9"/>
+                      </a:solidFill>
+                    </a:lnT>
+                    <a:lnB w="6350">
+                      <a:solidFill>
+                        <a:srgbClr val="D9D9D9"/>
+                      </a:solidFill>
+                    </a:lnB>
                     <a:solidFill>
                       <a:srgbClr val="FFFFFF"/>
                     </a:solidFill>
@@ -7312,6 +11356,26 @@
                     </a:p>
                   </a:txBody>
                   <a:tcPr marL="45720" marR="45720" marT="22860" marB="22860" anchor="ctr">
+                    <a:lnL w="6350">
+                      <a:solidFill>
+                        <a:srgbClr val="D9D9D9"/>
+                      </a:solidFill>
+                    </a:lnL>
+                    <a:lnR w="6350">
+                      <a:solidFill>
+                        <a:srgbClr val="D9D9D9"/>
+                      </a:solidFill>
+                    </a:lnR>
+                    <a:lnT w="6350">
+                      <a:solidFill>
+                        <a:srgbClr val="D9D9D9"/>
+                      </a:solidFill>
+                    </a:lnT>
+                    <a:lnB w="6350">
+                      <a:solidFill>
+                        <a:srgbClr val="D9D9D9"/>
+                      </a:solidFill>
+                    </a:lnB>
                     <a:solidFill>
                       <a:srgbClr val="FFFFFF"/>
                     </a:solidFill>
@@ -7335,6 +11399,26 @@
                     </a:p>
                   </a:txBody>
                   <a:tcPr marL="45720" marR="45720" marT="22860" marB="22860" anchor="ctr">
+                    <a:lnL w="6350">
+                      <a:solidFill>
+                        <a:srgbClr val="D9D9D9"/>
+                      </a:solidFill>
+                    </a:lnL>
+                    <a:lnR w="6350">
+                      <a:solidFill>
+                        <a:srgbClr val="D9D9D9"/>
+                      </a:solidFill>
+                    </a:lnR>
+                    <a:lnT w="6350">
+                      <a:solidFill>
+                        <a:srgbClr val="D9D9D9"/>
+                      </a:solidFill>
+                    </a:lnT>
+                    <a:lnB w="6350">
+                      <a:solidFill>
+                        <a:srgbClr val="D9D9D9"/>
+                      </a:solidFill>
+                    </a:lnB>
                     <a:solidFill>
                       <a:srgbClr val="FFFFFF"/>
                     </a:solidFill>
@@ -7360,6 +11444,26 @@
                     </a:p>
                   </a:txBody>
                   <a:tcPr marL="45720" marR="45720" marT="22860" marB="22860" anchor="ctr">
+                    <a:lnL w="6350">
+                      <a:solidFill>
+                        <a:srgbClr val="D9D9D9"/>
+                      </a:solidFill>
+                    </a:lnL>
+                    <a:lnR w="6350">
+                      <a:solidFill>
+                        <a:srgbClr val="D9D9D9"/>
+                      </a:solidFill>
+                    </a:lnR>
+                    <a:lnT w="6350">
+                      <a:solidFill>
+                        <a:srgbClr val="D9D9D9"/>
+                      </a:solidFill>
+                    </a:lnT>
+                    <a:lnB w="6350">
+                      <a:solidFill>
+                        <a:srgbClr val="D9D9D9"/>
+                      </a:solidFill>
+                    </a:lnB>
                     <a:solidFill>
                       <a:srgbClr val="FFFFFF"/>
                     </a:solidFill>
@@ -7383,6 +11487,26 @@
                     </a:p>
                   </a:txBody>
                   <a:tcPr marL="45720" marR="45720" marT="22860" marB="22860" anchor="ctr">
+                    <a:lnL w="6350">
+                      <a:solidFill>
+                        <a:srgbClr val="D9D9D9"/>
+                      </a:solidFill>
+                    </a:lnL>
+                    <a:lnR w="6350">
+                      <a:solidFill>
+                        <a:srgbClr val="D9D9D9"/>
+                      </a:solidFill>
+                    </a:lnR>
+                    <a:lnT w="6350">
+                      <a:solidFill>
+                        <a:srgbClr val="D9D9D9"/>
+                      </a:solidFill>
+                    </a:lnT>
+                    <a:lnB w="6350">
+                      <a:solidFill>
+                        <a:srgbClr val="D9D9D9"/>
+                      </a:solidFill>
+                    </a:lnB>
                     <a:solidFill>
                       <a:srgbClr val="FFFFFF"/>
                     </a:solidFill>
@@ -7406,6 +11530,26 @@
                     </a:p>
                   </a:txBody>
                   <a:tcPr marL="45720" marR="45720" marT="22860" marB="22860" anchor="ctr">
+                    <a:lnL w="6350">
+                      <a:solidFill>
+                        <a:srgbClr val="D9D9D9"/>
+                      </a:solidFill>
+                    </a:lnL>
+                    <a:lnR w="6350">
+                      <a:solidFill>
+                        <a:srgbClr val="D9D9D9"/>
+                      </a:solidFill>
+                    </a:lnR>
+                    <a:lnT w="6350">
+                      <a:solidFill>
+                        <a:srgbClr val="D9D9D9"/>
+                      </a:solidFill>
+                    </a:lnT>
+                    <a:lnB w="6350">
+                      <a:solidFill>
+                        <a:srgbClr val="D9D9D9"/>
+                      </a:solidFill>
+                    </a:lnB>
                     <a:solidFill>
                       <a:srgbClr val="FFFFFF"/>
                     </a:solidFill>
@@ -7429,6 +11573,26 @@
                     </a:p>
                   </a:txBody>
                   <a:tcPr marL="45720" marR="45720" marT="22860" marB="22860" anchor="ctr">
+                    <a:lnL w="6350">
+                      <a:solidFill>
+                        <a:srgbClr val="D9D9D9"/>
+                      </a:solidFill>
+                    </a:lnL>
+                    <a:lnR w="6350">
+                      <a:solidFill>
+                        <a:srgbClr val="D9D9D9"/>
+                      </a:solidFill>
+                    </a:lnR>
+                    <a:lnT w="6350">
+                      <a:solidFill>
+                        <a:srgbClr val="D9D9D9"/>
+                      </a:solidFill>
+                    </a:lnT>
+                    <a:lnB w="6350">
+                      <a:solidFill>
+                        <a:srgbClr val="D9D9D9"/>
+                      </a:solidFill>
+                    </a:lnB>
                     <a:solidFill>
                       <a:srgbClr val="FFFFFF"/>
                     </a:solidFill>

--- a/reports/MT_vs_GT_Deep_Dive.pptx
+++ b/reports/MT_vs_GT_Deep_Dive.pptx
@@ -75,6 +75,29 @@
   <p:sldLayoutIdLst>
     <p:sldLayoutId id="2147483649" r:id="rIdLayout1"/>
   </p:sldLayoutIdLst>
+  <p:txStyles>
+    <p:titleStyle>
+      <a:lvl1pPr>
+        <a:defRPr sz="4400">
+          <a:latin typeface="Cambria"/>
+        </a:defRPr>
+      </a:lvl1pPr>
+    </p:titleStyle>
+    <p:bodyStyle>
+      <a:lvl1pPr>
+        <a:defRPr sz="1800">
+          <a:latin typeface="Calibri"/>
+        </a:defRPr>
+      </a:lvl1pPr>
+    </p:bodyStyle>
+    <p:otherStyle>
+      <a:lvl1pPr>
+        <a:defRPr sz="1800">
+          <a:latin typeface="Calibri"/>
+        </a:defRPr>
+      </a:lvl1pPr>
+    </p:otherStyle>
+  </p:txStyles>
 </p:sldMaster>
 </file>
 
